--- a/docs/deck/DevMemory.pptx
+++ b/docs/deck/DevMemory.pptx
@@ -8337,7 +8337,7 @@
                 <a:ea typeface="Calibri" pitchFamily="34" charset="-122"/>
                 <a:cs typeface="Calibri" pitchFamily="34" charset="-120"/>
               </a:rPr>
-              <a:t>Round 2 (fixed retrieval) is running — result to be added</a:t>
+              <a:t>Round 2: all 8/8, no fixes. DevMemory cheapest: $0.74, 580k tok (vs 633k / 847k)</a:t>
             </a:r>
             <a:endParaRPr lang="en-US" sz="1300" dirty="0"/>
           </a:p>

--- a/docs/deck/DevMemory.pptx
+++ b/docs/deck/DevMemory.pptx
@@ -142,7 +142,7 @@
                 </a:solidFill>
                 <a:latin typeface="Calibri"/>
               </a:rPr>
-              <a:t>Pass rate on 12 unseen tasks (%)</a:t>
+              <a:t>Pass rate on held-out tasks (%)</a:t>
             </a:r>
           </a:p>
         </c:rich>
@@ -166,7 +166,7 @@
               <c:strCache>
                 <c:ptCount val="1"/>
                 <c:pt idx="0">
-                  <c:v>Pass rate on 12 unseen tasks (%)</c:v>
+                  <c:v>Set 1 (12 tasks)</c:v>
                 </c:pt>
               </c:strCache>
             </c:strRef>
@@ -185,7 +185,7 @@
               <a:lstStyle/>
               <a:p>
                 <a:pPr>
-                  <a:defRPr b="0" i="0" strike="noStrike" sz="1200" u="none">
+                  <a:defRPr b="0" i="0" strike="noStrike" sz="1100" u="none">
                     <a:solidFill>
                       <a:srgbClr val="EDEDED"/>
                     </a:solidFill>
@@ -202,66 +202,11 @@
             <c:showBubbleSize val="0"/>
             <c:showLeaderLines val="0"/>
           </c:dLbls>
-          <c:dPt>
-            <c:idx val="0"/>
-            <c:invertIfNegative val="0"/>
-            <c:bubble3D val="0"/>
-            <c:spPr>
-              <a:solidFill>
-                <a:srgbClr val="5A606B"/>
-              </a:solidFill>
-              <a:effectLst/>
-            </c:spPr>
-          </c:dPt>
-          <c:dPt>
-            <c:idx val="1"/>
-            <c:invertIfNegative val="0"/>
-            <c:bubble3D val="0"/>
-            <c:spPr>
-              <a:solidFill>
-                <a:srgbClr val="5A606B"/>
-              </a:solidFill>
-              <a:effectLst/>
-            </c:spPr>
-          </c:dPt>
-          <c:dPt>
-            <c:idx val="2"/>
-            <c:invertIfNegative val="0"/>
-            <c:bubble3D val="0"/>
-            <c:spPr>
-              <a:solidFill>
-                <a:srgbClr val="5A606B"/>
-              </a:solidFill>
-              <a:effectLst/>
-            </c:spPr>
-          </c:dPt>
-          <c:dPt>
-            <c:idx val="3"/>
-            <c:invertIfNegative val="0"/>
-            <c:bubble3D val="0"/>
-            <c:spPr>
-              <a:solidFill>
-                <a:srgbClr val="8B7CF6"/>
-              </a:solidFill>
-              <a:effectLst/>
-            </c:spPr>
-          </c:dPt>
-          <c:dPt>
-            <c:idx val="4"/>
-            <c:invertIfNegative val="0"/>
-            <c:bubble3D val="0"/>
-            <c:spPr>
-              <a:solidFill>
-                <a:srgbClr val="5A606B"/>
-              </a:solidFill>
-              <a:effectLst/>
-            </c:spPr>
-          </c:dPt>
           <c:cat>
             <c:multiLvlStrRef>
-              <c:f>Sheet1!$A$2:$A$6</c:f>
+              <c:f>Sheet1!$A$2:$A$5</c:f>
               <c:multiLvlStrCache>
-                <c:ptCount val="5"/>
+                <c:ptCount val="4"/>
                 <c:lvl>
                   <c:pt idx="0">
                     <c:v>C0 bare</c:v>
@@ -275,19 +220,16 @@
                   <c:pt idx="3">
                     <c:v>C3 DevMemory</c:v>
                   </c:pt>
-                  <c:pt idx="4">
-                    <c:v>Sonnet bare</c:v>
-                  </c:pt>
                 </c:lvl>
               </c:multiLvlStrCache>
             </c:multiLvlStrRef>
           </c:cat>
           <c:val>
             <c:numRef>
-              <c:f>Sheet1!$B$2:$B$6</c:f>
+              <c:f>Sheet1!$B$2:$B$5</c:f>
               <c:numCache>
                 <c:formatCode>General</c:formatCode>
-                <c:ptCount val="5"/>
+                <c:ptCount val="4"/>
                 <c:pt idx="0">
                   <c:v>67</c:v>
                 </c:pt>
@@ -298,10 +240,96 @@
                   <c:v>64</c:v>
                 </c:pt>
                 <c:pt idx="3">
-                  <c:v>86</c:v>
+                  <c:v>83</c:v>
                 </c:pt>
-                <c:pt idx="4">
-                  <c:v>75</c:v>
+              </c:numCache>
+            </c:numRef>
+          </c:val>
+        </c:ser>
+        <c:ser>
+          <c:idx val="1"/>
+          <c:order val="1"/>
+          <c:tx>
+            <c:strRef>
+              <c:f>Sheet1!$C$1</c:f>
+              <c:strCache>
+                <c:ptCount val="1"/>
+                <c:pt idx="0">
+                  <c:v>Set 2 (16 tasks)</c:v>
+                </c:pt>
+              </c:strCache>
+            </c:strRef>
+          </c:tx>
+          <c:spPr>
+            <a:solidFill>
+              <a:srgbClr val="8B7CF6"/>
+            </a:solidFill>
+            <a:effectLst/>
+          </c:spPr>
+          <c:invertIfNegative val="0"/>
+          <c:dLbls>
+            <c:numFmt formatCode="0" sourceLinked="0"/>
+            <c:txPr>
+              <a:bodyPr/>
+              <a:lstStyle/>
+              <a:p>
+                <a:pPr>
+                  <a:defRPr b="0" i="0" strike="noStrike" sz="1100" u="none">
+                    <a:solidFill>
+                      <a:srgbClr val="EDEDED"/>
+                    </a:solidFill>
+                    <a:latin typeface="Calibri"/>
+                  </a:defRPr>
+                </a:pPr>
+              </a:p>
+            </c:txPr>
+            <c:showLegendKey val="0"/>
+            <c:showVal val="1"/>
+            <c:showCatName val="0"/>
+            <c:showSerName val="0"/>
+            <c:showPercent val="0"/>
+            <c:showBubbleSize val="0"/>
+            <c:showLeaderLines val="0"/>
+          </c:dLbls>
+          <c:cat>
+            <c:multiLvlStrRef>
+              <c:f>Sheet1!$A$2:$A$5</c:f>
+              <c:multiLvlStrCache>
+                <c:ptCount val="4"/>
+                <c:lvl>
+                  <c:pt idx="0">
+                    <c:v>C0 bare</c:v>
+                  </c:pt>
+                  <c:pt idx="1">
+                    <c:v>C1 CLAUDE.md</c:v>
+                  </c:pt>
+                  <c:pt idx="2">
+                    <c:v>C2 map only</c:v>
+                  </c:pt>
+                  <c:pt idx="3">
+                    <c:v>C3 DevMemory</c:v>
+                  </c:pt>
+                </c:lvl>
+              </c:multiLvlStrCache>
+            </c:multiLvlStrRef>
+          </c:cat>
+          <c:val>
+            <c:numRef>
+              <c:f>Sheet1!$C$2:$C$5</c:f>
+              <c:numCache>
+                <c:formatCode>General</c:formatCode>
+                <c:ptCount val="4"/>
+                <c:pt idx="0">
+                  <c:v>79</c:v>
+                </c:pt>
+                <c:pt idx="1">
+                  <c:v>79</c:v>
+                </c:pt>
+                <c:pt idx="2">
+                  <c:v>81</c:v>
+                </c:pt>
+                <c:pt idx="3">
+                  <c:v>98</c:v>
                 </c:pt>
               </c:numCache>
             </c:numRef>
@@ -314,7 +342,7 @@
             <a:lstStyle/>
             <a:p>
               <a:pPr>
-                <a:defRPr b="0" i="0" strike="noStrike" sz="1200" u="none">
+                <a:defRPr b="0" i="0" strike="noStrike" sz="1100" u="none">
                   <a:solidFill>
                     <a:srgbClr val="EDEDED"/>
                   </a:solidFill>
@@ -331,7 +359,7 @@
           <c:showBubbleSize val="0"/>
           <c:showLeaderLines val="0"/>
         </c:dLbls>
-        <c:gapWidth val="45"/>
+        <c:gapWidth val="40"/>
         <c:overlap val="0"/>
         <c:axId val="2094734554"/>
         <c:axId val="2094734552"/>
@@ -382,7 +410,7 @@
         <c:axId val="2094734552"/>
         <c:scaling>
           <c:orientation val="minMax"/>
-          <c:max val="100"/>
+          <c:max val="110"/>
           <c:min val="0"/>
         </c:scaling>
         <c:delete val="1"/>
@@ -407,7 +435,7 @@
             <a:pPr>
               <a:defRPr sz="1200" b="0" i="0" u="none" strike="noStrike">
                 <a:solidFill>
-                  <a:srgbClr val="9AA0AA"/>
+                  <a:srgbClr val="000000"/>
                 </a:solidFill>
                 <a:latin typeface="Arial"/>
               </a:defRPr>
@@ -427,6 +455,26 @@
         <a:effectLst/>
       </c:spPr>
     </c:plotArea>
+    <c:legend>
+      <c:legendPos val="b"/>
+      <c:overlay val="0"/>
+      <c:txPr>
+        <a:bodyPr/>
+        <a:lstStyle/>
+        <a:p>
+          <a:pPr>
+            <a:defRPr sz="1100">
+              <a:solidFill>
+                <a:srgbClr val="9AA0AA"/>
+              </a:solidFill>
+              <a:latin typeface="Calibri"/>
+              <a:cs typeface="Calibri"/>
+            </a:defRPr>
+          </a:pPr>
+          <a:endParaRPr lang="en-US"/>
+        </a:p>
+      </c:txPr>
+    </c:legend>
     <c:plotVisOnly val="1"/>
     <c:dispBlanksAs val="span"/>
   </c:chart>
@@ -469,7 +517,7 @@
                 </a:solidFill>
                 <a:latin typeface="Calibri"/>
               </a:rPr>
-              <a:t>Cost per successful task (US$, list price)</a:t>
+              <a:t>Cost per successful task, set 2 (US$)</a:t>
             </a:r>
           </a:p>
         </c:rich>
@@ -493,7 +541,7 @@
               <c:strCache>
                 <c:ptCount val="1"/>
                 <c:pt idx="0">
-                  <c:v>Cost per successful task (US$, list price)</c:v>
+                  <c:v>Cost per successful task, set 2 (US$)</c:v>
                 </c:pt>
               </c:strCache>
             </c:strRef>
@@ -602,16 +650,16 @@
                 <c:formatCode>General</c:formatCode>
                 <c:ptCount val="4"/>
                 <c:pt idx="0">
-                  <c:v>0.0099</c:v>
+                  <c:v>0.0095</c:v>
                 </c:pt>
                 <c:pt idx="1">
-                  <c:v>0.0104</c:v>
+                  <c:v>0.0106</c:v>
                 </c:pt>
                 <c:pt idx="2">
-                  <c:v>0.0094</c:v>
+                  <c:v>0.0093</c:v>
                 </c:pt>
                 <c:pt idx="3">
-                  <c:v>0.0087</c:v>
+                  <c:v>0.0076</c:v>
                 </c:pt>
               </c:numCache>
             </c:numRef>
@@ -1529,7 +1577,7 @@
           <a:p>
             <a:r>
               <a:rPr lang="en-US" dirty="0"/>
-              <a:t>Three takeaways: a cheaper model with memory beat a bigger model without it, memory roughly halved tokens over multi-session work, and preserving the user's own words is what makes memory useful. Next steps are a one-command Claude Code plugin, hook-based capture for interactive sessions, a Studio playtest gate in the loop, and more engines.</a:t>
+              <a:t>Four takeaways: a cheaper model with memory beat a bigger model without it; memory roughly halved tokens over multi-session work; memory recorded in Claude Code let Codex solve a task it could not solve alone, 3 of 3 against 0 of 3, with 56% fewer input tokens; and preserving the user's own words is what makes memory useful. Next steps are a one-command Claude Code plugin, testing the MCP server in Cursor and VS Code, a Studio playtest gate in the loop, and more engines.</a:t>
             </a:r>
             <a:endParaRPr lang="en-US" dirty="0"/>
           </a:p>
@@ -1617,7 +1665,7 @@
           <a:p>
             <a:r>
               <a:rPr lang="en-US" dirty="0"/>
-              <a:t>Without memory, each fresh session re-explores the project and loses what was decided before. In our runs a no-memory agent used 3.1M input tokens to build one small game, spent nine prompts on a single bug, and one of three builds passed static checks but crashed in Roblox Studio.</a:t>
+              <a:t>Without memory, each fresh session re-explores the project and loses what was decided before. In our runs, Codex without memory never recovered label colors the user had chosen in an earlier session; on unseen tasks that depend on an earlier decision, agents without memory solved 3 of 12; and one of three builds passed static checks but crashed on start in Roblox Studio with a script error.</a:t>
             </a:r>
             <a:endParaRPr lang="en-US" dirty="0"/>
           </a:p>
@@ -1705,7 +1753,7 @@
           <a:p>
             <a:r>
               <a:rPr lang="en-US" dirty="0"/>
-              <a:t>The pipeline is four steps. A deterministic scan builds a project map with no model calls, capture records each session from documented Claude Code interfaces, a pack selects only what the next task needs, and delivery injects roughly 1k tokens. The principle is to keep the full archive but send only what earns its tokens.</a:t>
+              <a:t>The pipeline is four steps. A deterministic scan builds a project map with no model calls, capture records each session through documented interfaces of any AI tool, a pack selects only what the next task needs, and delivery injects roughly 1k tokens through a hook, an MCP server or the prompt. The principle is to keep the full archive but send only what earns its tokens.</a:t>
             </a:r>
             <a:endParaRPr lang="en-US" dirty="0"/>
           </a:p>
@@ -1881,7 +1929,7 @@
           <a:p>
             <a:r>
               <a:rPr lang="en-US" dirty="0"/>
-              <a:t>Four pieces were built. A CLI drives scan, run, pack, status, hook and app; a desktop app shows the memory as an Obsidian-style vault; a Roblox Studio MCP integration runs automated playtests; and a benchmark harness with graders and regrading produces the numbers in this deck.</a:t>
+              <a:t>Four pieces were built. A CLI drives scan, run, pack, status, hook and app; an MCP server and adapters let any AI tool use and add to the memory; a desktop app shows it as an Obsidian-style vault; and a benchmark harness with graders and Roblox Studio playtests produces the numbers in this deck.</a:t>
             </a:r>
             <a:endParaRPr lang="en-US" dirty="0"/>
           </a:p>
@@ -1969,7 +2017,7 @@
           <a:p>
             <a:r>
               <a:rPr lang="en-US" dirty="0"/>
-              <a:t>We ran two kinds of evaluation. The fixed benchmark compares four conditions and a bigger model on 12 held-out tasks frozen before tuning, with validated graders and cost per success at an 80% floor. The multi-session builds test whether memory helps over a whole project, with an automated playtest after every prompt and a fixed rule choosing the next prompt.</a:t>
+              <a:t>We ran two kinds of evaluation. The fixed benchmark compares four conditions and a bigger model on 28 held-out tasks in two sets, frozen before any run, with validated graders and cost per success at an 80% floor. The multi-session builds test whether memory helps over a whole project, with an automated playtest after every prompt and a fixed rule choosing the next prompt.</a:t>
             </a:r>
             <a:endParaRPr lang="en-US" dirty="0"/>
           </a:p>
@@ -2057,7 +2105,7 @@
           <a:p>
             <a:r>
               <a:rPr lang="en-US" dirty="0"/>
-              <a:t>On 12 unseen tasks, full DevMemory passes 86%, the only condition above the 80% accuracy floor, and it is also the cheapest per successful task. Sonnet without memory reaches 75% at $0.092 per success, about 11 times more. Memory on a cheaper model beat a bigger model without it.</a:t>
+              <a:t>Two held-out sets, 28 tasks in total, written by a separate agent and frozen before any run. DevMemory is the only condition above the 80% floor on both: 83% on set 1 with the shipped code (86% at freeze) and 98% on set 2, against 79 to 81% for the others. It is the cheapest per success on set 2 at $0.0076. The gap comes from history tasks, where the answer lives in an earlier session: 12 of 12 against 3 or 4 of 12. Sonnet without memory costs about 11 times more per success.</a:t>
             </a:r>
             <a:endParaRPr lang="en-US" dirty="0"/>
           </a:p>
@@ -2145,7 +2193,7 @@
           <a:p>
             <a:r>
               <a:rPr lang="en-US" dirty="0"/>
-              <a:t>Over 16 adaptive sessions building the same game, DevMemory used 1.85M input tokens versus 3.08M with no memory and 3.41M with a hand-written AGENTS.md, at the lowest cost and with 9 of 10 roadmap features. In the scripted 8-prompt build it used 0.61M tokens against 1.06M and 1.20M, and the AGENTS.md build crashed in Studio.</a:t>
+              <a:t>Over 16 adaptive sessions building the same game, DevMemory used 1.85M input tokens versus 3.08M with no memory and 3.41M with a hand-written AGENTS.md, at the lowest cost. A human playtest found all three final builds playable; the automated check was flaky and triggered fix prompts for phantom bugs in every condition, so treat this gap as indicative. In the scripted 8-prompt build it used 0.61M tokens against 1.06M and 1.20M, and the AGENTS.md build crashed in Studio.</a:t>
             </a:r>
             <a:endParaRPr lang="en-US" dirty="0"/>
           </a:p>
@@ -3017,11 +3065,11 @@
         <p:spPr>
           <a:xfrm>
             <a:off x="457200" y="1097280"/>
-            <a:ext cx="2606040" cy="1417320"/>
+            <a:ext cx="1947672" cy="1463040"/>
           </a:xfrm>
           <a:prstGeom prst="roundRect">
             <a:avLst>
-              <a:gd name="adj" fmla="val 6452"/>
+              <a:gd name="adj" fmla="val 6250"/>
             </a:avLst>
           </a:prstGeom>
           <a:solidFill>
@@ -3043,8 +3091,8 @@
         </p:nvSpPr>
         <p:spPr>
           <a:xfrm>
-            <a:off x="640080" y="1188720"/>
-            <a:ext cx="2240280" cy="640080"/>
+            <a:off x="594360" y="1170432"/>
+            <a:ext cx="1691640" cy="640080"/>
           </a:xfrm>
           <a:prstGeom prst="rect">
             <a:avLst/>
@@ -3060,7 +3108,7 @@
               <a:buNone/>
             </a:pPr>
             <a:r>
-              <a:rPr lang="en-US" sz="2000" b="1" dirty="0">
+              <a:rPr lang="en-US" sz="1700" b="1" dirty="0">
                 <a:solidFill>
                   <a:srgbClr val="8B7CF6"/>
                 </a:solidFill>
@@ -3070,7 +3118,7 @@
               </a:rPr>
               <a:t>Cheaper model + memory</a:t>
             </a:r>
-            <a:endParaRPr lang="en-US" sz="2000" dirty="0"/>
+            <a:endParaRPr lang="en-US" sz="1700" dirty="0"/>
           </a:p>
         </p:txBody>
       </p:sp>
@@ -3082,8 +3130,8 @@
         </p:nvSpPr>
         <p:spPr>
           <a:xfrm>
-            <a:off x="640080" y="1874520"/>
-            <a:ext cx="2240280" cy="548640"/>
+            <a:off x="594360" y="1828800"/>
+            <a:ext cx="1691640" cy="685800"/>
           </a:xfrm>
           <a:prstGeom prst="rect">
             <a:avLst/>
@@ -3099,7 +3147,7 @@
               <a:buNone/>
             </a:pPr>
             <a:r>
-              <a:rPr lang="en-US" sz="1400" dirty="0">
+              <a:rPr lang="en-US" sz="1200" dirty="0">
                 <a:solidFill>
                   <a:srgbClr val="EDEDED"/>
                 </a:solidFill>
@@ -3109,7 +3157,7 @@
               </a:rPr>
               <a:t>beat a bigger model without it</a:t>
             </a:r>
-            <a:endParaRPr lang="en-US" sz="1400" dirty="0"/>
+            <a:endParaRPr lang="en-US" sz="1200" dirty="0"/>
           </a:p>
         </p:txBody>
       </p:sp>
@@ -3121,12 +3169,12 @@
         </p:nvSpPr>
         <p:spPr>
           <a:xfrm>
-            <a:off x="3246120" y="1097280"/>
-            <a:ext cx="2606040" cy="1417320"/>
+            <a:off x="2551176" y="1097280"/>
+            <a:ext cx="1947672" cy="1463040"/>
           </a:xfrm>
           <a:prstGeom prst="roundRect">
             <a:avLst>
-              <a:gd name="adj" fmla="val 6452"/>
+              <a:gd name="adj" fmla="val 6250"/>
             </a:avLst>
           </a:prstGeom>
           <a:solidFill>
@@ -3148,8 +3196,8 @@
         </p:nvSpPr>
         <p:spPr>
           <a:xfrm>
-            <a:off x="3429000" y="1188720"/>
-            <a:ext cx="2240280" cy="640080"/>
+            <a:off x="2688336" y="1170432"/>
+            <a:ext cx="1691640" cy="640080"/>
           </a:xfrm>
           <a:prstGeom prst="rect">
             <a:avLst/>
@@ -3165,7 +3213,7 @@
               <a:buNone/>
             </a:pPr>
             <a:r>
-              <a:rPr lang="en-US" sz="2000" b="1" dirty="0">
+              <a:rPr lang="en-US" sz="1700" b="1" dirty="0">
                 <a:solidFill>
                   <a:srgbClr val="38D6E8"/>
                 </a:solidFill>
@@ -3175,7 +3223,7 @@
               </a:rPr>
               <a:t>~Half the tokens</a:t>
             </a:r>
-            <a:endParaRPr lang="en-US" sz="2000" dirty="0"/>
+            <a:endParaRPr lang="en-US" sz="1700" dirty="0"/>
           </a:p>
         </p:txBody>
       </p:sp>
@@ -3187,8 +3235,8 @@
         </p:nvSpPr>
         <p:spPr>
           <a:xfrm>
-            <a:off x="3429000" y="1874520"/>
-            <a:ext cx="2240280" cy="548640"/>
+            <a:off x="2688336" y="1828800"/>
+            <a:ext cx="1691640" cy="685800"/>
           </a:xfrm>
           <a:prstGeom prst="rect">
             <a:avLst/>
@@ -3204,7 +3252,7 @@
               <a:buNone/>
             </a:pPr>
             <a:r>
-              <a:rPr lang="en-US" sz="1400" dirty="0">
+              <a:rPr lang="en-US" sz="1200" dirty="0">
                 <a:solidFill>
                   <a:srgbClr val="EDEDED"/>
                 </a:solidFill>
@@ -3214,7 +3262,7 @@
               </a:rPr>
               <a:t>over multi-session work</a:t>
             </a:r>
-            <a:endParaRPr lang="en-US" sz="1400" dirty="0"/>
+            <a:endParaRPr lang="en-US" sz="1200" dirty="0"/>
           </a:p>
         </p:txBody>
       </p:sp>
@@ -3226,12 +3274,12 @@
         </p:nvSpPr>
         <p:spPr>
           <a:xfrm>
-            <a:off x="6035040" y="1097280"/>
-            <a:ext cx="2606040" cy="1417320"/>
+            <a:off x="4645152" y="1097280"/>
+            <a:ext cx="1947672" cy="1463040"/>
           </a:xfrm>
           <a:prstGeom prst="roundRect">
             <a:avLst>
-              <a:gd name="adj" fmla="val 6452"/>
+              <a:gd name="adj" fmla="val 6250"/>
             </a:avLst>
           </a:prstGeom>
           <a:solidFill>
@@ -3253,8 +3301,8 @@
         </p:nvSpPr>
         <p:spPr>
           <a:xfrm>
-            <a:off x="6217920" y="1188720"/>
-            <a:ext cx="2240280" cy="640080"/>
+            <a:off x="4782312" y="1170432"/>
+            <a:ext cx="1691640" cy="640080"/>
           </a:xfrm>
           <a:prstGeom prst="rect">
             <a:avLst/>
@@ -3270,17 +3318,17 @@
               <a:buNone/>
             </a:pPr>
             <a:r>
-              <a:rPr lang="en-US" sz="2000" b="1" dirty="0">
-                <a:solidFill>
-                  <a:srgbClr val="3DD68C"/>
-                </a:solidFill>
-                <a:latin typeface="Calibri" pitchFamily="34" charset="0"/>
-                <a:ea typeface="Calibri" pitchFamily="34" charset="-122"/>
-                <a:cs typeface="Calibri" pitchFamily="34" charset="-120"/>
-              </a:rPr>
-              <a:t>The user's own words</a:t>
-            </a:r>
-            <a:endParaRPr lang="en-US" sz="2000" dirty="0"/>
+              <a:rPr lang="en-US" sz="1700" b="1" dirty="0">
+                <a:solidFill>
+                  <a:srgbClr val="F5A524"/>
+                </a:solidFill>
+                <a:latin typeface="Calibri" pitchFamily="34" charset="0"/>
+                <a:ea typeface="Calibri" pitchFamily="34" charset="-122"/>
+                <a:cs typeface="Calibri" pitchFamily="34" charset="-120"/>
+              </a:rPr>
+              <a:t>Works across tools</a:t>
+            </a:r>
+            <a:endParaRPr lang="en-US" sz="1700" dirty="0"/>
           </a:p>
         </p:txBody>
       </p:sp>
@@ -3292,8 +3340,8 @@
         </p:nvSpPr>
         <p:spPr>
           <a:xfrm>
-            <a:off x="6217920" y="1874520"/>
-            <a:ext cx="2240280" cy="548640"/>
+            <a:off x="4782312" y="1828800"/>
+            <a:ext cx="1691640" cy="685800"/>
           </a:xfrm>
           <a:prstGeom prst="rect">
             <a:avLst/>
@@ -3309,7 +3357,7 @@
               <a:buNone/>
             </a:pPr>
             <a:r>
-              <a:rPr lang="en-US" sz="1400" dirty="0">
+              <a:rPr lang="en-US" sz="1200" dirty="0">
                 <a:solidFill>
                   <a:srgbClr val="EDEDED"/>
                 </a:solidFill>
@@ -3317,15 +3365,120 @@
                 <a:ea typeface="Calibri" pitchFamily="34" charset="-122"/>
                 <a:cs typeface="Calibri" pitchFamily="34" charset="-120"/>
               </a:rPr>
+              <a:t>Claude Code memory: Codex right 3/3 vs 0/3, 56% fewer tokens</a:t>
+            </a:r>
+            <a:endParaRPr lang="en-US" sz="1200" dirty="0"/>
+          </a:p>
+        </p:txBody>
+      </p:sp>
+      <p:sp>
+        <p:nvSpPr>
+          <p:cNvPr id="12" name="Takeaway card 4"/>
+          <p:cNvSpPr/>
+          <p:nvPr/>
+        </p:nvSpPr>
+        <p:spPr>
+          <a:xfrm>
+            <a:off x="6739128" y="1097280"/>
+            <a:ext cx="1947672" cy="1463040"/>
+          </a:xfrm>
+          <a:prstGeom prst="roundRect">
+            <a:avLst>
+              <a:gd name="adj" fmla="val 6250"/>
+            </a:avLst>
+          </a:prstGeom>
+          <a:solidFill>
+            <a:srgbClr val="161A22"/>
+          </a:solidFill>
+          <a:ln w="9525">
+            <a:solidFill>
+              <a:srgbClr val="232834"/>
+            </a:solidFill>
+            <a:prstDash val="solid"/>
+          </a:ln>
+        </p:spPr>
+      </p:sp>
+      <p:sp>
+        <p:nvSpPr>
+          <p:cNvPr id="13" name="Takeaway 4"/>
+          <p:cNvSpPr txBox="1"/>
+          <p:nvPr/>
+        </p:nvSpPr>
+        <p:spPr>
+          <a:xfrm>
+            <a:off x="6876288" y="1170432"/>
+            <a:ext cx="1691640" cy="640080"/>
+          </a:xfrm>
+          <a:prstGeom prst="rect">
+            <a:avLst/>
+          </a:prstGeom>
+          <a:noFill/>
+          <a:ln/>
+        </p:spPr>
+        <p:txBody>
+          <a:bodyPr wrap="square" lIns="0" tIns="0" rIns="0" bIns="0" rtlCol="0" anchor="ctr"/>
+          <a:lstStyle/>
+          <a:p>
+            <a:pPr indent="0" marL="0">
+              <a:buNone/>
+            </a:pPr>
+            <a:r>
+              <a:rPr lang="en-US" sz="1700" b="1" dirty="0">
+                <a:solidFill>
+                  <a:srgbClr val="3DD68C"/>
+                </a:solidFill>
+                <a:latin typeface="Calibri" pitchFamily="34" charset="0"/>
+                <a:ea typeface="Calibri" pitchFamily="34" charset="-122"/>
+                <a:cs typeface="Calibri" pitchFamily="34" charset="-120"/>
+              </a:rPr>
+              <a:t>The user's own words</a:t>
+            </a:r>
+            <a:endParaRPr lang="en-US" sz="1700" dirty="0"/>
+          </a:p>
+        </p:txBody>
+      </p:sp>
+      <p:sp>
+        <p:nvSpPr>
+          <p:cNvPr id="14" name="Takeaway text 4"/>
+          <p:cNvSpPr txBox="1"/>
+          <p:nvPr/>
+        </p:nvSpPr>
+        <p:spPr>
+          <a:xfrm>
+            <a:off x="6876288" y="1828800"/>
+            <a:ext cx="1691640" cy="685800"/>
+          </a:xfrm>
+          <a:prstGeom prst="rect">
+            <a:avLst/>
+          </a:prstGeom>
+          <a:noFill/>
+          <a:ln/>
+        </p:spPr>
+        <p:txBody>
+          <a:bodyPr wrap="square" lIns="0" tIns="0" rIns="0" bIns="0" rtlCol="0" anchor="t"/>
+          <a:lstStyle/>
+          <a:p>
+            <a:pPr indent="0" marL="0">
+              <a:buNone/>
+            </a:pPr>
+            <a:r>
+              <a:rPr lang="en-US" sz="1200" dirty="0">
+                <a:solidFill>
+                  <a:srgbClr val="EDEDED"/>
+                </a:solidFill>
+                <a:latin typeface="Calibri" pitchFamily="34" charset="0"/>
+                <a:ea typeface="Calibri" pitchFamily="34" charset="-122"/>
+                <a:cs typeface="Calibri" pitchFamily="34" charset="-120"/>
+              </a:rPr>
               <a:t>are what make memory useful</a:t>
             </a:r>
-            <a:endParaRPr lang="en-US" sz="1400" dirty="0"/>
-          </a:p>
-        </p:txBody>
-      </p:sp>
-      <p:sp>
-        <p:nvSpPr>
-          <p:cNvPr id="12" name="Next head"/>
+            <a:endParaRPr lang="en-US" sz="1200" dirty="0"/>
+          </a:p>
+        </p:txBody>
+      </p:sp>
+      <p:sp>
+        <p:nvSpPr>
+          <p:cNvPr id="15" name="Next head"/>
           <p:cNvSpPr txBox="1"/>
           <p:nvPr/>
         </p:nvSpPr>
@@ -3364,7 +3517,7 @@
       </p:sp>
       <p:sp>
         <p:nvSpPr>
-          <p:cNvPr id="13" name="Next list"/>
+          <p:cNvPr id="16" name="Next list"/>
           <p:cNvSpPr txBox="1"/>
           <p:nvPr/>
         </p:nvSpPr>
@@ -3420,7 +3573,7 @@
                 <a:ea typeface="Calibri" pitchFamily="34" charset="-122"/>
                 <a:cs typeface="Calibri" pitchFamily="34" charset="-120"/>
               </a:rPr>
-              <a:t>Hook-based capture for interactive sessions</a:t>
+              <a:t>Test the MCP server in Cursor and VS Code</a:t>
             </a:r>
             <a:endParaRPr lang="en-US" sz="1400" dirty="0"/>
           </a:p>
@@ -3470,7 +3623,7 @@
       </p:sp>
       <p:sp>
         <p:nvSpPr>
-          <p:cNvPr id="14" name="Blade Swarm showcase game frame"/>
+          <p:cNvPr id="17" name="Blade Swarm showcase game frame"/>
           <p:cNvSpPr/>
           <p:nvPr/>
         </p:nvSpPr>
@@ -3497,7 +3650,7 @@
       </p:sp>
       <p:pic>
         <p:nvPicPr>
-          <p:cNvPr id="15" name="Blade Swarm showcase game" descr="Blade Swarm showcase game">    </p:cNvPr>
+          <p:cNvPr id="18" name="Blade Swarm showcase game" descr="Blade Swarm showcase game">    </p:cNvPr>
           <p:cNvPicPr>
             <a:picLocks noChangeAspect="1"/>
           </p:cNvPicPr>
@@ -3521,7 +3674,7 @@
       </p:pic>
       <p:sp>
         <p:nvSpPr>
-          <p:cNvPr id="16" name="Footer"/>
+          <p:cNvPr id="19" name="Footer"/>
           <p:cNvSpPr txBox="1"/>
           <p:nvPr/>
         </p:nvSpPr>
@@ -3769,7 +3922,7 @@
                 <a:ea typeface="Calibri" pitchFamily="34" charset="-122"/>
                 <a:cs typeface="Calibri" pitchFamily="34" charset="-120"/>
               </a:rPr>
-              <a:t>3.1M</a:t>
+              <a:t>0 of 3</a:t>
             </a:r>
             <a:endParaRPr lang="en-US" sz="5400" dirty="0"/>
           </a:p>
@@ -3808,7 +3961,7 @@
                 <a:ea typeface="Calibri" pitchFamily="34" charset="-122"/>
                 <a:cs typeface="Calibri" pitchFamily="34" charset="-120"/>
               </a:rPr>
-              <a:t>input tokens</a:t>
+              <a:t>restored the spec</a:t>
             </a:r>
             <a:endParaRPr lang="en-US" sz="1800" dirty="0"/>
           </a:p>
@@ -3847,7 +4000,7 @@
                 <a:ea typeface="Calibri" pitchFamily="34" charset="-122"/>
                 <a:cs typeface="Calibri" pitchFamily="34" charset="-120"/>
               </a:rPr>
-              <a:t>no-memory agent building one small game over 16 sessions</a:t>
+              <a:t>Codex runs without memory, asked to put back colors the user chose earlier</a:t>
             </a:r>
             <a:endParaRPr lang="en-US" sz="1400" dirty="0"/>
           </a:p>
@@ -3913,7 +4066,7 @@
                 <a:ea typeface="Calibri" pitchFamily="34" charset="-122"/>
                 <a:cs typeface="Calibri" pitchFamily="34" charset="-120"/>
               </a:rPr>
-              <a:t>9</a:t>
+              <a:t>3 of 12</a:t>
             </a:r>
             <a:endParaRPr lang="en-US" sz="5400" dirty="0"/>
           </a:p>
@@ -3952,7 +4105,7 @@
                 <a:ea typeface="Calibri" pitchFamily="34" charset="-122"/>
                 <a:cs typeface="Calibri" pitchFamily="34" charset="-120"/>
               </a:rPr>
-              <a:t>prompts in a row</a:t>
+              <a:t>history tasks solved</a:t>
             </a:r>
             <a:endParaRPr lang="en-US" sz="1800" dirty="0"/>
           </a:p>
@@ -3991,7 +4144,7 @@
                 <a:ea typeface="Calibri" pitchFamily="34" charset="-122"/>
                 <a:cs typeface="Calibri" pitchFamily="34" charset="-120"/>
               </a:rPr>
-              <a:t>stuck on one bug (no-memory agent)</a:t>
+              <a:t>without memory, on unseen tasks that need an earlier decision</a:t>
             </a:r>
             <a:endParaRPr lang="en-US" sz="1400" dirty="0"/>
           </a:p>
@@ -4096,7 +4249,7 @@
                 <a:ea typeface="Calibri" pitchFamily="34" charset="-122"/>
                 <a:cs typeface="Calibri" pitchFamily="34" charset="-120"/>
               </a:rPr>
-              <a:t>builds unplayable</a:t>
+              <a:t>builds crashed</a:t>
             </a:r>
             <a:endParaRPr lang="en-US" sz="1800" dirty="0"/>
           </a:p>
@@ -4135,7 +4288,7 @@
                 <a:ea typeface="Calibri" pitchFamily="34" charset="-122"/>
                 <a:cs typeface="Calibri" pitchFamily="34" charset="-120"/>
               </a:rPr>
-              <a:t>passed static checks, crashed in Roblox Studio</a:t>
+              <a:t>passed static checks, script error on start in Roblox Studio</a:t>
             </a:r>
             <a:endParaRPr lang="en-US" sz="1400" dirty="0"/>
           </a:p>
@@ -4663,7 +4816,7 @@
                 <a:ea typeface="Calibri" pitchFamily="34" charset="-122"/>
                 <a:cs typeface="Calibri" pitchFamily="34" charset="-120"/>
               </a:rPr>
-              <a:t>Every session via Claude Code's documented stream-json / hooks: prompts, tool calls, edits, file hashes.</a:t>
+              <a:t>Every session, from any AI tool: Claude Code stream-json, Codex JSON events, or a project snapshot diff. Prompts, edits, file hashes.</a:t>
             </a:r>
             <a:endParaRPr lang="en-US" sz="1300" dirty="0"/>
           </a:p>
@@ -5079,7 +5232,7 @@
                 <a:ea typeface="Calibri" pitchFamily="34" charset="-122"/>
                 <a:cs typeface="Calibri" pitchFamily="34" charset="-120"/>
               </a:rPr>
-              <a:t>Claude Code hook or --append-system-prompt. About 1k tokens.</a:t>
+              <a:t>Claude Code hook, an MCP server for any client, or the pack in any agent's prompt. About 1k tokens.</a:t>
             </a:r>
             <a:endParaRPr lang="en-US" sz="1300" dirty="0"/>
           </a:p>
@@ -6040,7 +6193,7 @@
                 <a:ea typeface="Calibri" pitchFamily="34" charset="-122"/>
                 <a:cs typeface="Calibri" pitchFamily="34" charset="-120"/>
               </a:rPr>
-              <a:t>Desktop app: </a:t>
+              <a:t>Any AI tool: </a:t>
             </a:r>
             <a:pPr indent="0" marL="0">
               <a:buNone/>
@@ -6054,7 +6207,7 @@
                 <a:ea typeface="Calibri" pitchFamily="34" charset="-122"/>
                 <a:cs typeface="Calibri" pitchFamily="34" charset="-120"/>
               </a:rPr>
-              <a:t>browse the memory vault</a:t>
+              <a:t>MCP server, Codex adapter, capture for any CLI or IDE agent</a:t>
             </a:r>
             <a:endParaRPr lang="en-US" sz="1500" dirty="0"/>
           </a:p>
@@ -6075,7 +6228,7 @@
                 <a:ea typeface="Calibri" pitchFamily="34" charset="-122"/>
                 <a:cs typeface="Calibri" pitchFamily="34" charset="-120"/>
               </a:rPr>
-              <a:t>Roblox Studio MCP: </a:t>
+              <a:t>Desktop app: </a:t>
             </a:r>
             <a:pPr indent="0" marL="0">
               <a:buNone/>
@@ -6089,7 +6242,7 @@
                 <a:ea typeface="Calibri" pitchFamily="34" charset="-122"/>
                 <a:cs typeface="Calibri" pitchFamily="34" charset="-120"/>
               </a:rPr>
-              <a:t>automated playtests</a:t>
+              <a:t>browse the memory vault</a:t>
             </a:r>
             <a:endParaRPr lang="en-US" sz="1500" dirty="0"/>
           </a:p>
@@ -6124,7 +6277,7 @@
                 <a:ea typeface="Calibri" pitchFamily="34" charset="-122"/>
                 <a:cs typeface="Calibri" pitchFamily="34" charset="-120"/>
               </a:rPr>
-              <a:t>runner, graders, reports, regrade</a:t>
+              <a:t>graders, reports, Roblox Studio playtests</a:t>
             </a:r>
             <a:endParaRPr lang="en-US" sz="1500" dirty="0"/>
           </a:p>
@@ -6394,7 +6547,7 @@
                 <a:ea typeface="Calibri" pitchFamily="34" charset="-122"/>
                 <a:cs typeface="Calibri" pitchFamily="34" charset="-120"/>
               </a:rPr>
-              <a:t>8 dev tasks for tuning; 12 held-out on 2 projects (Roblox + Python), written by a separate agent, hash-frozen before tuning</a:t>
+              <a:t>8 dev tasks for tuning; 28 held-out in two sets (12 + 16) on 2 projects (Roblox + Python), written by a separate agent, hash-frozen before any run</a:t>
             </a:r>
             <a:endParaRPr lang="en-US" sz="1250" dirty="0"/>
           </a:p>
@@ -6769,7 +6922,7 @@
                 <a:ea typeface="Calibri" pitchFamily="34" charset="-122"/>
                 <a:cs typeface="Calibri" pitchFamily="34" charset="-120"/>
               </a:rPr>
-              <a:t>Held-out results: only C3 clears the 80% floor</a:t>
+              <a:t>On both unseen sets, only DevMemory clears 80%</a:t>
             </a:r>
             <a:endParaRPr lang="en-US" sz="3200" dirty="0"/>
           </a:p>
@@ -6777,13 +6930,13 @@
       </p:sp>
       <p:graphicFrame>
         <p:nvGraphicFramePr>
-          <p:cNvPr id="3" name="Pass rate on 12 unseen tasks (%)" descr=""/>
+          <p:cNvPr id="3" name="Pass rate chart" descr=""/>
           <p:cNvGraphicFramePr/>
           <p:nvPr/>
         </p:nvGraphicFramePr>
         <p:xfrm>
-          <a:off x="365760" y="1143000"/>
-          <a:ext cx="4572000" cy="3200400"/>
+          <a:off x="365760" y="1097280"/>
+          <a:ext cx="4572000" cy="3154680"/>
         </p:xfrm>
         <a:graphic xmlns:a="http://schemas.openxmlformats.org/drawingml/2006/main">
           <a:graphicData uri="http://schemas.openxmlformats.org/drawingml/2006/chart">
@@ -6799,8 +6952,8 @@
         </p:nvSpPr>
         <p:spPr>
           <a:xfrm>
-            <a:off x="457200" y="4389120"/>
-            <a:ext cx="4389120" cy="274320"/>
+            <a:off x="457200" y="4343400"/>
+            <a:ext cx="4480560" cy="411480"/>
           </a:xfrm>
           <a:prstGeom prst="rect">
             <a:avLst/>
@@ -6809,14 +6962,14 @@
           <a:ln/>
         </p:spPr>
         <p:txBody>
-          <a:bodyPr wrap="square" lIns="0" tIns="0" rIns="0" bIns="0" rtlCol="0" anchor="ctr"/>
+          <a:bodyPr wrap="square" lIns="0" tIns="0" rIns="0" bIns="0" rtlCol="0" anchor="t"/>
           <a:lstStyle/>
           <a:p>
             <a:pPr indent="0" marL="0">
               <a:buNone/>
             </a:pPr>
             <a:r>
-              <a:rPr lang="en-US" sz="1300" dirty="0">
+              <a:rPr lang="en-US" sz="1150" dirty="0">
                 <a:solidFill>
                   <a:srgbClr val="F5A524"/>
                 </a:solidFill>
@@ -6824,21 +6977,21 @@
                 <a:ea typeface="Calibri" pitchFamily="34" charset="-122"/>
                 <a:cs typeface="Calibri" pitchFamily="34" charset="-120"/>
               </a:rPr>
-              <a:t>Accuracy floor: 80%. Only C3 DevMemory (86%) is above it.</a:t>
-            </a:r>
-            <a:endParaRPr lang="en-US" sz="1300" dirty="0"/>
+              <a:t>Accuracy floor: 80%. Set 1 shown with the shipped code (DevMemory was 86% at freeze).</a:t>
+            </a:r>
+            <a:endParaRPr lang="en-US" sz="1150" dirty="0"/>
           </a:p>
         </p:txBody>
       </p:sp>
       <p:graphicFrame>
         <p:nvGraphicFramePr>
-          <p:cNvPr id="5" name="Cost per successful task (US$, list price)" descr=""/>
+          <p:cNvPr id="5" name="Cost per successful task, set 2 (US$)" descr=""/>
           <p:cNvGraphicFramePr/>
           <p:nvPr/>
         </p:nvGraphicFramePr>
         <p:xfrm>
-          <a:off x="5029200" y="1143000"/>
-          <a:ext cx="3749040" cy="2468880"/>
+          <a:off x="5029200" y="1097280"/>
+          <a:ext cx="3749040" cy="2514600"/>
         </p:xfrm>
         <a:graphic xmlns:a="http://schemas.openxmlformats.org/drawingml/2006/main">
           <a:graphicData uri="http://schemas.openxmlformats.org/drawingml/2006/chart">
@@ -6875,7 +7028,7 @@
       </p:sp>
       <p:sp>
         <p:nvSpPr>
-          <p:cNvPr id="7" name="Sonnet callout text"/>
+          <p:cNvPr id="7" name="Callout text"/>
           <p:cNvSpPr txBox="1"/>
           <p:nvPr/>
         </p:nvSpPr>
@@ -6898,24 +7051,24 @@
               <a:buNone/>
             </a:pPr>
             <a:r>
-              <a:rPr lang="en-US" sz="1500" b="1" dirty="0">
-                <a:solidFill>
-                  <a:srgbClr val="F5A524"/>
-                </a:solidFill>
-                <a:latin typeface="Calibri" pitchFamily="34" charset="0"/>
-                <a:ea typeface="Calibri" pitchFamily="34" charset="-122"/>
-                <a:cs typeface="Calibri" pitchFamily="34" charset="-120"/>
-              </a:rPr>
-              <a:t>Sonnet without memory: $0.092</a:t>
-            </a:r>
-            <a:endParaRPr lang="en-US" sz="1500" dirty="0"/>
+              <a:rPr lang="en-US" sz="1400" b="1" dirty="0">
+                <a:solidFill>
+                  <a:srgbClr val="3DD68C"/>
+                </a:solidFill>
+                <a:latin typeface="Calibri" pitchFamily="34" charset="0"/>
+                <a:ea typeface="Calibri" pitchFamily="34" charset="-122"/>
+                <a:cs typeface="Calibri" pitchFamily="34" charset="-120"/>
+              </a:rPr>
+              <a:t>History tasks (set 2): 12/12 vs 3–4/12</a:t>
+            </a:r>
+            <a:endParaRPr lang="en-US" sz="1400" dirty="0"/>
           </a:p>
           <a:p>
             <a:pPr indent="0" marL="0">
               <a:buNone/>
             </a:pPr>
             <a:r>
-              <a:rPr lang="en-US" sz="1200" dirty="0">
+              <a:rPr lang="en-US" sz="1150" dirty="0">
                 <a:solidFill>
                   <a:srgbClr val="9AA0AA"/>
                 </a:solidFill>
@@ -6923,9 +7076,9 @@
                 <a:ea typeface="Calibri" pitchFamily="34" charset="-122"/>
                 <a:cs typeface="Calibri" pitchFamily="34" charset="-120"/>
               </a:rPr>
-              <a:t>11× more per success, and still under the floor (75%)</a:t>
-            </a:r>
-            <a:endParaRPr lang="en-US" sz="1500" dirty="0"/>
+              <a:t>Sonnet without memory (set 1): $0.092 per success, 11× more, 75%</a:t>
+            </a:r>
+            <a:endParaRPr lang="en-US" sz="1400" dirty="0"/>
           </a:p>
         </p:txBody>
       </p:sp>
@@ -7640,7 +7793,7 @@
                           <a:ea typeface="Calibri" pitchFamily="34" charset="-122"/>
                           <a:cs typeface="Calibri" pitchFamily="34" charset="-120"/>
                         </a:rPr>
-                        <a:t>Features (of 10)</a:t>
+                        <a:t>Playable (human check)</a:t>
                       </a:r>
                       <a:endParaRPr lang="en-US" sz="1200" dirty="0">
                         <a:latin typeface="Calibri" charset="0"/>
@@ -7708,7 +7861,7 @@
                           <a:ea typeface="Calibri" pitchFamily="34" charset="-122"/>
                           <a:cs typeface="Calibri" pitchFamily="34" charset="-120"/>
                         </a:rPr>
-                        <a:t>7</a:t>
+                        <a:t>yes</a:t>
                       </a:r>
                       <a:endParaRPr lang="en-US" sz="1300" dirty="0">
                         <a:latin typeface="Calibri" charset="0"/>
@@ -7776,7 +7929,7 @@
                           <a:ea typeface="Calibri" pitchFamily="34" charset="-122"/>
                           <a:cs typeface="Calibri" pitchFamily="34" charset="-120"/>
                         </a:rPr>
-                        <a:t>9</a:t>
+                        <a:t>yes</a:t>
                       </a:r>
                       <a:endParaRPr lang="en-US" sz="1300" dirty="0">
                         <a:latin typeface="Calibri" charset="0"/>
@@ -7844,7 +7997,7 @@
                           <a:ea typeface="Calibri" pitchFamily="34" charset="-122"/>
                           <a:cs typeface="Calibri" pitchFamily="34" charset="-120"/>
                         </a:rPr>
-                        <a:t>9</a:t>
+                        <a:t>yes</a:t>
                       </a:r>
                       <a:endParaRPr lang="en-US" sz="1300" dirty="0">
                         <a:latin typeface="Calibri" charset="0"/>
@@ -8016,7 +8169,7 @@
         <p:spPr>
           <a:xfrm>
             <a:off x="4846320" y="3794760"/>
-            <a:ext cx="3840480" cy="365760"/>
+            <a:ext cx="3840480" cy="274320"/>
           </a:xfrm>
           <a:prstGeom prst="rect">
             <a:avLst/>
@@ -8043,6 +8196,45 @@
               <a:t>Game built by DevMemory-assisted sessions (graveyard arena)</a:t>
             </a:r>
             <a:endParaRPr lang="en-US" sz="1100" dirty="0"/>
+          </a:p>
+        </p:txBody>
+      </p:sp>
+      <p:sp>
+        <p:nvSpPr>
+          <p:cNvPr id="9" name="Caveat"/>
+          <p:cNvSpPr txBox="1"/>
+          <p:nvPr/>
+        </p:nvSpPr>
+        <p:spPr>
+          <a:xfrm>
+            <a:off x="4846320" y="4114800"/>
+            <a:ext cx="3840480" cy="548640"/>
+          </a:xfrm>
+          <a:prstGeom prst="rect">
+            <a:avLst/>
+          </a:prstGeom>
+          <a:noFill/>
+          <a:ln/>
+        </p:spPr>
+        <p:txBody>
+          <a:bodyPr wrap="square" lIns="0" tIns="0" rIns="0" bIns="0" rtlCol="0" anchor="t"/>
+          <a:lstStyle/>
+          <a:p>
+            <a:pPr indent="0" marL="0">
+              <a:buNone/>
+            </a:pPr>
+            <a:r>
+              <a:rPr lang="en-US" sz="1050" dirty="0">
+                <a:solidFill>
+                  <a:srgbClr val="F5A524"/>
+                </a:solidFill>
+                <a:latin typeface="Calibri" pitchFamily="34" charset="0"/>
+                <a:ea typeface="Calibri" pitchFamily="34" charset="-122"/>
+                <a:cs typeface="Calibri" pitchFamily="34" charset="-120"/>
+              </a:rPr>
+              <a:t>Caveat: the automated playtest was flaky and sent fix prompts for phantom bugs in every condition, so this token gap is indicative.</a:t>
+            </a:r>
+            <a:endParaRPr lang="en-US" sz="1050" dirty="0"/>
           </a:p>
         </p:txBody>
       </p:sp>
@@ -8390,7 +8582,7 @@
                 <a:ea typeface="Calibri" pitchFamily="34" charset="-122"/>
                 <a:cs typeface="Calibri" pitchFamily="34" charset="-120"/>
               </a:rPr>
-              <a:t>On the Python held-out project the hand-written file matched DevMemory (20 vs 19 of 24).</a:t>
+              <a:t>Set 1, Python project: the hand-written file matched DevMemory (20 vs 19 of 24). On set 2 DevMemory led there too (23 vs 17).</a:t>
             </a:r>
             <a:endParaRPr lang="en-US" sz="1250" dirty="0"/>
           </a:p>
@@ -8631,7 +8823,7 @@
                 <a:ea typeface="Calibri" pitchFamily="34" charset="-122"/>
                 <a:cs typeface="Calibri" pitchFamily="34" charset="-120"/>
               </a:rPr>
-              <a:t>Playtest protocol revised during the race</a:t>
+              <a:t>Automated playtest was flaky (corrected by a human check)</a:t>
             </a:r>
             <a:endParaRPr lang="en-US" sz="1200" dirty="0"/>
           </a:p>

--- a/docs/deck/DevMemory.pptx
+++ b/docs/deck/DevMemory.pptx
@@ -128,7 +128,7 @@
           <a:lstStyle/>
           <a:p>
             <a:pPr>
-              <a:defRPr sz="1400" b="0" i="0" u="none" strike="noStrike">
+              <a:defRPr sz="1300" b="0" i="0" u="none" strike="noStrike">
                 <a:solidFill>
                   <a:srgbClr val="EDEDED"/>
                 </a:solidFill>
@@ -136,7 +136,7 @@
               </a:defRPr>
             </a:pPr>
             <a:r>
-              <a:rPr sz="1400" b="0" i="0" u="none" strike="noStrike">
+              <a:rPr sz="1300" b="0" i="0" u="none" strike="noStrike">
                 <a:solidFill>
                   <a:srgbClr val="EDEDED"/>
                 </a:solidFill>
@@ -503,7 +503,7 @@
           <a:lstStyle/>
           <a:p>
             <a:pPr>
-              <a:defRPr sz="1400" b="0" i="0" u="none" strike="noStrike">
+              <a:defRPr sz="1200" b="0" i="0" u="none" strike="noStrike">
                 <a:solidFill>
                   <a:srgbClr val="EDEDED"/>
                 </a:solidFill>
@@ -511,7 +511,7 @@
               </a:defRPr>
             </a:pPr>
             <a:r>
-              <a:rPr sz="1400" b="0" i="0" u="none" strike="noStrike">
+              <a:rPr sz="1200" b="0" i="0" u="none" strike="noStrike">
                 <a:solidFill>
                   <a:srgbClr val="EDEDED"/>
                 </a:solidFill>
@@ -560,7 +560,7 @@
               <a:lstStyle/>
               <a:p>
                 <a:pPr>
-                  <a:defRPr b="0" i="0" strike="noStrike" sz="1000" u="none">
+                  <a:defRPr b="0" i="0" strike="noStrike" sz="950" u="none">
                     <a:solidFill>
                       <a:srgbClr val="EDEDED"/>
                     </a:solidFill>
@@ -672,7 +672,7 @@
             <a:lstStyle/>
             <a:p>
               <a:pPr>
-                <a:defRPr b="0" i="0" strike="noStrike" sz="1000" u="none">
+                <a:defRPr b="0" i="0" strike="noStrike" sz="950" u="none">
                   <a:solidFill>
                     <a:srgbClr val="EDEDED"/>
                   </a:solidFill>
@@ -813,7 +813,7 @@
           <a:lstStyle/>
           <a:p>
             <a:pPr>
-              <a:defRPr sz="1400" b="0" i="0" u="none" strike="noStrike">
+              <a:defRPr sz="1200" b="0" i="0" u="none" strike="noStrike">
                 <a:solidFill>
                   <a:srgbClr val="EDEDED"/>
                 </a:solidFill>
@@ -821,13 +821,13 @@
               </a:defRPr>
             </a:pPr>
             <a:r>
-              <a:rPr sz="1400" b="0" i="0" u="none" strike="noStrike">
+              <a:rPr sz="1200" b="0" i="0" u="none" strike="noStrike">
                 <a:solidFill>
                   <a:srgbClr val="EDEDED"/>
                 </a:solidFill>
                 <a:latin typeface="Calibri"/>
               </a:rPr>
-              <a:t>Input tokens, same game (M, 16 sessions)</a:t>
+              <a:t>Input tokens, Blade Swarm (millions, 16 sessions)</a:t>
             </a:r>
           </a:p>
         </c:rich>
@@ -851,7 +851,7 @@
               <c:strCache>
                 <c:ptCount val="1"/>
                 <c:pt idx="0">
-                  <c:v>Input tokens, same game (M, 16 sessions)</c:v>
+                  <c:v>Input tokens, Blade Swarm (millions, 16 sessions)</c:v>
                 </c:pt>
               </c:strCache>
             </c:strRef>
@@ -1489,7 +1489,7 @@
           <a:p>
             <a:r>
               <a:rPr lang="en-US" dirty="0"/>
-              <a:t>DevMemory gives every new AI coding session a warm start by remembering the project and what the user asked for earlier. The screenshot is the desktop app that browses the captured memory. We target Challenge 2: less compute at equal or better task success.</a:t>
+              <a:t>DevMemory gives every new AI coding session a warm start by remembering the project and what the user asked for earlier, and sending only what the next task needs. The screenshot is the desktop app that browses the captured memory. Challenge 2: less compute at equal or better task success.</a:t>
             </a:r>
             <a:endParaRPr lang="en-US" dirty="0"/>
           </a:p>
@@ -1577,7 +1577,7 @@
           <a:p>
             <a:r>
               <a:rPr lang="en-US" dirty="0"/>
-              <a:t>Four takeaways: a cheaper model with memory beat a bigger model without it; memory roughly halved tokens over multi-session work; memory recorded in Claude Code let Codex solve a task it could not solve alone, 3 of 3 against 0 of 3, with 56% fewer input tokens; and preserving the user's own words is what makes memory useful. Next steps are a one-command Claude Code plugin, testing the MCP server in Cursor and VS Code, a Studio playtest gate in the loop, and more engines.</a:t>
+              <a:t>Four takeaways: a cheaper model with memory beat a bigger model without it; memory roughly halved tokens over a real multi-session build; memory recorded in one tool helped another; and keeping the user's own words is what makes memory useful. Next: a one-command install, more MCP clients, a Studio playtest gate, and larger real projects.</a:t>
             </a:r>
             <a:endParaRPr lang="en-US" dirty="0"/>
           </a:p>
@@ -1665,7 +1665,7 @@
           <a:p>
             <a:r>
               <a:rPr lang="en-US" dirty="0"/>
-              <a:t>Without memory, each fresh session re-explores the project and loses what was decided before. In our runs, Codex without memory never recovered label colors the user had chosen in an earlier session; on unseen tasks that depend on an earlier decision, agents without memory solved 3 of 12; and one of three builds passed static checks but crashed on start in Roblox Studio with a script error.</a:t>
+              <a:t>On unseen tasks whose answer depends on an earlier decision, agents without memory solved 3 of 12. Codex without memory never recovered colors a user had picked earlier. A bigger model without memory cost about 11 times more per success and still missed the accuracy bar. The information is in past conversations, not in the code.</a:t>
             </a:r>
             <a:endParaRPr lang="en-US" dirty="0"/>
           </a:p>
@@ -1753,7 +1753,7 @@
           <a:p>
             <a:r>
               <a:rPr lang="en-US" dirty="0"/>
-              <a:t>The pipeline is four steps. A deterministic scan builds a project map with no model calls, capture records each session through documented interfaces of any AI tool, a pack selects only what the next task needs, and delivery injects roughly 1k tokens through a hook, an MCP server or the prompt. The principle is to keep the full archive but send only what earns its tokens.</a:t>
+              <a:t>Four steps. A deterministic scan builds the project map with no model calls. Capture records each session through documented interfaces of whichever AI tool is used. A pack selects only what the next request needs, with sources and freshness. Delivery injects it through a hook, an MCP server or the prompt.</a:t>
             </a:r>
             <a:endParaRPr lang="en-US" dirty="0"/>
           </a:p>
@@ -1841,7 +1841,7 @@
           <a:p>
             <a:r>
               <a:rPr lang="en-US" dirty="0"/>
-              <a:t>This is a real pack excerpt. The first entry is flagged STALE because the edits from that earlier session are no longer in the file, so the agent knows to verify. The user's original sentence is carried verbatim, and everything is plain files with no vector database or model in the retrieval loop.</a:t>
+              <a:t>This is a real pack from the Blade Swarm build. The request refers to colors chosen in an earlier session. DevMemory brings back that session and the shop-design session verbatim, plus where the code keeps the colors. Claude Code then went straight to the right file. The other builds also got this prompt right by reading the code; the point is what DevMemory delivers, without any AI calls.</a:t>
             </a:r>
             <a:endParaRPr lang="en-US" dirty="0"/>
           </a:p>
@@ -1929,7 +1929,7 @@
           <a:p>
             <a:r>
               <a:rPr lang="en-US" dirty="0"/>
-              <a:t>Four pieces were built. A CLI drives scan, run, pack, status, hook and app; an MCP server and adapters let any AI tool use and add to the memory; a desktop app shows it as an Obsidian-style vault; and a benchmark harness with graders and Roblox Studio playtests produces the numbers in this deck.</a:t>
+              <a:t>A CLI drives scanning, capture and packs; a desktop app shows the memory as a vault with a graph and Pack Lab; an MCP server and adapters let any AI tool use and add to the memory; and a benchmark harness with validated graders and automated playtests produced the numbers in this deck.</a:t>
             </a:r>
             <a:endParaRPr lang="en-US" dirty="0"/>
           </a:p>
@@ -2017,7 +2017,7 @@
           <a:p>
             <a:r>
               <a:rPr lang="en-US" dirty="0"/>
-              <a:t>We ran two kinds of evaluation. The fixed benchmark compares four conditions and a bigger model on 28 held-out tasks in two sets, frozen before any run, with validated graders and cost per success at an 80% floor. The multi-session builds test whether memory helps over a whole project, with an automated playtest after every prompt and a fixed rule choosing the next prompt.</a:t>
+              <a:t>Two kinds of evaluation. The fixed benchmark compares four setups on 28 held-out tasks frozen before any run, with validated graders and cost per success at an 80% floor. The multi-session builds test whether memory helps over a whole project: a Roblox game, a web app, and a cross-tool test with Codex. All methods and disclosures are in RESULTS.md and bench/METHODOLOGY.md.</a:t>
             </a:r>
             <a:endParaRPr lang="en-US" dirty="0"/>
           </a:p>
@@ -2105,7 +2105,7 @@
           <a:p>
             <a:r>
               <a:rPr lang="en-US" dirty="0"/>
-              <a:t>Two held-out sets, 28 tasks in total, written by a separate agent and frozen before any run. DevMemory is the only condition above the 80% floor on both: 83% on set 1 with the shipped code (86% at freeze) and 98% on set 2, against 79 to 81% for the others. It is the cheapest per success on set 2 at $0.0076. The gap comes from history tasks, where the answer lives in an earlier session: 12 of 12 against 3 or 4 of 12. Sonnet without memory costs about 11 times more per success.</a:t>
+              <a:t>Two held-out sets, 28 tasks, written by a separate agent and frozen before any run. DevMemory is the only setup above the 80% floor on both: 83% on set 1 with the shipped code and 98% on set 2, against 64 to 81% for the others. It is the cheapest per success on set 2. The gap comes from history tasks, where the answer lives in an earlier session. A bigger model without memory costs about 11 times more per success.</a:t>
             </a:r>
             <a:endParaRPr lang="en-US" dirty="0"/>
           </a:p>
@@ -2193,7 +2193,7 @@
           <a:p>
             <a:r>
               <a:rPr lang="en-US" dirty="0"/>
-              <a:t>Over 16 adaptive sessions building the same game, DevMemory used 1.85M input tokens versus 3.08M with no memory and 3.41M with a hand-written AGENTS.md, at the lowest cost. A human playtest found all three final builds playable; the automated check was flaky and triggered fix prompts for phantom bugs in every condition, so treat this gap as indicative. In the scripted 8-prompt build it used 0.61M tokens against 1.06M and 1.20M, and the AGENTS.md build crashed in Studio.</a:t>
+              <a:t>Over 16 sessions building Blade Swarm, DevMemory used 1.85M input tokens versus 3.08M with no memory and 3.41M with a self-maintained AGENTS.md, at the lowest cost. A human playtest found all three games playable. The automated playtest was flaky and triggered phantom-bug fixes in every setup, so the gap is indicative. In the scripted 8-prompt build, DevMemory used 0.61M tokens against 1.06M and 1.20M.</a:t>
             </a:r>
             <a:endParaRPr lang="en-US" dirty="0"/>
           </a:p>
@@ -2281,7 +2281,7 @@
           <a:p>
             <a:r>
               <a:rPr lang="en-US" dirty="0"/>
-              <a:t>We report the loss. In the web-app race round 1 DevMemory built 3 of 8 features against 8 of 8 because the pack missed the session where the user specified label colors; we fixed it with origin lineage and verbatim requirement memory, and round 2 is the re-test. The AGENTS.md build shows why a playtest gate matters, and the limitations are stated up front.</a:t>
+              <a:t>We report the loss. In web race round 1 DevMemory built 3 of 8 features because the pack missed the session where the user specified label colors; origin lineage and verbatim requirement memory fixed it, and round 2 was the re-test. Limitations are stated up front and detailed in RESULTS.md.</a:t>
             </a:r>
             <a:endParaRPr lang="en-US" dirty="0"/>
           </a:p>
@@ -2784,8 +2784,8 @@
         </p:nvSpPr>
         <p:spPr>
           <a:xfrm>
-            <a:off x="548640" y="914400"/>
-            <a:ext cx="4023360" cy="822960"/>
+            <a:off x="548640" y="502920"/>
+            <a:ext cx="4023360" cy="777240"/>
           </a:xfrm>
           <a:prstGeom prst="rect">
             <a:avLst/>
@@ -2801,7 +2801,7 @@
               <a:buNone/>
             </a:pPr>
             <a:r>
-              <a:rPr lang="en-US" sz="5400" b="1" dirty="0">
+              <a:rPr lang="en-US" sz="5200" b="1" dirty="0">
                 <a:solidFill>
                   <a:srgbClr val="EDEDED"/>
                 </a:solidFill>
@@ -2811,7 +2811,7 @@
               </a:rPr>
               <a:t>DevMemory</a:t>
             </a:r>
-            <a:endParaRPr lang="en-US" sz="5400" dirty="0"/>
+            <a:endParaRPr lang="en-US" sz="5200" dirty="0"/>
           </a:p>
         </p:txBody>
       </p:sp>
@@ -2823,8 +2823,8 @@
         </p:nvSpPr>
         <p:spPr>
           <a:xfrm>
-            <a:off x="548640" y="1828800"/>
-            <a:ext cx="3749040" cy="1005840"/>
+            <a:off x="548640" y="1325880"/>
+            <a:ext cx="3840480" cy="685800"/>
           </a:xfrm>
           <a:prstGeom prst="rect">
             <a:avLst/>
@@ -2840,7 +2840,7 @@
               <a:buNone/>
             </a:pPr>
             <a:r>
-              <a:rPr lang="en-US" sz="2200" b="1" dirty="0">
+              <a:rPr lang="en-US" sz="1900" b="1" dirty="0">
                 <a:solidFill>
                   <a:srgbClr val="8B7CF6"/>
                 </a:solidFill>
@@ -2850,20 +2850,20 @@
               </a:rPr>
               <a:t>Memory that lets every new AI coding session start warm</a:t>
             </a:r>
-            <a:endParaRPr lang="en-US" sz="2200" dirty="0"/>
-          </a:p>
-        </p:txBody>
-      </p:sp>
-      <p:sp>
-        <p:nvSpPr>
-          <p:cNvPr id="4" name="Event"/>
+            <a:endParaRPr lang="en-US" sz="1900" dirty="0"/>
+          </a:p>
+        </p:txBody>
+      </p:sp>
+      <p:sp>
+        <p:nvSpPr>
+          <p:cNvPr id="4" name="Summary"/>
           <p:cNvSpPr txBox="1"/>
           <p:nvPr/>
         </p:nvSpPr>
         <p:spPr>
           <a:xfrm>
-            <a:off x="548640" y="3566160"/>
-            <a:ext cx="3749040" cy="731520"/>
+            <a:off x="548640" y="2103120"/>
+            <a:ext cx="3840480" cy="1417320"/>
           </a:xfrm>
           <a:prstGeom prst="rect">
             <a:avLst/>
@@ -2879,7 +2879,63 @@
               <a:buNone/>
             </a:pPr>
             <a:r>
-              <a:rPr lang="en-US" sz="1300" dirty="0">
+              <a:rPr lang="en-US" sz="1250" dirty="0">
+                <a:solidFill>
+                  <a:srgbClr val="EDEDED"/>
+                </a:solidFill>
+                <a:latin typeface="Calibri" pitchFamily="34" charset="0"/>
+                <a:ea typeface="Calibri" pitchFamily="34" charset="-122"/>
+                <a:cs typeface="Calibri" pitchFamily="34" charset="-120"/>
+              </a:rPr>
+              <a:t>A local-first memory layer for AI coding tools. It records every AI session as plain files, and before each new session it hands the model a small, sourced briefing of about 1,000 tokens: the user's earlier decisions in their own words, the files that matter, and warnings where the code has changed since. No AI is used to build the briefing.</a:t>
+            </a:r>
+            <a:endParaRPr lang="en-US" sz="1250" dirty="0"/>
+          </a:p>
+        </p:txBody>
+      </p:sp>
+      <p:sp>
+        <p:nvSpPr>
+          <p:cNvPr id="5" name="Author and event"/>
+          <p:cNvSpPr txBox="1"/>
+          <p:nvPr/>
+        </p:nvSpPr>
+        <p:spPr>
+          <a:xfrm>
+            <a:off x="548640" y="3749040"/>
+            <a:ext cx="3840480" cy="731520"/>
+          </a:xfrm>
+          <a:prstGeom prst="rect">
+            <a:avLst/>
+          </a:prstGeom>
+          <a:noFill/>
+          <a:ln/>
+        </p:spPr>
+        <p:txBody>
+          <a:bodyPr wrap="square" lIns="0" tIns="0" rIns="0" bIns="0" rtlCol="0" anchor="t"/>
+          <a:lstStyle/>
+          <a:p>
+            <a:pPr indent="0" marL="0">
+              <a:buNone/>
+            </a:pPr>
+            <a:r>
+              <a:rPr lang="en-US" sz="1200" b="1" dirty="0">
+                <a:solidFill>
+                  <a:srgbClr val="EDEDED"/>
+                </a:solidFill>
+                <a:latin typeface="Calibri" pitchFamily="34" charset="0"/>
+                <a:ea typeface="Calibri" pitchFamily="34" charset="-122"/>
+                <a:cs typeface="Calibri" pitchFamily="34" charset="-120"/>
+              </a:rPr>
+              <a:t>Thamer Alhussain</a:t>
+            </a:r>
+            <a:endParaRPr lang="en-US" sz="1200" dirty="0"/>
+          </a:p>
+          <a:p>
+            <a:pPr indent="0" marL="0">
+              <a:buNone/>
+            </a:pPr>
+            <a:r>
+              <a:rPr lang="en-US" sz="1200" dirty="0">
                 <a:solidFill>
                   <a:srgbClr val="9AA0AA"/>
                 </a:solidFill>
@@ -2889,24 +2945,24 @@
               </a:rPr>
               <a:t>HUMAIN–Misk Future AI Builders Hackathon · Challenge 2: Deliver AI with Less Compute</a:t>
             </a:r>
-            <a:endParaRPr lang="en-US" sz="1300" dirty="0"/>
-          </a:p>
-        </p:txBody>
-      </p:sp>
-      <p:sp>
-        <p:nvSpPr>
-          <p:cNvPr id="5" name="DevMemory app overview frame"/>
+            <a:endParaRPr lang="en-US" sz="1200" dirty="0"/>
+          </a:p>
+        </p:txBody>
+      </p:sp>
+      <p:sp>
+        <p:nvSpPr>
+          <p:cNvPr id="6" name="DevMemory app overview frame"/>
           <p:cNvSpPr/>
           <p:nvPr/>
         </p:nvSpPr>
         <p:spPr>
           <a:xfrm>
-            <a:off x="4526280" y="1108710"/>
-            <a:ext cx="4297680" cy="2720340"/>
+            <a:off x="4572000" y="1100138"/>
+            <a:ext cx="4251960" cy="2691765"/>
           </a:xfrm>
           <a:prstGeom prst="roundRect">
             <a:avLst>
-              <a:gd name="adj" fmla="val 2689"/>
+              <a:gd name="adj" fmla="val 2718"/>
             </a:avLst>
           </a:prstGeom>
           <a:solidFill>
@@ -2922,7 +2978,7 @@
       </p:sp>
       <p:pic>
         <p:nvPicPr>
-          <p:cNvPr id="6" name="DevMemory app overview" descr="DevMemory app overview">    </p:cNvPr>
+          <p:cNvPr id="7" name="DevMemory app overview" descr="DevMemory app overview">    </p:cNvPr>
           <p:cNvPicPr>
             <a:picLocks noChangeAspect="1"/>
           </p:cNvPicPr>
@@ -2936,14 +2992,53 @@
         </p:blipFill>
         <p:spPr>
           <a:xfrm>
-            <a:off x="4572000" y="1154430"/>
-            <a:ext cx="4206240" cy="2628900"/>
+            <a:off x="4617720" y="1145858"/>
+            <a:ext cx="4160520" cy="2600325"/>
           </a:xfrm>
           <a:prstGeom prst="rect">
             <a:avLst/>
           </a:prstGeom>
         </p:spPr>
       </p:pic>
+      <p:sp>
+        <p:nvSpPr>
+          <p:cNvPr id="8" name="Screenshot caption"/>
+          <p:cNvSpPr txBox="1"/>
+          <p:nvPr/>
+        </p:nvSpPr>
+        <p:spPr>
+          <a:xfrm>
+            <a:off x="4617720" y="4206240"/>
+            <a:ext cx="4160520" cy="320040"/>
+          </a:xfrm>
+          <a:prstGeom prst="rect">
+            <a:avLst/>
+          </a:prstGeom>
+          <a:noFill/>
+          <a:ln/>
+        </p:spPr>
+        <p:txBody>
+          <a:bodyPr wrap="square" lIns="0" tIns="0" rIns="0" bIns="0" rtlCol="0" anchor="ctr"/>
+          <a:lstStyle/>
+          <a:p>
+            <a:pPr algn="ctr" indent="0" marL="0">
+              <a:buNone/>
+            </a:pPr>
+            <a:r>
+              <a:rPr lang="en-US" sz="1050" dirty="0">
+                <a:solidFill>
+                  <a:srgbClr val="9AA0AA"/>
+                </a:solidFill>
+                <a:latin typeface="Calibri" pitchFamily="34" charset="0"/>
+                <a:ea typeface="Calibri" pitchFamily="34" charset="-122"/>
+                <a:cs typeface="Calibri" pitchFamily="34" charset="-120"/>
+              </a:rPr>
+              <a:t>The DevMemory desktop app: a project's memory, browsable like a notes vault</a:t>
+            </a:r>
+            <a:endParaRPr lang="en-US" sz="1050" dirty="0"/>
+          </a:p>
+        </p:txBody>
+      </p:sp>
       <p:sp>
         <p:nvSpPr>
           <p:cNvPr id="25" name="Slide Number Placeholder 0"/>
@@ -3064,12 +3159,12 @@
         </p:nvSpPr>
         <p:spPr>
           <a:xfrm>
-            <a:off x="457200" y="1097280"/>
-            <a:ext cx="1947672" cy="1463040"/>
+            <a:off x="457200" y="1005840"/>
+            <a:ext cx="1947672" cy="1600200"/>
           </a:xfrm>
           <a:prstGeom prst="roundRect">
             <a:avLst>
-              <a:gd name="adj" fmla="val 6250"/>
+              <a:gd name="adj" fmla="val 5714"/>
             </a:avLst>
           </a:prstGeom>
           <a:solidFill>
@@ -3091,8 +3186,8 @@
         </p:nvSpPr>
         <p:spPr>
           <a:xfrm>
-            <a:off x="594360" y="1170432"/>
-            <a:ext cx="1691640" cy="640080"/>
+            <a:off x="594360" y="1078992"/>
+            <a:ext cx="1691640" cy="548640"/>
           </a:xfrm>
           <a:prstGeom prst="rect">
             <a:avLst/>
@@ -3108,7 +3203,7 @@
               <a:buNone/>
             </a:pPr>
             <a:r>
-              <a:rPr lang="en-US" sz="1700" b="1" dirty="0">
+              <a:rPr lang="en-US" sz="1500" b="1" dirty="0">
                 <a:solidFill>
                   <a:srgbClr val="8B7CF6"/>
                 </a:solidFill>
@@ -3118,7 +3213,7 @@
               </a:rPr>
               <a:t>Cheaper model + memory</a:t>
             </a:r>
-            <a:endParaRPr lang="en-US" sz="1700" dirty="0"/>
+            <a:endParaRPr lang="en-US" sz="1500" dirty="0"/>
           </a:p>
         </p:txBody>
       </p:sp>
@@ -3130,8 +3225,8 @@
         </p:nvSpPr>
         <p:spPr>
           <a:xfrm>
-            <a:off x="594360" y="1828800"/>
-            <a:ext cx="1691640" cy="685800"/>
+            <a:off x="594360" y="1664208"/>
+            <a:ext cx="1691640" cy="914400"/>
           </a:xfrm>
           <a:prstGeom prst="rect">
             <a:avLst/>
@@ -3147,7 +3242,7 @@
               <a:buNone/>
             </a:pPr>
             <a:r>
-              <a:rPr lang="en-US" sz="1200" dirty="0">
+              <a:rPr lang="en-US" sz="1050" dirty="0">
                 <a:solidFill>
                   <a:srgbClr val="EDEDED"/>
                 </a:solidFill>
@@ -3155,9 +3250,9 @@
                 <a:ea typeface="Calibri" pitchFamily="34" charset="-122"/>
                 <a:cs typeface="Calibri" pitchFamily="34" charset="-120"/>
               </a:rPr>
-              <a:t>beat a bigger model without it</a:t>
-            </a:r>
-            <a:endParaRPr lang="en-US" sz="1200" dirty="0"/>
+              <a:t>beat a bigger model without it: 83% vs 75% on the same tasks, at about a tenth of the cost per success</a:t>
+            </a:r>
+            <a:endParaRPr lang="en-US" sz="1050" dirty="0"/>
           </a:p>
         </p:txBody>
       </p:sp>
@@ -3169,12 +3264,12 @@
         </p:nvSpPr>
         <p:spPr>
           <a:xfrm>
-            <a:off x="2551176" y="1097280"/>
-            <a:ext cx="1947672" cy="1463040"/>
+            <a:off x="2551176" y="1005840"/>
+            <a:ext cx="1947672" cy="1600200"/>
           </a:xfrm>
           <a:prstGeom prst="roundRect">
             <a:avLst>
-              <a:gd name="adj" fmla="val 6250"/>
+              <a:gd name="adj" fmla="val 5714"/>
             </a:avLst>
           </a:prstGeom>
           <a:solidFill>
@@ -3196,8 +3291,8 @@
         </p:nvSpPr>
         <p:spPr>
           <a:xfrm>
-            <a:off x="2688336" y="1170432"/>
-            <a:ext cx="1691640" cy="640080"/>
+            <a:off x="2688336" y="1078992"/>
+            <a:ext cx="1691640" cy="548640"/>
           </a:xfrm>
           <a:prstGeom prst="rect">
             <a:avLst/>
@@ -3213,7 +3308,7 @@
               <a:buNone/>
             </a:pPr>
             <a:r>
-              <a:rPr lang="en-US" sz="1700" b="1" dirty="0">
+              <a:rPr lang="en-US" sz="1500" b="1" dirty="0">
                 <a:solidFill>
                   <a:srgbClr val="38D6E8"/>
                 </a:solidFill>
@@ -3223,7 +3318,7 @@
               </a:rPr>
               <a:t>~Half the tokens</a:t>
             </a:r>
-            <a:endParaRPr lang="en-US" sz="1700" dirty="0"/>
+            <a:endParaRPr lang="en-US" sz="1500" dirty="0"/>
           </a:p>
         </p:txBody>
       </p:sp>
@@ -3235,8 +3330,8 @@
         </p:nvSpPr>
         <p:spPr>
           <a:xfrm>
-            <a:off x="2688336" y="1828800"/>
-            <a:ext cx="1691640" cy="685800"/>
+            <a:off x="2688336" y="1664208"/>
+            <a:ext cx="1691640" cy="914400"/>
           </a:xfrm>
           <a:prstGeom prst="rect">
             <a:avLst/>
@@ -3252,7 +3347,7 @@
               <a:buNone/>
             </a:pPr>
             <a:r>
-              <a:rPr lang="en-US" sz="1200" dirty="0">
+              <a:rPr lang="en-US" sz="1050" dirty="0">
                 <a:solidFill>
                   <a:srgbClr val="EDEDED"/>
                 </a:solidFill>
@@ -3260,9 +3355,9 @@
                 <a:ea typeface="Calibri" pitchFamily="34" charset="-122"/>
                 <a:cs typeface="Calibri" pitchFamily="34" charset="-120"/>
               </a:rPr>
-              <a:t>over multi-session work</a:t>
-            </a:r>
-            <a:endParaRPr lang="en-US" sz="1200" dirty="0"/>
+              <a:t>over a real multi-session game build, with all three results playable</a:t>
+            </a:r>
+            <a:endParaRPr lang="en-US" sz="1050" dirty="0"/>
           </a:p>
         </p:txBody>
       </p:sp>
@@ -3274,12 +3369,12 @@
         </p:nvSpPr>
         <p:spPr>
           <a:xfrm>
-            <a:off x="4645152" y="1097280"/>
-            <a:ext cx="1947672" cy="1463040"/>
+            <a:off x="4645152" y="1005840"/>
+            <a:ext cx="1947672" cy="1600200"/>
           </a:xfrm>
           <a:prstGeom prst="roundRect">
             <a:avLst>
-              <a:gd name="adj" fmla="val 6250"/>
+              <a:gd name="adj" fmla="val 5714"/>
             </a:avLst>
           </a:prstGeom>
           <a:solidFill>
@@ -3301,8 +3396,8 @@
         </p:nvSpPr>
         <p:spPr>
           <a:xfrm>
-            <a:off x="4782312" y="1170432"/>
-            <a:ext cx="1691640" cy="640080"/>
+            <a:off x="4782312" y="1078992"/>
+            <a:ext cx="1691640" cy="548640"/>
           </a:xfrm>
           <a:prstGeom prst="rect">
             <a:avLst/>
@@ -3318,7 +3413,7 @@
               <a:buNone/>
             </a:pPr>
             <a:r>
-              <a:rPr lang="en-US" sz="1700" b="1" dirty="0">
+              <a:rPr lang="en-US" sz="1500" b="1" dirty="0">
                 <a:solidFill>
                   <a:srgbClr val="F5A524"/>
                 </a:solidFill>
@@ -3328,7 +3423,7 @@
               </a:rPr>
               <a:t>Works across tools</a:t>
             </a:r>
-            <a:endParaRPr lang="en-US" sz="1700" dirty="0"/>
+            <a:endParaRPr lang="en-US" sz="1500" dirty="0"/>
           </a:p>
         </p:txBody>
       </p:sp>
@@ -3340,8 +3435,8 @@
         </p:nvSpPr>
         <p:spPr>
           <a:xfrm>
-            <a:off x="4782312" y="1828800"/>
-            <a:ext cx="1691640" cy="685800"/>
+            <a:off x="4782312" y="1664208"/>
+            <a:ext cx="1691640" cy="914400"/>
           </a:xfrm>
           <a:prstGeom prst="rect">
             <a:avLst/>
@@ -3357,7 +3452,7 @@
               <a:buNone/>
             </a:pPr>
             <a:r>
-              <a:rPr lang="en-US" sz="1200" dirty="0">
+              <a:rPr lang="en-US" sz="1050" dirty="0">
                 <a:solidFill>
                   <a:srgbClr val="EDEDED"/>
                 </a:solidFill>
@@ -3367,7 +3462,7 @@
               </a:rPr>
               <a:t>Claude Code memory: Codex right 3/3 vs 0/3, 56% fewer tokens</a:t>
             </a:r>
-            <a:endParaRPr lang="en-US" sz="1200" dirty="0"/>
+            <a:endParaRPr lang="en-US" sz="1050" dirty="0"/>
           </a:p>
         </p:txBody>
       </p:sp>
@@ -3379,12 +3474,12 @@
         </p:nvSpPr>
         <p:spPr>
           <a:xfrm>
-            <a:off x="6739128" y="1097280"/>
-            <a:ext cx="1947672" cy="1463040"/>
+            <a:off x="6739128" y="1005840"/>
+            <a:ext cx="1947672" cy="1600200"/>
           </a:xfrm>
           <a:prstGeom prst="roundRect">
             <a:avLst>
-              <a:gd name="adj" fmla="val 6250"/>
+              <a:gd name="adj" fmla="val 5714"/>
             </a:avLst>
           </a:prstGeom>
           <a:solidFill>
@@ -3406,8 +3501,8 @@
         </p:nvSpPr>
         <p:spPr>
           <a:xfrm>
-            <a:off x="6876288" y="1170432"/>
-            <a:ext cx="1691640" cy="640080"/>
+            <a:off x="6876288" y="1078992"/>
+            <a:ext cx="1691640" cy="548640"/>
           </a:xfrm>
           <a:prstGeom prst="rect">
             <a:avLst/>
@@ -3423,7 +3518,7 @@
               <a:buNone/>
             </a:pPr>
             <a:r>
-              <a:rPr lang="en-US" sz="1700" b="1" dirty="0">
+              <a:rPr lang="en-US" sz="1500" b="1" dirty="0">
                 <a:solidFill>
                   <a:srgbClr val="3DD68C"/>
                 </a:solidFill>
@@ -3433,7 +3528,7 @@
               </a:rPr>
               <a:t>The user's own words</a:t>
             </a:r>
-            <a:endParaRPr lang="en-US" sz="1700" dirty="0"/>
+            <a:endParaRPr lang="en-US" sz="1500" dirty="0"/>
           </a:p>
         </p:txBody>
       </p:sp>
@@ -3445,8 +3540,8 @@
         </p:nvSpPr>
         <p:spPr>
           <a:xfrm>
-            <a:off x="6876288" y="1828800"/>
-            <a:ext cx="1691640" cy="685800"/>
+            <a:off x="6876288" y="1664208"/>
+            <a:ext cx="1691640" cy="914400"/>
           </a:xfrm>
           <a:prstGeom prst="rect">
             <a:avLst/>
@@ -3462,7 +3557,7 @@
               <a:buNone/>
             </a:pPr>
             <a:r>
-              <a:rPr lang="en-US" sz="1200" dirty="0">
+              <a:rPr lang="en-US" sz="1050" dirty="0">
                 <a:solidFill>
                   <a:srgbClr val="EDEDED"/>
                 </a:solidFill>
@@ -3470,9 +3565,9 @@
                 <a:ea typeface="Calibri" pitchFamily="34" charset="-122"/>
                 <a:cs typeface="Calibri" pitchFamily="34" charset="-120"/>
               </a:rPr>
-              <a:t>are what make memory useful</a:t>
-            </a:r>
-            <a:endParaRPr lang="en-US" sz="1200" dirty="0"/>
+              <a:t>are what make memory useful: requirements kept verbatim, never paraphrased</a:t>
+            </a:r>
+            <a:endParaRPr lang="en-US" sz="1050" dirty="0"/>
           </a:p>
         </p:txBody>
       </p:sp>
@@ -3485,7 +3580,7 @@
         <p:spPr>
           <a:xfrm>
             <a:off x="457200" y="2743200"/>
-            <a:ext cx="1828800" cy="320040"/>
+            <a:ext cx="1828800" cy="292608"/>
           </a:xfrm>
           <a:prstGeom prst="rect">
             <a:avLst/>
@@ -3501,7 +3596,7 @@
               <a:buNone/>
             </a:pPr>
             <a:r>
-              <a:rPr lang="en-US" sz="1800" b="1" dirty="0">
+              <a:rPr lang="en-US" sz="1600" b="1" dirty="0">
                 <a:solidFill>
                   <a:srgbClr val="EDEDED"/>
                 </a:solidFill>
@@ -3511,7 +3606,7 @@
               </a:rPr>
               <a:t>Next</a:t>
             </a:r>
-            <a:endParaRPr lang="en-US" sz="1800" dirty="0"/>
+            <a:endParaRPr lang="en-US" sz="1600" dirty="0"/>
           </a:p>
         </p:txBody>
       </p:sp>
@@ -3523,8 +3618,8 @@
         </p:nvSpPr>
         <p:spPr>
           <a:xfrm>
-            <a:off x="457200" y="3108960"/>
-            <a:ext cx="4572000" cy="1371600"/>
+            <a:off x="457200" y="3063240"/>
+            <a:ext cx="4572000" cy="1463040"/>
           </a:xfrm>
           <a:prstGeom prst="rect">
             <a:avLst/>
@@ -3544,7 +3639,21 @@
               <a:buChar char="•"/>
             </a:pPr>
             <a:r>
-              <a:rPr lang="en-US" sz="1400" dirty="0">
+              <a:rPr lang="en-US" sz="1100" b="1" dirty="0">
+                <a:solidFill>
+                  <a:srgbClr val="38D6E8"/>
+                </a:solidFill>
+                <a:latin typeface="Calibri" pitchFamily="34" charset="0"/>
+                <a:ea typeface="Calibri" pitchFamily="34" charset="-122"/>
+                <a:cs typeface="Calibri" pitchFamily="34" charset="-120"/>
+              </a:rPr>
+              <a:t>Install: </a:t>
+            </a:r>
+            <a:pPr indent="0" marL="0">
+              <a:buNone/>
+            </a:pPr>
+            <a:r>
+              <a:rPr lang="en-US" sz="1100" dirty="0">
                 <a:solidFill>
                   <a:srgbClr val="EDEDED"/>
                 </a:solidFill>
@@ -3552,9 +3661,9 @@
                 <a:ea typeface="Calibri" pitchFamily="34" charset="-122"/>
                 <a:cs typeface="Calibri" pitchFamily="34" charset="-120"/>
               </a:rPr>
-              <a:t>Claude Code plugin: one-command install</a:t>
-            </a:r>
-            <a:endParaRPr lang="en-US" sz="1400" dirty="0"/>
+              <a:t>a one-command Claude Code plugin.</a:t>
+            </a:r>
+            <a:endParaRPr lang="en-US" sz="1100" dirty="0"/>
           </a:p>
           <a:p>
             <a:pPr marL="342900" indent="-342900">
@@ -3565,7 +3674,21 @@
               <a:buChar char="•"/>
             </a:pPr>
             <a:r>
-              <a:rPr lang="en-US" sz="1400" dirty="0">
+              <a:rPr lang="en-US" sz="1100" b="1" dirty="0">
+                <a:solidFill>
+                  <a:srgbClr val="38D6E8"/>
+                </a:solidFill>
+                <a:latin typeface="Calibri" pitchFamily="34" charset="0"/>
+                <a:ea typeface="Calibri" pitchFamily="34" charset="-122"/>
+                <a:cs typeface="Calibri" pitchFamily="34" charset="-120"/>
+              </a:rPr>
+              <a:t>More tools: </a:t>
+            </a:r>
+            <a:pPr indent="0" marL="0">
+              <a:buNone/>
+            </a:pPr>
+            <a:r>
+              <a:rPr lang="en-US" sz="1100" dirty="0">
                 <a:solidFill>
                   <a:srgbClr val="EDEDED"/>
                 </a:solidFill>
@@ -3573,9 +3696,9 @@
                 <a:ea typeface="Calibri" pitchFamily="34" charset="-122"/>
                 <a:cs typeface="Calibri" pitchFamily="34" charset="-120"/>
               </a:rPr>
-              <a:t>Test the MCP server in Cursor and VS Code</a:t>
-            </a:r>
-            <a:endParaRPr lang="en-US" sz="1400" dirty="0"/>
+              <a:t>test the MCP server in Cursor and VS Code.</a:t>
+            </a:r>
+            <a:endParaRPr lang="en-US" sz="1100" dirty="0"/>
           </a:p>
           <a:p>
             <a:pPr marL="342900" indent="-342900">
@@ -3586,7 +3709,21 @@
               <a:buChar char="•"/>
             </a:pPr>
             <a:r>
-              <a:rPr lang="en-US" sz="1400" dirty="0">
+              <a:rPr lang="en-US" sz="1100" b="1" dirty="0">
+                <a:solidFill>
+                  <a:srgbClr val="38D6E8"/>
+                </a:solidFill>
+                <a:latin typeface="Calibri" pitchFamily="34" charset="0"/>
+                <a:ea typeface="Calibri" pitchFamily="34" charset="-122"/>
+                <a:cs typeface="Calibri" pitchFamily="34" charset="-120"/>
+              </a:rPr>
+              <a:t>Game dev: </a:t>
+            </a:r>
+            <a:pPr indent="0" marL="0">
+              <a:buNone/>
+            </a:pPr>
+            <a:r>
+              <a:rPr lang="en-US" sz="1100" dirty="0">
                 <a:solidFill>
                   <a:srgbClr val="EDEDED"/>
                 </a:solidFill>
@@ -3594,9 +3731,9 @@
                 <a:ea typeface="Calibri" pitchFamily="34" charset="-122"/>
                 <a:cs typeface="Calibri" pitchFamily="34" charset="-120"/>
               </a:rPr>
-              <a:t>Studio playtest gate in the loop</a:t>
-            </a:r>
-            <a:endParaRPr lang="en-US" sz="1400" dirty="0"/>
+              <a:t>a Roblox Studio playtest gate in the loop, then more engines.</a:t>
+            </a:r>
+            <a:endParaRPr lang="en-US" sz="1100" dirty="0"/>
           </a:p>
           <a:p>
             <a:pPr marL="342900" indent="-342900">
@@ -3607,7 +3744,21 @@
               <a:buChar char="•"/>
             </a:pPr>
             <a:r>
-              <a:rPr lang="en-US" sz="1400" dirty="0">
+              <a:rPr lang="en-US" sz="1100" b="1" dirty="0">
+                <a:solidFill>
+                  <a:srgbClr val="38D6E8"/>
+                </a:solidFill>
+                <a:latin typeface="Calibri" pitchFamily="34" charset="0"/>
+                <a:ea typeface="Calibri" pitchFamily="34" charset="-122"/>
+                <a:cs typeface="Calibri" pitchFamily="34" charset="-120"/>
+              </a:rPr>
+              <a:t>Scale: </a:t>
+            </a:r>
+            <a:pPr indent="0" marL="0">
+              <a:buNone/>
+            </a:pPr>
+            <a:r>
+              <a:rPr lang="en-US" sz="1100" dirty="0">
                 <a:solidFill>
                   <a:srgbClr val="EDEDED"/>
                 </a:solidFill>
@@ -3615,9 +3766,9 @@
                 <a:ea typeface="Calibri" pitchFamily="34" charset="-122"/>
                 <a:cs typeface="Calibri" pitchFamily="34" charset="-120"/>
               </a:rPr>
-              <a:t>More engines</a:t>
-            </a:r>
-            <a:endParaRPr lang="en-US" sz="1400" dirty="0"/>
+              <a:t>larger, real (non-synthetic) projects and more repeats.</a:t>
+            </a:r>
+            <a:endParaRPr lang="en-US" sz="1100" dirty="0"/>
           </a:p>
         </p:txBody>
       </p:sp>
@@ -3629,7 +3780,7 @@
         </p:nvSpPr>
         <p:spPr>
           <a:xfrm>
-            <a:off x="5257800" y="2789505"/>
+            <a:off x="5257800" y="2835225"/>
             <a:ext cx="3474720" cy="1278990"/>
           </a:xfrm>
           <a:prstGeom prst="roundRect">
@@ -3664,7 +3815,7 @@
         </p:blipFill>
         <p:spPr>
           <a:xfrm>
-            <a:off x="5303520" y="2835225"/>
+            <a:off x="5303520" y="2880945"/>
             <a:ext cx="3383280" cy="1187550"/>
           </a:xfrm>
           <a:prstGeom prst="rect">
@@ -3697,7 +3848,7 @@
               <a:buNone/>
             </a:pPr>
             <a:r>
-              <a:rPr lang="en-US" sz="1100" dirty="0">
+              <a:rPr lang="en-US" sz="1050" dirty="0">
                 <a:solidFill>
                   <a:srgbClr val="9AA0AA"/>
                 </a:solidFill>
@@ -3705,9 +3856,9 @@
                 <a:ea typeface="Calibri" pitchFamily="34" charset="-122"/>
                 <a:cs typeface="Calibri" pitchFamily="34" charset="-120"/>
               </a:rPr>
-              <a:t>Repo: DevMemory (source, benchmark, results) · RESULTS.md · bench/METHODOLOGY.md</a:t>
-            </a:r>
-            <a:endParaRPr lang="en-US" sz="1100" dirty="0"/>
+              <a:t>github.com/Thamer-A/devmemory-hackathon  ·  RESULTS.md (all numbers and disclosures)  ·  bench/METHODOLOGY.md</a:t>
+            </a:r>
+            <a:endParaRPr lang="en-US" sz="1050" dirty="0"/>
           </a:p>
         </p:txBody>
       </p:sp>
@@ -3856,7 +4007,7 @@
                 <a:ea typeface="Calibri" pitchFamily="34" charset="-122"/>
                 <a:cs typeface="Calibri" pitchFamily="34" charset="-120"/>
               </a:rPr>
-              <a:t>It re-reads the project, forgets earlier decisions, and repeats fixed bugs</a:t>
+              <a:t>It re-reads the project, forgets earlier decisions, and guesses what the user meant</a:t>
             </a:r>
             <a:endParaRPr lang="en-US" sz="1500" dirty="0"/>
           </a:p>
@@ -3870,12 +4021,12 @@
         </p:nvSpPr>
         <p:spPr>
           <a:xfrm>
-            <a:off x="457200" y="1508760"/>
-            <a:ext cx="2606040" cy="2834640"/>
+            <a:off x="457200" y="1325880"/>
+            <a:ext cx="2606040" cy="2011680"/>
           </a:xfrm>
           <a:prstGeom prst="roundRect">
             <a:avLst>
-              <a:gd name="adj" fmla="val 3509"/>
+              <a:gd name="adj" fmla="val 4545"/>
             </a:avLst>
           </a:prstGeom>
           <a:solidFill>
@@ -3897,8 +4048,8 @@
         </p:nvSpPr>
         <p:spPr>
           <a:xfrm>
-            <a:off x="640080" y="1691640"/>
-            <a:ext cx="2240280" cy="914400"/>
+            <a:off x="640080" y="1417320"/>
+            <a:ext cx="2240280" cy="731520"/>
           </a:xfrm>
           <a:prstGeom prst="rect">
             <a:avLst/>
@@ -3914,7 +4065,7 @@
               <a:buNone/>
             </a:pPr>
             <a:r>
-              <a:rPr lang="en-US" sz="5400" b="1" dirty="0">
+              <a:rPr lang="en-US" sz="4400" b="1" dirty="0">
                 <a:solidFill>
                   <a:srgbClr val="8B7CF6"/>
                 </a:solidFill>
@@ -3924,7 +4075,7 @@
               </a:rPr>
               <a:t>0 of 3</a:t>
             </a:r>
-            <a:endParaRPr lang="en-US" sz="5400" dirty="0"/>
+            <a:endParaRPr lang="en-US" sz="4400" dirty="0"/>
           </a:p>
         </p:txBody>
       </p:sp>
@@ -3936,8 +4087,8 @@
         </p:nvSpPr>
         <p:spPr>
           <a:xfrm>
-            <a:off x="640080" y="2651760"/>
-            <a:ext cx="2240280" cy="365760"/>
+            <a:off x="640080" y="2176272"/>
+            <a:ext cx="2240280" cy="320040"/>
           </a:xfrm>
           <a:prstGeom prst="rect">
             <a:avLst/>
@@ -3953,7 +4104,7 @@
               <a:buNone/>
             </a:pPr>
             <a:r>
-              <a:rPr lang="en-US" sz="1800" b="1" dirty="0">
+              <a:rPr lang="en-US" sz="1500" b="1" dirty="0">
                 <a:solidFill>
                   <a:srgbClr val="EDEDED"/>
                 </a:solidFill>
@@ -3963,7 +4114,7 @@
               </a:rPr>
               <a:t>restored the spec</a:t>
             </a:r>
-            <a:endParaRPr lang="en-US" sz="1800" dirty="0"/>
+            <a:endParaRPr lang="en-US" sz="1500" dirty="0"/>
           </a:p>
         </p:txBody>
       </p:sp>
@@ -3975,8 +4126,8 @@
         </p:nvSpPr>
         <p:spPr>
           <a:xfrm>
-            <a:off x="640080" y="3108960"/>
-            <a:ext cx="2240280" cy="914400"/>
+            <a:off x="640080" y="2514600"/>
+            <a:ext cx="2286000" cy="777240"/>
           </a:xfrm>
           <a:prstGeom prst="rect">
             <a:avLst/>
@@ -3992,7 +4143,7 @@
               <a:buNone/>
             </a:pPr>
             <a:r>
-              <a:rPr lang="en-US" sz="1400" dirty="0">
+              <a:rPr lang="en-US" sz="1150" dirty="0">
                 <a:solidFill>
                   <a:srgbClr val="9AA0AA"/>
                 </a:solidFill>
@@ -4002,7 +4153,7 @@
               </a:rPr>
               <a:t>Codex runs without memory, asked to put back colors the user chose earlier</a:t>
             </a:r>
-            <a:endParaRPr lang="en-US" sz="1400" dirty="0"/>
+            <a:endParaRPr lang="en-US" sz="1150" dirty="0"/>
           </a:p>
         </p:txBody>
       </p:sp>
@@ -4014,12 +4165,12 @@
         </p:nvSpPr>
         <p:spPr>
           <a:xfrm>
-            <a:off x="3246120" y="1508760"/>
-            <a:ext cx="2606040" cy="2834640"/>
+            <a:off x="3246120" y="1325880"/>
+            <a:ext cx="2606040" cy="2011680"/>
           </a:xfrm>
           <a:prstGeom prst="roundRect">
             <a:avLst>
-              <a:gd name="adj" fmla="val 3509"/>
+              <a:gd name="adj" fmla="val 4545"/>
             </a:avLst>
           </a:prstGeom>
           <a:solidFill>
@@ -4041,8 +4192,8 @@
         </p:nvSpPr>
         <p:spPr>
           <a:xfrm>
-            <a:off x="3429000" y="1691640"/>
-            <a:ext cx="2240280" cy="914400"/>
+            <a:off x="3429000" y="1417320"/>
+            <a:ext cx="2240280" cy="731520"/>
           </a:xfrm>
           <a:prstGeom prst="rect">
             <a:avLst/>
@@ -4058,7 +4209,7 @@
               <a:buNone/>
             </a:pPr>
             <a:r>
-              <a:rPr lang="en-US" sz="5400" b="1" dirty="0">
+              <a:rPr lang="en-US" sz="4400" b="1" dirty="0">
                 <a:solidFill>
                   <a:srgbClr val="38D6E8"/>
                 </a:solidFill>
@@ -4068,7 +4219,7 @@
               </a:rPr>
               <a:t>3 of 12</a:t>
             </a:r>
-            <a:endParaRPr lang="en-US" sz="5400" dirty="0"/>
+            <a:endParaRPr lang="en-US" sz="4400" dirty="0"/>
           </a:p>
         </p:txBody>
       </p:sp>
@@ -4080,8 +4231,8 @@
         </p:nvSpPr>
         <p:spPr>
           <a:xfrm>
-            <a:off x="3429000" y="2651760"/>
-            <a:ext cx="2240280" cy="365760"/>
+            <a:off x="3429000" y="2176272"/>
+            <a:ext cx="2240280" cy="320040"/>
           </a:xfrm>
           <a:prstGeom prst="rect">
             <a:avLst/>
@@ -4097,7 +4248,7 @@
               <a:buNone/>
             </a:pPr>
             <a:r>
-              <a:rPr lang="en-US" sz="1800" b="1" dirty="0">
+              <a:rPr lang="en-US" sz="1500" b="1" dirty="0">
                 <a:solidFill>
                   <a:srgbClr val="EDEDED"/>
                 </a:solidFill>
@@ -4107,7 +4258,7 @@
               </a:rPr>
               <a:t>history tasks solved</a:t>
             </a:r>
-            <a:endParaRPr lang="en-US" sz="1800" dirty="0"/>
+            <a:endParaRPr lang="en-US" sz="1500" dirty="0"/>
           </a:p>
         </p:txBody>
       </p:sp>
@@ -4119,8 +4270,8 @@
         </p:nvSpPr>
         <p:spPr>
           <a:xfrm>
-            <a:off x="3429000" y="3108960"/>
-            <a:ext cx="2240280" cy="914400"/>
+            <a:off x="3429000" y="2514600"/>
+            <a:ext cx="2286000" cy="777240"/>
           </a:xfrm>
           <a:prstGeom prst="rect">
             <a:avLst/>
@@ -4136,7 +4287,7 @@
               <a:buNone/>
             </a:pPr>
             <a:r>
-              <a:rPr lang="en-US" sz="1400" dirty="0">
+              <a:rPr lang="en-US" sz="1150" dirty="0">
                 <a:solidFill>
                   <a:srgbClr val="9AA0AA"/>
                 </a:solidFill>
@@ -4146,7 +4297,7 @@
               </a:rPr>
               <a:t>without memory, on unseen tasks that need an earlier decision</a:t>
             </a:r>
-            <a:endParaRPr lang="en-US" sz="1400" dirty="0"/>
+            <a:endParaRPr lang="en-US" sz="1150" dirty="0"/>
           </a:p>
         </p:txBody>
       </p:sp>
@@ -4158,12 +4309,12 @@
         </p:nvSpPr>
         <p:spPr>
           <a:xfrm>
-            <a:off x="6035040" y="1508760"/>
-            <a:ext cx="2606040" cy="2834640"/>
+            <a:off x="6035040" y="1325880"/>
+            <a:ext cx="2606040" cy="2011680"/>
           </a:xfrm>
           <a:prstGeom prst="roundRect">
             <a:avLst>
-              <a:gd name="adj" fmla="val 3509"/>
+              <a:gd name="adj" fmla="val 4545"/>
             </a:avLst>
           </a:prstGeom>
           <a:solidFill>
@@ -4185,8 +4336,8 @@
         </p:nvSpPr>
         <p:spPr>
           <a:xfrm>
-            <a:off x="6217920" y="1691640"/>
-            <a:ext cx="2240280" cy="914400"/>
+            <a:off x="6217920" y="1417320"/>
+            <a:ext cx="2240280" cy="731520"/>
           </a:xfrm>
           <a:prstGeom prst="rect">
             <a:avLst/>
@@ -4202,7 +4353,7 @@
               <a:buNone/>
             </a:pPr>
             <a:r>
-              <a:rPr lang="en-US" sz="5400" b="1" dirty="0">
+              <a:rPr lang="en-US" sz="4400" b="1" dirty="0">
                 <a:solidFill>
                   <a:srgbClr val="F5A524"/>
                 </a:solidFill>
@@ -4210,9 +4361,9 @@
                 <a:ea typeface="Calibri" pitchFamily="34" charset="-122"/>
                 <a:cs typeface="Calibri" pitchFamily="34" charset="-120"/>
               </a:rPr>
-              <a:t>1 of 3</a:t>
-            </a:r>
-            <a:endParaRPr lang="en-US" sz="5400" dirty="0"/>
+              <a:t>11×</a:t>
+            </a:r>
+            <a:endParaRPr lang="en-US" sz="4400" dirty="0"/>
           </a:p>
         </p:txBody>
       </p:sp>
@@ -4224,8 +4375,8 @@
         </p:nvSpPr>
         <p:spPr>
           <a:xfrm>
-            <a:off x="6217920" y="2651760"/>
-            <a:ext cx="2240280" cy="365760"/>
+            <a:off x="6217920" y="2176272"/>
+            <a:ext cx="2240280" cy="320040"/>
           </a:xfrm>
           <a:prstGeom prst="rect">
             <a:avLst/>
@@ -4241,7 +4392,7 @@
               <a:buNone/>
             </a:pPr>
             <a:r>
-              <a:rPr lang="en-US" sz="1800" b="1" dirty="0">
+              <a:rPr lang="en-US" sz="1500" b="1" dirty="0">
                 <a:solidFill>
                   <a:srgbClr val="EDEDED"/>
                 </a:solidFill>
@@ -4249,9 +4400,9 @@
                 <a:ea typeface="Calibri" pitchFamily="34" charset="-122"/>
                 <a:cs typeface="Calibri" pitchFamily="34" charset="-120"/>
               </a:rPr>
-              <a:t>builds crashed</a:t>
-            </a:r>
-            <a:endParaRPr lang="en-US" sz="1800" dirty="0"/>
+              <a:t>cost of a bigger model</a:t>
+            </a:r>
+            <a:endParaRPr lang="en-US" sz="1500" dirty="0"/>
           </a:p>
         </p:txBody>
       </p:sp>
@@ -4263,8 +4414,8 @@
         </p:nvSpPr>
         <p:spPr>
           <a:xfrm>
-            <a:off x="6217920" y="3108960"/>
-            <a:ext cx="2240280" cy="914400"/>
+            <a:off x="6217920" y="2514600"/>
+            <a:ext cx="2286000" cy="777240"/>
           </a:xfrm>
           <a:prstGeom prst="rect">
             <a:avLst/>
@@ -4280,7 +4431,7 @@
               <a:buNone/>
             </a:pPr>
             <a:r>
-              <a:rPr lang="en-US" sz="1400" dirty="0">
+              <a:rPr lang="en-US" sz="1150" dirty="0">
                 <a:solidFill>
                   <a:srgbClr val="9AA0AA"/>
                 </a:solidFill>
@@ -4288,22 +4439,49 @@
                 <a:ea typeface="Calibri" pitchFamily="34" charset="-122"/>
                 <a:cs typeface="Calibri" pitchFamily="34" charset="-120"/>
               </a:rPr>
-              <a:t>passed static checks, script error on start in Roblox Studio</a:t>
-            </a:r>
-            <a:endParaRPr lang="en-US" sz="1400" dirty="0"/>
-          </a:p>
-        </p:txBody>
-      </p:sp>
-      <p:sp>
-        <p:nvSpPr>
-          <p:cNvPr id="16" name="Source"/>
+              <a:t>per success for Sonnet without memory, and it still missed the accuracy bar</a:t>
+            </a:r>
+            <a:endParaRPr lang="en-US" sz="1150" dirty="0"/>
+          </a:p>
+        </p:txBody>
+      </p:sp>
+      <p:sp>
+        <p:nvSpPr>
+          <p:cNvPr id="16" name="Why panel"/>
+          <p:cNvSpPr/>
+          <p:nvPr/>
+        </p:nvSpPr>
+        <p:spPr>
+          <a:xfrm>
+            <a:off x="457200" y="3520440"/>
+            <a:ext cx="8229600" cy="1188720"/>
+          </a:xfrm>
+          <a:prstGeom prst="roundRect">
+            <a:avLst>
+              <a:gd name="adj" fmla="val 7692"/>
+            </a:avLst>
+          </a:prstGeom>
+          <a:solidFill>
+            <a:srgbClr val="161A22"/>
+          </a:solidFill>
+          <a:ln w="9525">
+            <a:solidFill>
+              <a:srgbClr val="232834"/>
+            </a:solidFill>
+            <a:prstDash val="solid"/>
+          </a:ln>
+        </p:spPr>
+      </p:sp>
+      <p:sp>
+        <p:nvSpPr>
+          <p:cNvPr id="17" name="Why text"/>
           <p:cNvSpPr txBox="1"/>
           <p:nvPr/>
         </p:nvSpPr>
         <p:spPr>
           <a:xfrm>
-            <a:off x="457200" y="4526280"/>
-            <a:ext cx="5486400" cy="274320"/>
+            <a:off x="640080" y="3611880"/>
+            <a:ext cx="7863840" cy="1005840"/>
           </a:xfrm>
           <a:prstGeom prst="rect">
             <a:avLst/>
@@ -4319,17 +4497,31 @@
               <a:buNone/>
             </a:pPr>
             <a:r>
-              <a:rPr lang="en-US" sz="1100" dirty="0">
-                <a:solidFill>
-                  <a:srgbClr val="9AA0AA"/>
-                </a:solidFill>
-                <a:latin typeface="Calibri" pitchFamily="34" charset="0"/>
-                <a:ea typeface="Calibri" pitchFamily="34" charset="-122"/>
-                <a:cs typeface="Calibri" pitchFamily="34" charset="-120"/>
-              </a:rPr>
-              <a:t>Measured in our own runs (details on slides 6–9).</a:t>
-            </a:r>
-            <a:endParaRPr lang="en-US" sz="1100" dirty="0"/>
+              <a:rPr lang="en-US" sz="1250" b="1" dirty="0">
+                <a:solidFill>
+                  <a:srgbClr val="38D6E8"/>
+                </a:solidFill>
+                <a:latin typeface="Calibri" pitchFamily="34" charset="0"/>
+                <a:ea typeface="Calibri" pitchFamily="34" charset="-122"/>
+                <a:cs typeface="Calibri" pitchFamily="34" charset="-120"/>
+              </a:rPr>
+              <a:t>Why this wastes compute. </a:t>
+            </a:r>
+            <a:pPr indent="0" marL="0">
+              <a:buNone/>
+            </a:pPr>
+            <a:r>
+              <a:rPr lang="en-US" sz="1250" dirty="0">
+                <a:solidFill>
+                  <a:srgbClr val="EDEDED"/>
+                </a:solidFill>
+                <a:latin typeface="Calibri" pitchFamily="34" charset="0"/>
+                <a:ea typeface="Calibri" pitchFamily="34" charset="-122"/>
+                <a:cs typeface="Calibri" pitchFamily="34" charset="-120"/>
+              </a:rPr>
+              <a:t>Without memory, each session either re-explores the project (tokens spent rediscovering what was already known) or guesses (wrong results, more sessions to fix them). A bigger model or a longer context window does not fix this: the missing information is not in the code at all, it lives in earlier conversations. DevMemory keeps those conversations and sends the few lines that matter.</a:t>
+            </a:r>
+            <a:endParaRPr lang="en-US" sz="1250" dirty="0"/>
           </a:p>
         </p:txBody>
       </p:sp>
@@ -4439,7 +4631,7 @@
                 <a:ea typeface="Calibri" pitchFamily="34" charset="-122"/>
                 <a:cs typeface="Calibri" pitchFamily="34" charset="-120"/>
               </a:rPr>
-              <a:t>Scan, capture, pack, deliver</a:t>
+              <a:t>How it works: scan, capture, pack, deliver</a:t>
             </a:r>
             <a:endParaRPr lang="en-US" sz="3200" dirty="0"/>
           </a:p>
@@ -4453,8 +4645,8 @@
         </p:nvSpPr>
         <p:spPr>
           <a:xfrm>
-            <a:off x="457200" y="1097280"/>
-            <a:ext cx="1920240" cy="2971800"/>
+            <a:off x="457200" y="1051560"/>
+            <a:ext cx="1920240" cy="3063240"/>
           </a:xfrm>
           <a:prstGeom prst="roundRect">
             <a:avLst>
@@ -4480,8 +4672,8 @@
         </p:nvSpPr>
         <p:spPr>
           <a:xfrm>
-            <a:off x="640080" y="1371600"/>
-            <a:ext cx="548640" cy="548640"/>
+            <a:off x="621792" y="1188720"/>
+            <a:ext cx="457200" cy="457200"/>
           </a:xfrm>
           <a:prstGeom prst="ellipse">
             <a:avLst/>
@@ -4505,8 +4697,8 @@
         </p:nvSpPr>
         <p:spPr>
           <a:xfrm>
-            <a:off x="640080" y="1371600"/>
-            <a:ext cx="548640" cy="548640"/>
+            <a:off x="621792" y="1188720"/>
+            <a:ext cx="457200" cy="457200"/>
           </a:xfrm>
           <a:prstGeom prst="rect">
             <a:avLst/>
@@ -4522,7 +4714,7 @@
               <a:buNone/>
             </a:pPr>
             <a:r>
-              <a:rPr lang="en-US" sz="2200" b="1" dirty="0">
+              <a:rPr lang="en-US" sz="1800" b="1" dirty="0">
                 <a:solidFill>
                   <a:srgbClr val="0F1115"/>
                 </a:solidFill>
@@ -4532,7 +4724,7 @@
               </a:rPr>
               <a:t>1</a:t>
             </a:r>
-            <a:endParaRPr lang="en-US" sz="2200" dirty="0"/>
+            <a:endParaRPr lang="en-US" sz="1800" dirty="0"/>
           </a:p>
         </p:txBody>
       </p:sp>
@@ -4544,8 +4736,8 @@
         </p:nvSpPr>
         <p:spPr>
           <a:xfrm>
-            <a:off x="640080" y="2057400"/>
-            <a:ext cx="1554480" cy="365760"/>
+            <a:off x="1188720" y="1188720"/>
+            <a:ext cx="1097280" cy="457200"/>
           </a:xfrm>
           <a:prstGeom prst="rect">
             <a:avLst/>
@@ -4561,7 +4753,7 @@
               <a:buNone/>
             </a:pPr>
             <a:r>
-              <a:rPr lang="en-US" sz="2000" b="1" dirty="0">
+              <a:rPr lang="en-US" sz="1800" b="1" dirty="0">
                 <a:solidFill>
                   <a:srgbClr val="EDEDED"/>
                 </a:solidFill>
@@ -4571,7 +4763,7 @@
               </a:rPr>
               <a:t>Scan</a:t>
             </a:r>
-            <a:endParaRPr lang="en-US" sz="2000" dirty="0"/>
+            <a:endParaRPr lang="en-US" sz="1800" dirty="0"/>
           </a:p>
         </p:txBody>
       </p:sp>
@@ -4583,8 +4775,8 @@
         </p:nvSpPr>
         <p:spPr>
           <a:xfrm>
-            <a:off x="640080" y="2468880"/>
-            <a:ext cx="1600200" cy="1371600"/>
+            <a:off x="621792" y="1783080"/>
+            <a:ext cx="1645920" cy="2286000"/>
           </a:xfrm>
           <a:prstGeom prst="rect">
             <a:avLst/>
@@ -4600,17 +4792,17 @@
               <a:buNone/>
             </a:pPr>
             <a:r>
-              <a:rPr lang="en-US" sz="1300" dirty="0">
-                <a:solidFill>
-                  <a:srgbClr val="9AA0AA"/>
-                </a:solidFill>
-                <a:latin typeface="Calibri" pitchFamily="34" charset="0"/>
-                <a:ea typeface="Calibri" pitchFamily="34" charset="-122"/>
-                <a:cs typeface="Calibri" pitchFamily="34" charset="-120"/>
-              </a:rPr>
-              <a:t>Deterministic project map. 0 LLM tokens, ~25 ms.</a:t>
-            </a:r>
-            <a:endParaRPr lang="en-US" sz="1300" dirty="0"/>
+              <a:rPr lang="en-US" sz="1100" dirty="0">
+                <a:solidFill>
+                  <a:srgbClr val="EDEDED"/>
+                </a:solidFill>
+                <a:latin typeface="Calibri" pitchFamily="34" charset="0"/>
+                <a:ea typeface="Calibri" pitchFamily="34" charset="-122"/>
+                <a:cs typeface="Calibri" pitchFamily="34" charset="-120"/>
+              </a:rPr>
+              <a:t>Builds a project map deterministically: files, symbols, the require graph, Roblox remotes and config keys, and the project's own conventions as observed in the code. 0 AI tokens; about 150 ms on Blade Swarm.</a:t>
+            </a:r>
+            <a:endParaRPr lang="en-US" sz="1100" dirty="0"/>
           </a:p>
         </p:txBody>
       </p:sp>
@@ -4622,7 +4814,7 @@
         </p:nvSpPr>
         <p:spPr>
           <a:xfrm>
-            <a:off x="2359152" y="2286000"/>
+            <a:off x="2359152" y="2377440"/>
             <a:ext cx="219456" cy="457200"/>
           </a:xfrm>
           <a:prstGeom prst="rect">
@@ -4661,8 +4853,8 @@
         </p:nvSpPr>
         <p:spPr>
           <a:xfrm>
-            <a:off x="2560320" y="1097280"/>
-            <a:ext cx="1920240" cy="2971800"/>
+            <a:off x="2560320" y="1051560"/>
+            <a:ext cx="1920240" cy="3063240"/>
           </a:xfrm>
           <a:prstGeom prst="roundRect">
             <a:avLst>
@@ -4688,8 +4880,8 @@
         </p:nvSpPr>
         <p:spPr>
           <a:xfrm>
-            <a:off x="2743200" y="1371600"/>
-            <a:ext cx="548640" cy="548640"/>
+            <a:off x="2724912" y="1188720"/>
+            <a:ext cx="457200" cy="457200"/>
           </a:xfrm>
           <a:prstGeom prst="ellipse">
             <a:avLst/>
@@ -4713,8 +4905,8 @@
         </p:nvSpPr>
         <p:spPr>
           <a:xfrm>
-            <a:off x="2743200" y="1371600"/>
-            <a:ext cx="548640" cy="548640"/>
+            <a:off x="2724912" y="1188720"/>
+            <a:ext cx="457200" cy="457200"/>
           </a:xfrm>
           <a:prstGeom prst="rect">
             <a:avLst/>
@@ -4730,7 +4922,7 @@
               <a:buNone/>
             </a:pPr>
             <a:r>
-              <a:rPr lang="en-US" sz="2200" b="1" dirty="0">
+              <a:rPr lang="en-US" sz="1800" b="1" dirty="0">
                 <a:solidFill>
                   <a:srgbClr val="0F1115"/>
                 </a:solidFill>
@@ -4740,7 +4932,7 @@
               </a:rPr>
               <a:t>2</a:t>
             </a:r>
-            <a:endParaRPr lang="en-US" sz="2200" dirty="0"/>
+            <a:endParaRPr lang="en-US" sz="1800" dirty="0"/>
           </a:p>
         </p:txBody>
       </p:sp>
@@ -4752,8 +4944,8 @@
         </p:nvSpPr>
         <p:spPr>
           <a:xfrm>
-            <a:off x="2743200" y="2057400"/>
-            <a:ext cx="1554480" cy="365760"/>
+            <a:off x="3291840" y="1188720"/>
+            <a:ext cx="1097280" cy="457200"/>
           </a:xfrm>
           <a:prstGeom prst="rect">
             <a:avLst/>
@@ -4769,7 +4961,7 @@
               <a:buNone/>
             </a:pPr>
             <a:r>
-              <a:rPr lang="en-US" sz="2000" b="1" dirty="0">
+              <a:rPr lang="en-US" sz="1800" b="1" dirty="0">
                 <a:solidFill>
                   <a:srgbClr val="EDEDED"/>
                 </a:solidFill>
@@ -4779,7 +4971,7 @@
               </a:rPr>
               <a:t>Capture</a:t>
             </a:r>
-            <a:endParaRPr lang="en-US" sz="2000" dirty="0"/>
+            <a:endParaRPr lang="en-US" sz="1800" dirty="0"/>
           </a:p>
         </p:txBody>
       </p:sp>
@@ -4791,8 +4983,8 @@
         </p:nvSpPr>
         <p:spPr>
           <a:xfrm>
-            <a:off x="2743200" y="2468880"/>
-            <a:ext cx="1600200" cy="1371600"/>
+            <a:off x="2724912" y="1783080"/>
+            <a:ext cx="1645920" cy="2286000"/>
           </a:xfrm>
           <a:prstGeom prst="rect">
             <a:avLst/>
@@ -4808,17 +5000,17 @@
               <a:buNone/>
             </a:pPr>
             <a:r>
-              <a:rPr lang="en-US" sz="1300" dirty="0">
-                <a:solidFill>
-                  <a:srgbClr val="9AA0AA"/>
-                </a:solidFill>
-                <a:latin typeface="Calibri" pitchFamily="34" charset="0"/>
-                <a:ea typeface="Calibri" pitchFamily="34" charset="-122"/>
-                <a:cs typeface="Calibri" pitchFamily="34" charset="-120"/>
-              </a:rPr>
-              <a:t>Every session, from any AI tool: Claude Code stream-json, Codex JSON events, or a project snapshot diff. Prompts, edits, file hashes.</a:t>
-            </a:r>
-            <a:endParaRPr lang="en-US" sz="1300" dirty="0"/>
+              <a:rPr lang="en-US" sz="1100" dirty="0">
+                <a:solidFill>
+                  <a:srgbClr val="EDEDED"/>
+                </a:solidFill>
+                <a:latin typeface="Calibri" pitchFamily="34" charset="0"/>
+                <a:ea typeface="Calibri" pitchFamily="34" charset="-122"/>
+                <a:cs typeface="Calibri" pitchFamily="34" charset="-120"/>
+              </a:rPr>
+              <a:t>Records every AI session through documented interfaces: Claude Code stream-json, Codex JSON events, or a project snapshot diff for any other tool. Prompts, visible replies, tool calls, edits and file hashes, as plain files.</a:t>
+            </a:r>
+            <a:endParaRPr lang="en-US" sz="1100" dirty="0"/>
           </a:p>
         </p:txBody>
       </p:sp>
@@ -4830,7 +5022,7 @@
         </p:nvSpPr>
         <p:spPr>
           <a:xfrm>
-            <a:off x="4462272" y="2286000"/>
+            <a:off x="4462272" y="2377440"/>
             <a:ext cx="219456" cy="457200"/>
           </a:xfrm>
           <a:prstGeom prst="rect">
@@ -4869,8 +5061,8 @@
         </p:nvSpPr>
         <p:spPr>
           <a:xfrm>
-            <a:off x="4663440" y="1097280"/>
-            <a:ext cx="1920240" cy="2971800"/>
+            <a:off x="4663440" y="1051560"/>
+            <a:ext cx="1920240" cy="3063240"/>
           </a:xfrm>
           <a:prstGeom prst="roundRect">
             <a:avLst>
@@ -4896,8 +5088,8 @@
         </p:nvSpPr>
         <p:spPr>
           <a:xfrm>
-            <a:off x="4846320" y="1371600"/>
-            <a:ext cx="548640" cy="548640"/>
+            <a:off x="4828032" y="1188720"/>
+            <a:ext cx="457200" cy="457200"/>
           </a:xfrm>
           <a:prstGeom prst="ellipse">
             <a:avLst/>
@@ -4921,8 +5113,8 @@
         </p:nvSpPr>
         <p:spPr>
           <a:xfrm>
-            <a:off x="4846320" y="1371600"/>
-            <a:ext cx="548640" cy="548640"/>
+            <a:off x="4828032" y="1188720"/>
+            <a:ext cx="457200" cy="457200"/>
           </a:xfrm>
           <a:prstGeom prst="rect">
             <a:avLst/>
@@ -4938,7 +5130,7 @@
               <a:buNone/>
             </a:pPr>
             <a:r>
-              <a:rPr lang="en-US" sz="2200" b="1" dirty="0">
+              <a:rPr lang="en-US" sz="1800" b="1" dirty="0">
                 <a:solidFill>
                   <a:srgbClr val="0F1115"/>
                 </a:solidFill>
@@ -4948,7 +5140,7 @@
               </a:rPr>
               <a:t>3</a:t>
             </a:r>
-            <a:endParaRPr lang="en-US" sz="2200" dirty="0"/>
+            <a:endParaRPr lang="en-US" sz="1800" dirty="0"/>
           </a:p>
         </p:txBody>
       </p:sp>
@@ -4960,8 +5152,8 @@
         </p:nvSpPr>
         <p:spPr>
           <a:xfrm>
-            <a:off x="4846320" y="2057400"/>
-            <a:ext cx="1554480" cy="365760"/>
+            <a:off x="5394960" y="1188720"/>
+            <a:ext cx="1097280" cy="457200"/>
           </a:xfrm>
           <a:prstGeom prst="rect">
             <a:avLst/>
@@ -4977,7 +5169,7 @@
               <a:buNone/>
             </a:pPr>
             <a:r>
-              <a:rPr lang="en-US" sz="2000" b="1" dirty="0">
+              <a:rPr lang="en-US" sz="1800" b="1" dirty="0">
                 <a:solidFill>
                   <a:srgbClr val="EDEDED"/>
                 </a:solidFill>
@@ -4987,7 +5179,7 @@
               </a:rPr>
               <a:t>Pack</a:t>
             </a:r>
-            <a:endParaRPr lang="en-US" sz="2000" dirty="0"/>
+            <a:endParaRPr lang="en-US" sz="1800" dirty="0"/>
           </a:p>
         </p:txBody>
       </p:sp>
@@ -4999,8 +5191,8 @@
         </p:nvSpPr>
         <p:spPr>
           <a:xfrm>
-            <a:off x="4846320" y="2468880"/>
-            <a:ext cx="1600200" cy="1371600"/>
+            <a:off x="4828032" y="1783080"/>
+            <a:ext cx="1645920" cy="2286000"/>
           </a:xfrm>
           <a:prstGeom prst="rect">
             <a:avLst/>
@@ -5016,17 +5208,17 @@
               <a:buNone/>
             </a:pPr>
             <a:r>
-              <a:rPr lang="en-US" sz="1300" dirty="0">
-                <a:solidFill>
-                  <a:srgbClr val="9AA0AA"/>
-                </a:solidFill>
-                <a:latin typeface="Calibri" pitchFamily="34" charset="0"/>
-                <a:ea typeface="Calibri" pitchFamily="34" charset="-122"/>
-                <a:cs typeface="Calibri" pitchFamily="34" charset="-120"/>
-              </a:rPr>
-              <a:t>Task-specific context: original requirements verbatim, the session where a feature was first asked for, files with evidence lines, STALE flags.</a:t>
-            </a:r>
-            <a:endParaRPr lang="en-US" sz="1300" dirty="0"/>
+              <a:rPr lang="en-US" sz="1100" dirty="0">
+                <a:solidFill>
+                  <a:srgbClr val="EDEDED"/>
+                </a:solidFill>
+                <a:latin typeface="Calibri" pitchFamily="34" charset="0"/>
+                <a:ea typeface="Calibri" pitchFamily="34" charset="-122"/>
+                <a:cs typeface="Calibri" pitchFamily="34" charset="-120"/>
+              </a:rPr>
+              <a:t>For a new request, ranks past sessions and files (BM25 plus dependency links) and assembles about 1,000 tokens: the user's earlier requirements verbatim, the session where the feature began, exact lines, and STALE flags.</a:t>
+            </a:r>
+            <a:endParaRPr lang="en-US" sz="1100" dirty="0"/>
           </a:p>
         </p:txBody>
       </p:sp>
@@ -5038,7 +5230,7 @@
         </p:nvSpPr>
         <p:spPr>
           <a:xfrm>
-            <a:off x="6565392" y="2286000"/>
+            <a:off x="6565392" y="2377440"/>
             <a:ext cx="219456" cy="457200"/>
           </a:xfrm>
           <a:prstGeom prst="rect">
@@ -5077,8 +5269,8 @@
         </p:nvSpPr>
         <p:spPr>
           <a:xfrm>
-            <a:off x="6766560" y="1097280"/>
-            <a:ext cx="1920240" cy="2971800"/>
+            <a:off x="6766560" y="1051560"/>
+            <a:ext cx="1920240" cy="3063240"/>
           </a:xfrm>
           <a:prstGeom prst="roundRect">
             <a:avLst>
@@ -5104,8 +5296,8 @@
         </p:nvSpPr>
         <p:spPr>
           <a:xfrm>
-            <a:off x="6949440" y="1371600"/>
-            <a:ext cx="548640" cy="548640"/>
+            <a:off x="6931152" y="1188720"/>
+            <a:ext cx="457200" cy="457200"/>
           </a:xfrm>
           <a:prstGeom prst="ellipse">
             <a:avLst/>
@@ -5129,8 +5321,8 @@
         </p:nvSpPr>
         <p:spPr>
           <a:xfrm>
-            <a:off x="6949440" y="1371600"/>
-            <a:ext cx="548640" cy="548640"/>
+            <a:off x="6931152" y="1188720"/>
+            <a:ext cx="457200" cy="457200"/>
           </a:xfrm>
           <a:prstGeom prst="rect">
             <a:avLst/>
@@ -5146,7 +5338,7 @@
               <a:buNone/>
             </a:pPr>
             <a:r>
-              <a:rPr lang="en-US" sz="2200" b="1" dirty="0">
+              <a:rPr lang="en-US" sz="1800" b="1" dirty="0">
                 <a:solidFill>
                   <a:srgbClr val="0F1115"/>
                 </a:solidFill>
@@ -5156,7 +5348,7 @@
               </a:rPr>
               <a:t>4</a:t>
             </a:r>
-            <a:endParaRPr lang="en-US" sz="2200" dirty="0"/>
+            <a:endParaRPr lang="en-US" sz="1800" dirty="0"/>
           </a:p>
         </p:txBody>
       </p:sp>
@@ -5168,8 +5360,8 @@
         </p:nvSpPr>
         <p:spPr>
           <a:xfrm>
-            <a:off x="6949440" y="2057400"/>
-            <a:ext cx="1554480" cy="365760"/>
+            <a:off x="7498080" y="1188720"/>
+            <a:ext cx="1097280" cy="457200"/>
           </a:xfrm>
           <a:prstGeom prst="rect">
             <a:avLst/>
@@ -5185,7 +5377,7 @@
               <a:buNone/>
             </a:pPr>
             <a:r>
-              <a:rPr lang="en-US" sz="2000" b="1" dirty="0">
+              <a:rPr lang="en-US" sz="1800" b="1" dirty="0">
                 <a:solidFill>
                   <a:srgbClr val="EDEDED"/>
                 </a:solidFill>
@@ -5195,7 +5387,7 @@
               </a:rPr>
               <a:t>Deliver</a:t>
             </a:r>
-            <a:endParaRPr lang="en-US" sz="2000" dirty="0"/>
+            <a:endParaRPr lang="en-US" sz="1800" dirty="0"/>
           </a:p>
         </p:txBody>
       </p:sp>
@@ -5207,8 +5399,8 @@
         </p:nvSpPr>
         <p:spPr>
           <a:xfrm>
-            <a:off x="6949440" y="2468880"/>
-            <a:ext cx="1600200" cy="1371600"/>
+            <a:off x="6931152" y="1783080"/>
+            <a:ext cx="1645920" cy="2286000"/>
           </a:xfrm>
           <a:prstGeom prst="rect">
             <a:avLst/>
@@ -5224,30 +5416,30 @@
               <a:buNone/>
             </a:pPr>
             <a:r>
-              <a:rPr lang="en-US" sz="1300" dirty="0">
-                <a:solidFill>
-                  <a:srgbClr val="9AA0AA"/>
-                </a:solidFill>
-                <a:latin typeface="Calibri" pitchFamily="34" charset="0"/>
-                <a:ea typeface="Calibri" pitchFamily="34" charset="-122"/>
-                <a:cs typeface="Calibri" pitchFamily="34" charset="-120"/>
-              </a:rPr>
-              <a:t>Claude Code hook, an MCP server for any client, or the pack in any agent's prompt. About 1k tokens.</a:t>
-            </a:r>
-            <a:endParaRPr lang="en-US" sz="1300" dirty="0"/>
-          </a:p>
-        </p:txBody>
-      </p:sp>
-      <p:sp>
-        <p:nvSpPr>
-          <p:cNvPr id="26" name="Tagline"/>
+              <a:rPr lang="en-US" sz="1100" dirty="0">
+                <a:solidFill>
+                  <a:srgbClr val="EDEDED"/>
+                </a:solidFill>
+                <a:latin typeface="Calibri" pitchFamily="34" charset="0"/>
+                <a:ea typeface="Calibri" pitchFamily="34" charset="-122"/>
+                <a:cs typeface="Calibri" pitchFamily="34" charset="-120"/>
+              </a:rPr>
+              <a:t>Injected automatically by a Claude Code hook, served to any MCP client by DevMemory's MCP server, or placed in any agent's prompt. The full archive never enters the prompt.</a:t>
+            </a:r>
+            <a:endParaRPr lang="en-US" sz="1100" dirty="0"/>
+          </a:p>
+        </p:txBody>
+      </p:sp>
+      <p:sp>
+        <p:nvSpPr>
+          <p:cNvPr id="26" name="Design choices"/>
           <p:cNvSpPr txBox="1"/>
           <p:nvPr/>
         </p:nvSpPr>
         <p:spPr>
           <a:xfrm>
-            <a:off x="457200" y="4206240"/>
-            <a:ext cx="8229600" cy="548640"/>
+            <a:off x="457200" y="4224528"/>
+            <a:ext cx="8229600" cy="457200"/>
           </a:xfrm>
           <a:prstGeom prst="rect">
             <a:avLst/>
@@ -5259,21 +5451,35 @@
           <a:bodyPr wrap="square" lIns="0" tIns="0" rIns="0" bIns="0" rtlCol="0" anchor="ctr"/>
           <a:lstStyle/>
           <a:p>
-            <a:pPr algn="ctr" indent="0" marL="0">
-              <a:buNone/>
-            </a:pPr>
-            <a:r>
-              <a:rPr lang="en-US" sz="2400" b="1" i="1" dirty="0">
-                <a:solidFill>
-                  <a:srgbClr val="8B7CF6"/>
-                </a:solidFill>
-                <a:latin typeface="Calibri" pitchFamily="34" charset="0"/>
-                <a:ea typeface="Calibri" pitchFamily="34" charset="-122"/>
-                <a:cs typeface="Calibri" pitchFamily="34" charset="-120"/>
-              </a:rPr>
-              <a:t>Preserve everything, send only what earns its tokens.</a:t>
-            </a:r>
-            <a:endParaRPr lang="en-US" sz="2400" dirty="0"/>
+            <a:pPr indent="0" marL="0">
+              <a:buNone/>
+            </a:pPr>
+            <a:r>
+              <a:rPr lang="en-US" sz="1150" b="1" dirty="0">
+                <a:solidFill>
+                  <a:srgbClr val="38D6E8"/>
+                </a:solidFill>
+                <a:latin typeface="Calibri" pitchFamily="34" charset="0"/>
+                <a:ea typeface="Calibri" pitchFamily="34" charset="-122"/>
+                <a:cs typeface="Calibri" pitchFamily="34" charset="-120"/>
+              </a:rPr>
+              <a:t>Design choices: </a:t>
+            </a:r>
+            <a:pPr indent="0" marL="0">
+              <a:buNone/>
+            </a:pPr>
+            <a:r>
+              <a:rPr lang="en-US" sz="1150" dirty="0">
+                <a:solidFill>
+                  <a:srgbClr val="9AA0AA"/>
+                </a:solidFill>
+                <a:latin typeface="Calibri" pitchFamily="34" charset="0"/>
+                <a:ea typeface="Calibri" pitchFamily="34" charset="-122"/>
+                <a:cs typeface="Calibri" pitchFamily="34" charset="-120"/>
+              </a:rPr>
+              <a:t>plain files on the developer's machine · no vector database · no AI in capture or retrieval · every item carries its source and freshness · preserve everything, send only what earns its tokens</a:t>
+            </a:r>
+            <a:endParaRPr lang="en-US" sz="1150" dirty="0"/>
           </a:p>
         </p:txBody>
       </p:sp>
@@ -5383,7 +5589,7 @@
                 <a:ea typeface="Calibri" pitchFamily="34" charset="-122"/>
                 <a:cs typeface="Calibri" pitchFamily="34" charset="-120"/>
               </a:rPr>
-              <a:t>What a context pack looks like</a:t>
+              <a:t>Example: what a fresh session receives</a:t>
             </a:r>
             <a:endParaRPr lang="en-US" sz="3200" dirty="0"/>
           </a:p>
@@ -5422,7 +5628,7 @@
                 <a:ea typeface="Calibri" pitchFamily="34" charset="-122"/>
                 <a:cs typeface="Calibri" pitchFamily="34" charset="-120"/>
               </a:rPr>
-              <a:t>Real excerpt from a Roblox benchmark project</a:t>
+              <a:t>Blade Swarm, a Roblox game built by prompting. The real pack for one request (excerpt)</a:t>
             </a:r>
             <a:endParaRPr lang="en-US" sz="1500" dirty="0"/>
           </a:p>
@@ -5437,11 +5643,11 @@
         <p:spPr>
           <a:xfrm>
             <a:off x="457200" y="1325880"/>
-            <a:ext cx="5029200" cy="3108960"/>
+            <a:ext cx="4937760" cy="3383280"/>
           </a:xfrm>
           <a:prstGeom prst="roundRect">
             <a:avLst>
-              <a:gd name="adj" fmla="val 2941"/>
+              <a:gd name="adj" fmla="val 2703"/>
             </a:avLst>
           </a:prstGeom>
           <a:solidFill>
@@ -5463,8 +5669,8 @@
         </p:nvSpPr>
         <p:spPr>
           <a:xfrm>
-            <a:off x="640080" y="1463040"/>
-            <a:ext cx="4663440" cy="2834640"/>
+            <a:off x="594360" y="1444752"/>
+            <a:ext cx="4663440" cy="3154680"/>
           </a:xfrm>
           <a:prstGeom prst="rect">
             <a:avLst/>
@@ -5478,12 +5684,12 @@
           <a:p>
             <a:pPr indent="0" marL="0">
               <a:spcAft>
-                <a:spcPts val="600"/>
+                <a:spcPts val="500"/>
               </a:spcAft>
               <a:buNone/>
             </a:pPr>
             <a:r>
-              <a:rPr lang="en-US" sz="1100" b="1" dirty="0">
+              <a:rPr lang="en-US" sz="950" b="1" dirty="0">
                 <a:solidFill>
                   <a:srgbClr val="38D6E8"/>
                 </a:solidFill>
@@ -5491,59 +5697,59 @@
                 <a:ea typeface="Courier New" pitchFamily="34" charset="-122"/>
                 <a:cs typeface="Courier New" pitchFamily="34" charset="-120"/>
               </a:rPr>
-              <a:t>## Relevant past sessions</a:t>
-            </a:r>
-            <a:endParaRPr lang="en-US" sz="1100" dirty="0"/>
+              <a:t>## Conventions (observed in code)</a:t>
+            </a:r>
+            <a:endParaRPr lang="en-US" sz="950" dirty="0"/>
           </a:p>
           <a:p>
             <a:pPr indent="0" marL="0">
               <a:spcAft>
-                <a:spcPts val="600"/>
+                <a:spcPts val="500"/>
               </a:spcAft>
               <a:buNone/>
             </a:pPr>
             <a:r>
-              <a:rPr lang="en-US" sz="1100" dirty="0">
-                <a:solidFill>
-                  <a:srgbClr val="F5A524"/>
+              <a:rPr lang="en-US" sz="950" dirty="0">
+                <a:solidFill>
+                  <a:srgbClr val="EDEDED"/>
                 </a:solidFill>
                 <a:latin typeface="Courier New" pitchFamily="34" charset="0"/>
                 <a:ea typeface="Courier New" pitchFamily="34" charset="-122"/>
                 <a:cs typeface="Courier New" pitchFamily="34" charset="-120"/>
               </a:rPr>
-              <a:t>- [session 68c540e0] **STALE**: edits no longer present in EnemyService.luau — verify current code</a:t>
-            </a:r>
-            <a:endParaRPr lang="en-US" sz="1100" dirty="0"/>
+              <a:t>- Tunables live in src/shared/Config.lua (51 keys)</a:t>
+            </a:r>
+            <a:endParaRPr lang="en-US" sz="950" dirty="0"/>
           </a:p>
           <a:p>
             <a:pPr indent="0" marL="0">
               <a:spcAft>
-                <a:spcPts val="600"/>
+                <a:spcPts val="500"/>
               </a:spcAft>
               <a:buNone/>
             </a:pPr>
             <a:r>
-              <a:rPr lang="en-US" sz="1100" dirty="0">
-                <a:solidFill>
-                  <a:srgbClr val="3DD68C"/>
+              <a:rPr lang="en-US" sz="950" dirty="0">
+                <a:solidFill>
+                  <a:srgbClr val="EDEDED"/>
                 </a:solidFill>
                 <a:latin typeface="Courier New" pitchFamily="34" charset="0"/>
                 <a:ea typeface="Courier New" pitchFamily="34" charset="-122"/>
                 <a:cs typeface="Courier New" pitchFamily="34" charset="-120"/>
               </a:rPr>
-              <a:t>  - User asked: "Raise Grunt damage from 10 to 12. Brute damage stays at 25."</a:t>
-            </a:r>
-            <a:endParaRPr lang="en-US" sz="1100" dirty="0"/>
+              <a:t>- RemoteEvents only in src/shared/Remotes.lua</a:t>
+            </a:r>
+            <a:endParaRPr lang="en-US" sz="950" dirty="0"/>
           </a:p>
           <a:p>
             <a:pPr indent="0" marL="0">
               <a:spcAft>
-                <a:spcPts val="600"/>
+                <a:spcPts val="500"/>
               </a:spcAft>
               <a:buNone/>
             </a:pPr>
             <a:r>
-              <a:rPr lang="en-US" sz="1100" b="1" dirty="0">
+              <a:rPr lang="en-US" sz="950" b="1" dirty="0">
                 <a:solidFill>
                   <a:srgbClr val="38D6E8"/>
                 </a:solidFill>
@@ -5551,19 +5757,19 @@
                 <a:ea typeface="Courier New" pitchFamily="34" charset="-122"/>
                 <a:cs typeface="Courier New" pitchFamily="34" charset="-120"/>
               </a:rPr>
-              <a:t>## Relevant files</a:t>
-            </a:r>
-            <a:endParaRPr lang="en-US" sz="1100" dirty="0"/>
+              <a:t>## What the user asked for earlier (verbatim)</a:t>
+            </a:r>
+            <a:endParaRPr lang="en-US" sz="950" dirty="0"/>
           </a:p>
           <a:p>
             <a:pPr indent="0" marL="0">
               <a:spcAft>
-                <a:spcPts val="600"/>
+                <a:spcPts val="500"/>
               </a:spcAft>
               <a:buNone/>
             </a:pPr>
             <a:r>
-              <a:rPr lang="en-US" sz="1100" dirty="0">
+              <a:rPr lang="en-US" sz="950" dirty="0">
                 <a:solidFill>
                   <a:srgbClr val="EDEDED"/>
                 </a:solidFill>
@@ -5571,9 +5777,229 @@
                 <a:ea typeface="Courier New" pitchFamily="34" charset="-122"/>
                 <a:cs typeface="Courier New" pitchFamily="34" charset="-120"/>
               </a:rPr>
-              <a:t>- src/shared/Config.luau — L40: Brute = { health = 200, speed = 8, damage = 25 }</a:t>
-            </a:r>
-            <a:endParaRPr lang="en-US" sz="1100" dirty="0"/>
+              <a:t>- "Decisions: start with 2 blades, orbit radius 7 studs"</a:t>
+            </a:r>
+            <a:endParaRPr lang="en-US" sz="950" dirty="0"/>
+          </a:p>
+          <a:p>
+            <a:pPr indent="0" marL="0">
+              <a:spcAft>
+                <a:spcPts val="500"/>
+              </a:spcAft>
+              <a:buNone/>
+            </a:pPr>
+            <a:r>
+              <a:rPr lang="en-US" sz="950" b="1" dirty="0">
+                <a:solidFill>
+                  <a:srgbClr val="38D6E8"/>
+                </a:solidFill>
+                <a:latin typeface="Courier New" pitchFamily="34" charset="0"/>
+                <a:ea typeface="Courier New" pitchFamily="34" charset="-122"/>
+                <a:cs typeface="Courier New" pitchFamily="34" charset="-120"/>
+              </a:rPr>
+              <a:t>## Relevant past sessions</a:t>
+            </a:r>
+            <a:endParaRPr lang="en-US" sz="950" dirty="0"/>
+          </a:p>
+          <a:p>
+            <a:pPr indent="0" marL="0">
+              <a:spcAft>
+                <a:spcPts val="500"/>
+              </a:spcAft>
+              <a:buNone/>
+            </a:pPr>
+            <a:r>
+              <a:rPr lang="en-US" sz="950" dirty="0">
+                <a:solidFill>
+                  <a:srgbClr val="EDEDED"/>
+                </a:solidFill>
+                <a:latin typeface="Courier New" pitchFamily="34" charset="0"/>
+                <a:ea typeface="Courier New" pitchFamily="34" charset="-122"/>
+                <a:cs typeface="Courier New" pitchFamily="34" charset="-120"/>
+              </a:rPr>
+              <a:t>- [session dbf18bb2] User asked: "Now the upgrade</a:t>
+            </a:r>
+            <a:endParaRPr lang="en-US" sz="950" dirty="0"/>
+          </a:p>
+          <a:p>
+            <a:pPr indent="0" marL="0">
+              <a:spcAft>
+                <a:spcPts val="500"/>
+              </a:spcAft>
+              <a:buNone/>
+            </a:pPr>
+            <a:r>
+              <a:rPr lang="en-US" sz="950" dirty="0">
+                <a:solidFill>
+                  <a:srgbClr val="EDEDED"/>
+                </a:solidFill>
+                <a:latin typeface="Courier New" pitchFamily="34" charset="0"/>
+                <a:ea typeface="Courier New" pitchFamily="34" charset="-122"/>
+                <a:cs typeface="Courier New" pitchFamily="34" charset="-120"/>
+              </a:rPr>
+              <a:t>  shop ... +1 Blade (Rare, 60 coins), Sharper Blades</a:t>
+            </a:r>
+            <a:endParaRPr lang="en-US" sz="950" dirty="0"/>
+          </a:p>
+          <a:p>
+            <a:pPr indent="0" marL="0">
+              <a:spcAft>
+                <a:spcPts val="500"/>
+              </a:spcAft>
+              <a:buNone/>
+            </a:pPr>
+            <a:r>
+              <a:rPr lang="en-US" sz="950" dirty="0">
+                <a:solidFill>
+                  <a:srgbClr val="EDEDED"/>
+                </a:solidFill>
+                <a:latin typeface="Courier New" pitchFamily="34" charset="0"/>
+                <a:ea typeface="Courier New" pitchFamily="34" charset="-122"/>
+                <a:cs typeface="Courier New" pitchFamily="34" charset="-120"/>
+              </a:rPr>
+              <a:t>  (Common, 30) ... Greed +25% coins (Rare, 50) ..."</a:t>
+            </a:r>
+            <a:endParaRPr lang="en-US" sz="950" dirty="0"/>
+          </a:p>
+          <a:p>
+            <a:pPr indent="0" marL="0">
+              <a:spcAft>
+                <a:spcPts val="500"/>
+              </a:spcAft>
+              <a:buNone/>
+            </a:pPr>
+            <a:r>
+              <a:rPr lang="en-US" sz="950" dirty="0">
+                <a:solidFill>
+                  <a:srgbClr val="3DD68C"/>
+                </a:solidFill>
+                <a:latin typeface="Courier New" pitchFamily="34" charset="0"/>
+                <a:ea typeface="Courier New" pitchFamily="34" charset="-122"/>
+                <a:cs typeface="Courier New" pitchFamily="34" charset="-120"/>
+              </a:rPr>
+              <a:t>- [session 3e2bb0e2] User asked: "... rarity colors</a:t>
+            </a:r>
+            <a:endParaRPr lang="en-US" sz="950" dirty="0"/>
+          </a:p>
+          <a:p>
+            <a:pPr indent="0" marL="0">
+              <a:spcAft>
+                <a:spcPts val="500"/>
+              </a:spcAft>
+              <a:buNone/>
+            </a:pPr>
+            <a:r>
+              <a:rPr lang="en-US" sz="950" dirty="0">
+                <a:solidFill>
+                  <a:srgbClr val="3DD68C"/>
+                </a:solidFill>
+                <a:latin typeface="Courier New" pitchFamily="34" charset="0"/>
+                <a:ea typeface="Courier New" pitchFamily="34" charset="-122"/>
+                <a:cs typeface="Courier New" pitchFamily="34" charset="-120"/>
+              </a:rPr>
+              <a:t>  Common = gray, Rare = blue, Epic = purple ..."</a:t>
+            </a:r>
+            <a:endParaRPr lang="en-US" sz="950" dirty="0"/>
+          </a:p>
+          <a:p>
+            <a:pPr indent="0" marL="0">
+              <a:spcAft>
+                <a:spcPts val="500"/>
+              </a:spcAft>
+              <a:buNone/>
+            </a:pPr>
+            <a:r>
+              <a:rPr lang="en-US" sz="950" dirty="0">
+                <a:solidFill>
+                  <a:srgbClr val="3DD68C"/>
+                </a:solidFill>
+                <a:latin typeface="Courier New" pitchFamily="34" charset="0"/>
+                <a:ea typeface="Courier New" pitchFamily="34" charset="-122"/>
+                <a:cs typeface="Courier New" pitchFamily="34" charset="-120"/>
+              </a:rPr>
+              <a:t>  Outcome: "The colors live in a new Config.Ui</a:t>
+            </a:r>
+            <a:endParaRPr lang="en-US" sz="950" dirty="0"/>
+          </a:p>
+          <a:p>
+            <a:pPr indent="0" marL="0">
+              <a:spcAft>
+                <a:spcPts val="500"/>
+              </a:spcAft>
+              <a:buNone/>
+            </a:pPr>
+            <a:r>
+              <a:rPr lang="en-US" sz="950" dirty="0">
+                <a:solidFill>
+                  <a:srgbClr val="3DD68C"/>
+                </a:solidFill>
+                <a:latin typeface="Courier New" pitchFamily="34" charset="0"/>
+                <a:ea typeface="Courier New" pitchFamily="34" charset="-122"/>
+                <a:cs typeface="Courier New" pitchFamily="34" charset="-120"/>
+              </a:rPr>
+              <a:t>  table in src/shared/Config.lua"</a:t>
+            </a:r>
+            <a:endParaRPr lang="en-US" sz="950" dirty="0"/>
+          </a:p>
+          <a:p>
+            <a:pPr indent="0" marL="0">
+              <a:spcAft>
+                <a:spcPts val="500"/>
+              </a:spcAft>
+              <a:buNone/>
+            </a:pPr>
+            <a:r>
+              <a:rPr lang="en-US" sz="950" b="1" dirty="0">
+                <a:solidFill>
+                  <a:srgbClr val="38D6E8"/>
+                </a:solidFill>
+                <a:latin typeface="Courier New" pitchFamily="34" charset="0"/>
+                <a:ea typeface="Courier New" pitchFamily="34" charset="-122"/>
+                <a:cs typeface="Courier New" pitchFamily="34" charset="-120"/>
+              </a:rPr>
+              <a:t>## Relevant files</a:t>
+            </a:r>
+            <a:endParaRPr lang="en-US" sz="950" dirty="0"/>
+          </a:p>
+          <a:p>
+            <a:pPr indent="0" marL="0">
+              <a:spcAft>
+                <a:spcPts val="500"/>
+              </a:spcAft>
+              <a:buNone/>
+            </a:pPr>
+            <a:r>
+              <a:rPr lang="en-US" sz="950" dirty="0">
+                <a:solidFill>
+                  <a:srgbClr val="EDEDED"/>
+                </a:solidFill>
+                <a:latin typeface="Courier New" pitchFamily="34" charset="0"/>
+                <a:ea typeface="Courier New" pitchFamily="34" charset="-122"/>
+                <a:cs typeface="Courier New" pitchFamily="34" charset="-120"/>
+              </a:rPr>
+              <a:t>- src/shared/Config.lua [73 lines, used by 8]</a:t>
+            </a:r>
+            <a:endParaRPr lang="en-US" sz="950" dirty="0"/>
+          </a:p>
+          <a:p>
+            <a:pPr indent="0" marL="0">
+              <a:spcAft>
+                <a:spcPts val="500"/>
+              </a:spcAft>
+              <a:buNone/>
+            </a:pPr>
+            <a:r>
+              <a:rPr lang="en-US" sz="950" dirty="0">
+                <a:solidFill>
+                  <a:srgbClr val="EDEDED"/>
+                </a:solidFill>
+                <a:latin typeface="Courier New" pitchFamily="34" charset="0"/>
+                <a:ea typeface="Courier New" pitchFamily="34" charset="-122"/>
+                <a:cs typeface="Courier New" pitchFamily="34" charset="-120"/>
+              </a:rPr>
+              <a:t>- src/server/Shop.lua [164 lines]</a:t>
+            </a:r>
+            <a:endParaRPr lang="en-US" sz="950" dirty="0"/>
           </a:p>
         </p:txBody>
       </p:sp>
@@ -5585,12 +6011,12 @@
         </p:nvSpPr>
         <p:spPr>
           <a:xfrm>
-            <a:off x="5715000" y="1325880"/>
-            <a:ext cx="2971800" cy="960120"/>
+            <a:off x="5577840" y="1325880"/>
+            <a:ext cx="3108960" cy="1051560"/>
           </a:xfrm>
           <a:prstGeom prst="roundRect">
             <a:avLst>
-              <a:gd name="adj" fmla="val 9524"/>
+              <a:gd name="adj" fmla="val 8696"/>
             </a:avLst>
           </a:prstGeom>
           <a:solidFill>
@@ -5612,8 +6038,8 @@
         </p:nvSpPr>
         <p:spPr>
           <a:xfrm>
-            <a:off x="5897880" y="1435608"/>
-            <a:ext cx="2651760" cy="320040"/>
+            <a:off x="5715000" y="1399032"/>
+            <a:ext cx="2834640" cy="274320"/>
           </a:xfrm>
           <a:prstGeom prst="rect">
             <a:avLst/>
@@ -5629,7 +6055,7 @@
               <a:buNone/>
             </a:pPr>
             <a:r>
-              <a:rPr lang="en-US" sz="1600" b="1" dirty="0">
+              <a:rPr lang="en-US" sz="1300" b="1" dirty="0">
                 <a:solidFill>
                   <a:srgbClr val="8B7CF6"/>
                 </a:solidFill>
@@ -5637,9 +6063,9 @@
                 <a:ea typeface="Calibri" pitchFamily="34" charset="-122"/>
                 <a:cs typeface="Calibri" pitchFamily="34" charset="-120"/>
               </a:rPr>
-              <a:t>Deterministic &amp; local.</a:t>
-            </a:r>
-            <a:endParaRPr lang="en-US" sz="1600" dirty="0"/>
+              <a:t>The request</a:t>
+            </a:r>
+            <a:endParaRPr lang="en-US" sz="1300" dirty="0"/>
           </a:p>
         </p:txBody>
       </p:sp>
@@ -5651,8 +6077,8 @@
         </p:nvSpPr>
         <p:spPr>
           <a:xfrm>
-            <a:off x="5897880" y="1783080"/>
-            <a:ext cx="2651760" cy="457200"/>
+            <a:off x="5715000" y="1673352"/>
+            <a:ext cx="2880360" cy="685800"/>
           </a:xfrm>
           <a:prstGeom prst="rect">
             <a:avLst/>
@@ -5668,17 +6094,17 @@
               <a:buNone/>
             </a:pPr>
             <a:r>
-              <a:rPr lang="en-US" sz="1300" dirty="0">
-                <a:solidFill>
-                  <a:srgbClr val="9AA0AA"/>
-                </a:solidFill>
-                <a:latin typeface="Calibri" pitchFamily="34" charset="0"/>
-                <a:ea typeface="Calibri" pitchFamily="34" charset="-122"/>
-                <a:cs typeface="Calibri" pitchFamily="34" charset="-120"/>
-              </a:rPr>
-              <a:t>Plain files, no vector DB, no LLM in the loop.</a:t>
-            </a:r>
-            <a:endParaRPr lang="en-US" sz="1300" dirty="0"/>
+              <a:rPr lang="en-US" sz="1000" dirty="0">
+                <a:solidFill>
+                  <a:srgbClr val="EDEDED"/>
+                </a:solidFill>
+                <a:latin typeface="Calibri" pitchFamily="34" charset="0"/>
+                <a:ea typeface="Calibri" pitchFamily="34" charset="-122"/>
+                <a:cs typeface="Calibri" pitchFamily="34" charset="-120"/>
+              </a:rPr>
+              <a:t>A brand-new session is asked: "Add an Epic upgrade called Twin Spin... with the rarity colors we picked." The colors were chosen four sessions earlier.</a:t>
+            </a:r>
+            <a:endParaRPr lang="en-US" sz="1000" dirty="0"/>
           </a:p>
         </p:txBody>
       </p:sp>
@@ -5690,12 +6116,12 @@
         </p:nvSpPr>
         <p:spPr>
           <a:xfrm>
-            <a:off x="5715000" y="2404872"/>
-            <a:ext cx="2971800" cy="960120"/>
+            <a:off x="5577840" y="2468880"/>
+            <a:ext cx="3108960" cy="1051560"/>
           </a:xfrm>
           <a:prstGeom prst="roundRect">
             <a:avLst>
-              <a:gd name="adj" fmla="val 9524"/>
+              <a:gd name="adj" fmla="val 8696"/>
             </a:avLst>
           </a:prstGeom>
           <a:solidFill>
@@ -5717,8 +6143,8 @@
         </p:nvSpPr>
         <p:spPr>
           <a:xfrm>
-            <a:off x="5897880" y="2514600"/>
-            <a:ext cx="2651760" cy="320040"/>
+            <a:off x="5715000" y="2542032"/>
+            <a:ext cx="2834640" cy="274320"/>
           </a:xfrm>
           <a:prstGeom prst="rect">
             <a:avLst/>
@@ -5734,7 +6160,7 @@
               <a:buNone/>
             </a:pPr>
             <a:r>
-              <a:rPr lang="en-US" sz="1600" b="1" dirty="0">
+              <a:rPr lang="en-US" sz="1300" b="1" dirty="0">
                 <a:solidFill>
                   <a:srgbClr val="38D6E8"/>
                 </a:solidFill>
@@ -5742,9 +6168,9 @@
                 <a:ea typeface="Calibri" pitchFamily="34" charset="-122"/>
                 <a:cs typeface="Calibri" pitchFamily="34" charset="-120"/>
               </a:rPr>
-              <a:t>Line-level freshness.</a:t>
-            </a:r>
-            <a:endParaRPr lang="en-US" sz="1600" dirty="0"/>
+              <a:t>What DevMemory found</a:t>
+            </a:r>
+            <a:endParaRPr lang="en-US" sz="1300" dirty="0"/>
           </a:p>
         </p:txBody>
       </p:sp>
@@ -5756,8 +6182,8 @@
         </p:nvSpPr>
         <p:spPr>
           <a:xfrm>
-            <a:off x="5897880" y="2862072"/>
-            <a:ext cx="2651760" cy="457200"/>
+            <a:off x="5715000" y="2816352"/>
+            <a:ext cx="2880360" cy="685800"/>
           </a:xfrm>
           <a:prstGeom prst="rect">
             <a:avLst/>
@@ -5773,17 +6199,17 @@
               <a:buNone/>
             </a:pPr>
             <a:r>
-              <a:rPr lang="en-US" sz="1300" dirty="0">
-                <a:solidFill>
-                  <a:srgbClr val="9AA0AA"/>
-                </a:solidFill>
-                <a:latin typeface="Calibri" pitchFamily="34" charset="0"/>
-                <a:ea typeface="Calibri" pitchFamily="34" charset="-122"/>
-                <a:cs typeface="Calibri" pitchFamily="34" charset="-120"/>
-              </a:rPr>
-              <a:t>Memory is checked against the current code.</a:t>
-            </a:r>
-            <a:endParaRPr lang="en-US" sz="1300" dirty="0"/>
+              <a:rPr lang="en-US" sz="1000" dirty="0">
+                <a:solidFill>
+                  <a:srgbClr val="EDEDED"/>
+                </a:solidFill>
+                <a:latin typeface="Calibri" pitchFamily="34" charset="0"/>
+                <a:ea typeface="Calibri" pitchFamily="34" charset="-122"/>
+                <a:cs typeface="Calibri" pitchFamily="34" charset="-120"/>
+              </a:rPr>
+              <a:t>Both earlier conversations, word for word: the shop design (rarities, prices) and the UI session where the user picked Common gray, Rare blue, Epic purple. About 1,150 tokens, built with 0 AI tokens.</a:t>
+            </a:r>
+            <a:endParaRPr lang="en-US" sz="1000" dirty="0"/>
           </a:p>
         </p:txBody>
       </p:sp>
@@ -5795,12 +6221,12 @@
         </p:nvSpPr>
         <p:spPr>
           <a:xfrm>
-            <a:off x="5715000" y="3483864"/>
-            <a:ext cx="2971800" cy="960120"/>
+            <a:off x="5577840" y="3611880"/>
+            <a:ext cx="3108960" cy="1051560"/>
           </a:xfrm>
           <a:prstGeom prst="roundRect">
             <a:avLst>
-              <a:gd name="adj" fmla="val 9524"/>
+              <a:gd name="adj" fmla="val 8696"/>
             </a:avLst>
           </a:prstGeom>
           <a:solidFill>
@@ -5822,8 +6248,8 @@
         </p:nvSpPr>
         <p:spPr>
           <a:xfrm>
-            <a:off x="5897880" y="3593592"/>
-            <a:ext cx="2651760" cy="320040"/>
+            <a:off x="5715000" y="3685032"/>
+            <a:ext cx="2834640" cy="274320"/>
           </a:xfrm>
           <a:prstGeom prst="rect">
             <a:avLst/>
@@ -5839,7 +6265,7 @@
               <a:buNone/>
             </a:pPr>
             <a:r>
-              <a:rPr lang="en-US" sz="1600" b="1" dirty="0">
+              <a:rPr lang="en-US" sz="1300" b="1" dirty="0">
                 <a:solidFill>
                   <a:srgbClr val="3DD68C"/>
                 </a:solidFill>
@@ -5847,9 +6273,9 @@
                 <a:ea typeface="Calibri" pitchFamily="34" charset="-122"/>
                 <a:cs typeface="Calibri" pitchFamily="34" charset="-120"/>
               </a:rPr>
-              <a:t>Verbatim requirements.</a:t>
-            </a:r>
-            <a:endParaRPr lang="en-US" sz="1600" dirty="0"/>
+              <a:t>What the AI did</a:t>
+            </a:r>
+            <a:endParaRPr lang="en-US" sz="1300" dirty="0"/>
           </a:p>
         </p:txBody>
       </p:sp>
@@ -5861,8 +6287,8 @@
         </p:nvSpPr>
         <p:spPr>
           <a:xfrm>
-            <a:off x="5897880" y="3941064"/>
-            <a:ext cx="2651760" cy="457200"/>
+            <a:off x="5715000" y="3959352"/>
+            <a:ext cx="2880360" cy="685800"/>
           </a:xfrm>
           <a:prstGeom prst="rect">
             <a:avLst/>
@@ -5878,17 +6304,17 @@
               <a:buNone/>
             </a:pPr>
             <a:r>
-              <a:rPr lang="en-US" sz="1300" dirty="0">
-                <a:solidFill>
-                  <a:srgbClr val="9AA0AA"/>
-                </a:solidFill>
-                <a:latin typeface="Calibri" pitchFamily="34" charset="0"/>
-                <a:ea typeface="Calibri" pitchFamily="34" charset="-122"/>
-                <a:cs typeface="Calibri" pitchFamily="34" charset="-120"/>
-              </a:rPr>
-              <a:t>The user's words are never paraphrased.</a:t>
-            </a:r>
-            <a:endParaRPr lang="en-US" sz="1300" dirty="0"/>
+              <a:rPr lang="en-US" sz="1000" dirty="0">
+                <a:solidFill>
+                  <a:srgbClr val="EDEDED"/>
+                </a:solidFill>
+                <a:latin typeface="Calibri" pitchFamily="34" charset="0"/>
+                <a:ea typeface="Calibri" pitchFamily="34" charset="-122"/>
+                <a:cs typeface="Calibri" pitchFamily="34" charset="-120"/>
+              </a:rPr>
+              <a:t>Claude Code read one file, added Twin Spin as an Epic upgrade in 13 seconds, and noted it "should show up purple like the colors we picked." (recorded live; shown in the video)</a:t>
+            </a:r>
+            <a:endParaRPr lang="en-US" sz="1000" dirty="0"/>
           </a:p>
         </p:txBody>
       </p:sp>
@@ -6012,12 +6438,12 @@
         </p:nvSpPr>
         <p:spPr>
           <a:xfrm>
-            <a:off x="420624" y="1051560"/>
-            <a:ext cx="4919472" cy="3108960"/>
+            <a:off x="411480" y="1011555"/>
+            <a:ext cx="4754880" cy="3006090"/>
           </a:xfrm>
           <a:prstGeom prst="roundRect">
             <a:avLst>
-              <a:gd name="adj" fmla="val 2353"/>
+              <a:gd name="adj" fmla="val 2433"/>
             </a:avLst>
           </a:prstGeom>
           <a:solidFill>
@@ -6047,8 +6473,8 @@
         </p:blipFill>
         <p:spPr>
           <a:xfrm>
-            <a:off x="466344" y="1097280"/>
-            <a:ext cx="4828032" cy="3017520"/>
+            <a:off x="457200" y="1057275"/>
+            <a:ext cx="4663440" cy="2914650"/>
           </a:xfrm>
           <a:prstGeom prst="rect">
             <a:avLst/>
@@ -6063,8 +6489,8 @@
         </p:nvSpPr>
         <p:spPr>
           <a:xfrm>
-            <a:off x="457200" y="4206240"/>
-            <a:ext cx="4846320" cy="457200"/>
+            <a:off x="457200" y="4069080"/>
+            <a:ext cx="4663440" cy="457200"/>
           </a:xfrm>
           <a:prstGeom prst="rect">
             <a:avLst/>
@@ -6073,14 +6499,14 @@
           <a:ln/>
         </p:spPr>
         <p:txBody>
-          <a:bodyPr wrap="square" lIns="0" tIns="0" rIns="0" bIns="0" rtlCol="0" anchor="ctr"/>
-          <a:lstStyle/>
-          <a:p>
-            <a:pPr indent="0" marL="0">
-              <a:buNone/>
-            </a:pPr>
-            <a:r>
-              <a:rPr lang="en-US" sz="1200" dirty="0">
+          <a:bodyPr wrap="square" lIns="0" tIns="0" rIns="0" bIns="0" rtlCol="0" anchor="t"/>
+          <a:lstStyle/>
+          <a:p>
+            <a:pPr indent="0" marL="0">
+              <a:buNone/>
+            </a:pPr>
+            <a:r>
+              <a:rPr lang="en-US" sz="1050" dirty="0">
                 <a:solidFill>
                   <a:srgbClr val="9AA0AA"/>
                 </a:solidFill>
@@ -6088,9 +6514,9 @@
                 <a:ea typeface="Calibri" pitchFamily="34" charset="-122"/>
                 <a:cs typeface="Calibri" pitchFamily="34" charset="-120"/>
               </a:rPr>
-              <a:t>Obsidian-style memory vault: sessions, prompts, edits, freshness, graph</a:t>
-            </a:r>
-            <a:endParaRPr lang="en-US" sz="1200" dirty="0"/>
+              <a:t>A captured session in the app: the user's exact request, the outcome, files touched, freshness and cost</a:t>
+            </a:r>
+            <a:endParaRPr lang="en-US" sz="1050" dirty="0"/>
           </a:p>
         </p:txBody>
       </p:sp>
@@ -6102,12 +6528,12 @@
         </p:nvSpPr>
         <p:spPr>
           <a:xfrm>
-            <a:off x="5532120" y="1097280"/>
-            <a:ext cx="3154680" cy="3566160"/>
+            <a:off x="5303520" y="1051560"/>
+            <a:ext cx="3383280" cy="3657600"/>
           </a:xfrm>
           <a:prstGeom prst="roundRect">
             <a:avLst>
-              <a:gd name="adj" fmla="val 2899"/>
+              <a:gd name="adj" fmla="val 2703"/>
             </a:avLst>
           </a:prstGeom>
           <a:solidFill>
@@ -6129,8 +6555,8 @@
         </p:nvSpPr>
         <p:spPr>
           <a:xfrm>
-            <a:off x="5715000" y="1280160"/>
-            <a:ext cx="2788920" cy="3200400"/>
+            <a:off x="5440680" y="1161288"/>
+            <a:ext cx="3154680" cy="3474720"/>
           </a:xfrm>
           <a:prstGeom prst="rect">
             <a:avLst/>
@@ -6150,7 +6576,7 @@
               <a:buChar char="•"/>
             </a:pPr>
             <a:r>
-              <a:rPr lang="en-US" sz="1500" b="1" dirty="0">
+              <a:rPr lang="en-US" sz="1050" b="1" dirty="0">
                 <a:solidFill>
                   <a:srgbClr val="38D6E8"/>
                 </a:solidFill>
@@ -6164,7 +6590,7 @@
               <a:buNone/>
             </a:pPr>
             <a:r>
-              <a:rPr lang="en-US" sz="1500" dirty="0">
+              <a:rPr lang="en-US" sz="1050" dirty="0">
                 <a:solidFill>
                   <a:srgbClr val="EDEDED"/>
                 </a:solidFill>
@@ -6172,9 +6598,9 @@
                 <a:ea typeface="Calibri" pitchFamily="34" charset="-122"/>
                 <a:cs typeface="Calibri" pitchFamily="34" charset="-120"/>
               </a:rPr>
-              <a:t>scan / run / pack / status / hook / app</a:t>
-            </a:r>
-            <a:endParaRPr lang="en-US" sz="1500" dirty="0"/>
+              <a:t>devmem scan, run, pack, status, hook and app. Python standard library only; installs with pip.</a:t>
+            </a:r>
+            <a:endParaRPr lang="en-US" sz="1050" dirty="0"/>
           </a:p>
           <a:p>
             <a:pPr marL="342900" indent="-342900">
@@ -6185,7 +6611,7 @@
               <a:buChar char="•"/>
             </a:pPr>
             <a:r>
-              <a:rPr lang="en-US" sz="1500" b="1" dirty="0">
+              <a:rPr lang="en-US" sz="1050" b="1" dirty="0">
                 <a:solidFill>
                   <a:srgbClr val="38D6E8"/>
                 </a:solidFill>
@@ -6193,13 +6619,13 @@
                 <a:ea typeface="Calibri" pitchFamily="34" charset="-122"/>
                 <a:cs typeface="Calibri" pitchFamily="34" charset="-120"/>
               </a:rPr>
-              <a:t>Any AI tool: </a:t>
-            </a:r>
-            <a:pPr indent="0" marL="0">
-              <a:buNone/>
-            </a:pPr>
-            <a:r>
-              <a:rPr lang="en-US" sz="1500" dirty="0">
+              <a:t>Desktop app: </a:t>
+            </a:r>
+            <a:pPr indent="0" marL="0">
+              <a:buNone/>
+            </a:pPr>
+            <a:r>
+              <a:rPr lang="en-US" sz="1050" dirty="0">
                 <a:solidFill>
                   <a:srgbClr val="EDEDED"/>
                 </a:solidFill>
@@ -6207,9 +6633,9 @@
                 <a:ea typeface="Calibri" pitchFamily="34" charset="-122"/>
                 <a:cs typeface="Calibri" pitchFamily="34" charset="-120"/>
               </a:rPr>
-              <a:t>MCP server, Codex adapter, capture for any CLI or IDE agent</a:t>
-            </a:r>
-            <a:endParaRPr lang="en-US" sz="1500" dirty="0"/>
+              <a:t>an Obsidian-style vault. Sessions as notes, raw records as timelines, a graph of files, sessions and decisions, and Pack Lab to preview exactly what a new session will receive.</a:t>
+            </a:r>
+            <a:endParaRPr lang="en-US" sz="1050" dirty="0"/>
           </a:p>
           <a:p>
             <a:pPr marL="342900" indent="-342900">
@@ -6220,7 +6646,7 @@
               <a:buChar char="•"/>
             </a:pPr>
             <a:r>
-              <a:rPr lang="en-US" sz="1500" b="1" dirty="0">
+              <a:rPr lang="en-US" sz="1050" b="1" dirty="0">
                 <a:solidFill>
                   <a:srgbClr val="38D6E8"/>
                 </a:solidFill>
@@ -6228,13 +6654,13 @@
                 <a:ea typeface="Calibri" pitchFamily="34" charset="-122"/>
                 <a:cs typeface="Calibri" pitchFamily="34" charset="-120"/>
               </a:rPr>
-              <a:t>Desktop app: </a:t>
-            </a:r>
-            <a:pPr indent="0" marL="0">
-              <a:buNone/>
-            </a:pPr>
-            <a:r>
-              <a:rPr lang="en-US" sz="1500" dirty="0">
+              <a:t>Any AI tool: </a:t>
+            </a:r>
+            <a:pPr indent="0" marL="0">
+              <a:buNone/>
+            </a:pPr>
+            <a:r>
+              <a:rPr lang="en-US" sz="1050" dirty="0">
                 <a:solidFill>
                   <a:srgbClr val="EDEDED"/>
                 </a:solidFill>
@@ -6242,9 +6668,9 @@
                 <a:ea typeface="Calibri" pitchFamily="34" charset="-122"/>
                 <a:cs typeface="Calibri" pitchFamily="34" charset="-120"/>
               </a:rPr>
-              <a:t>browse the memory vault</a:t>
-            </a:r>
-            <a:endParaRPr lang="en-US" sz="1500" dirty="0"/>
+              <a:t>an MCP server (get_context_pack, list and read sessions, begin and end session), a Codex adapter, and capture for any CLI or IDE agent. Tested with Claude Code and Codex.</a:t>
+            </a:r>
+            <a:endParaRPr lang="en-US" sz="1050" dirty="0"/>
           </a:p>
           <a:p>
             <a:pPr marL="342900" indent="-342900">
@@ -6255,7 +6681,7 @@
               <a:buChar char="•"/>
             </a:pPr>
             <a:r>
-              <a:rPr lang="en-US" sz="1500" b="1" dirty="0">
+              <a:rPr lang="en-US" sz="1050" b="1" dirty="0">
                 <a:solidFill>
                   <a:srgbClr val="38D6E8"/>
                 </a:solidFill>
@@ -6269,7 +6695,7 @@
               <a:buNone/>
             </a:pPr>
             <a:r>
-              <a:rPr lang="en-US" sz="1500" dirty="0">
+              <a:rPr lang="en-US" sz="1050" dirty="0">
                 <a:solidFill>
                   <a:srgbClr val="EDEDED"/>
                 </a:solidFill>
@@ -6277,9 +6703,9 @@
                 <a:ea typeface="Calibri" pitchFamily="34" charset="-122"/>
                 <a:cs typeface="Calibri" pitchFamily="34" charset="-120"/>
               </a:rPr>
-              <a:t>graders, reports, Roblox Studio playtests</a:t>
-            </a:r>
-            <a:endParaRPr lang="en-US" sz="1500" dirty="0"/>
+              <a:t>isolated headless runs, validated graders, Roblox Studio playtests through MCP, headless-Chrome web checks, reports with confidence intervals.</a:t>
+            </a:r>
+            <a:endParaRPr lang="en-US" sz="1050" dirty="0"/>
           </a:p>
         </p:txBody>
       </p:sp>
@@ -6403,12 +6829,12 @@
         </p:nvSpPr>
         <p:spPr>
           <a:xfrm>
-            <a:off x="457200" y="1097280"/>
-            <a:ext cx="4023360" cy="3611880"/>
+            <a:off x="457200" y="1051560"/>
+            <a:ext cx="4023360" cy="3657600"/>
           </a:xfrm>
           <a:prstGeom prst="roundRect">
             <a:avLst>
-              <a:gd name="adj" fmla="val 2532"/>
+              <a:gd name="adj" fmla="val 2500"/>
             </a:avLst>
           </a:prstGeom>
           <a:solidFill>
@@ -6430,8 +6856,8 @@
         </p:nvSpPr>
         <p:spPr>
           <a:xfrm>
-            <a:off x="640080" y="1207008"/>
-            <a:ext cx="3657600" cy="365760"/>
+            <a:off x="640080" y="1143000"/>
+            <a:ext cx="3657600" cy="320040"/>
           </a:xfrm>
           <a:prstGeom prst="rect">
             <a:avLst/>
@@ -6447,7 +6873,7 @@
               <a:buNone/>
             </a:pPr>
             <a:r>
-              <a:rPr lang="en-US" sz="1800" b="1" dirty="0">
+              <a:rPr lang="en-US" sz="1500" b="1" dirty="0">
                 <a:solidFill>
                   <a:srgbClr val="8B7CF6"/>
                 </a:solidFill>
@@ -6455,9 +6881,9 @@
                 <a:ea typeface="Calibri" pitchFamily="34" charset="-122"/>
                 <a:cs typeface="Calibri" pitchFamily="34" charset="-120"/>
               </a:rPr>
-              <a:t>A  Fixed benchmark</a:t>
-            </a:r>
-            <a:endParaRPr lang="en-US" sz="1800" dirty="0"/>
+              <a:t>A  Fixed benchmark (unseen tasks)</a:t>
+            </a:r>
+            <a:endParaRPr lang="en-US" sz="1500" dirty="0"/>
           </a:p>
         </p:txBody>
       </p:sp>
@@ -6469,8 +6895,8 @@
         </p:nvSpPr>
         <p:spPr>
           <a:xfrm>
-            <a:off x="640080" y="1645920"/>
-            <a:ext cx="3657600" cy="3017520"/>
+            <a:off x="640080" y="1536192"/>
+            <a:ext cx="3657600" cy="3108960"/>
           </a:xfrm>
           <a:prstGeom prst="rect">
             <a:avLst/>
@@ -6490,7 +6916,7 @@
               <a:buChar char="•"/>
             </a:pPr>
             <a:r>
-              <a:rPr lang="en-US" sz="1250" b="1" dirty="0">
+              <a:rPr lang="en-US" sz="1050" b="1" dirty="0">
                 <a:solidFill>
                   <a:srgbClr val="38D6E8"/>
                 </a:solidFill>
@@ -6498,13 +6924,13 @@
                 <a:ea typeface="Calibri" pitchFamily="34" charset="-122"/>
                 <a:cs typeface="Calibri" pitchFamily="34" charset="-120"/>
               </a:rPr>
-              <a:t>Conditions: </a:t>
-            </a:r>
-            <a:pPr indent="0" marL="0">
-              <a:buNone/>
-            </a:pPr>
-            <a:r>
-              <a:rPr lang="en-US" sz="1250" dirty="0">
+              <a:t>Setups: </a:t>
+            </a:r>
+            <a:pPr indent="0" marL="0">
+              <a:buNone/>
+            </a:pPr>
+            <a:r>
+              <a:rPr lang="en-US" sz="1050" dirty="0">
                 <a:solidFill>
                   <a:srgbClr val="EDEDED"/>
                 </a:solidFill>
@@ -6512,9 +6938,9 @@
                 <a:ea typeface="Calibri" pitchFamily="34" charset="-122"/>
                 <a:cs typeface="Calibri" pitchFamily="34" charset="-120"/>
               </a:rPr>
-              <a:t>C0 bare, C1 hand-written CLAUDE.md (the simple alternative), C2 map only, C3 full DevMemory; plus Sonnet without memory</a:t>
-            </a:r>
-            <a:endParaRPr lang="en-US" sz="1250" dirty="0"/>
+              <a:t>C0 bare session; C1 hand-written CLAUDE.md (the simple alternative); C2 DevMemory's map only; C3 full DevMemory. Same model (Claude Haiku 5.5), same isolated settings, 3 repeats.</a:t>
+            </a:r>
+            <a:endParaRPr lang="en-US" sz="1050" dirty="0"/>
           </a:p>
           <a:p>
             <a:pPr marL="342900" indent="-342900">
@@ -6525,7 +6951,7 @@
               <a:buChar char="•"/>
             </a:pPr>
             <a:r>
-              <a:rPr lang="en-US" sz="1250" b="1" dirty="0">
+              <a:rPr lang="en-US" sz="1050" b="1" dirty="0">
                 <a:solidFill>
                   <a:srgbClr val="38D6E8"/>
                 </a:solidFill>
@@ -6539,7 +6965,7 @@
               <a:buNone/>
             </a:pPr>
             <a:r>
-              <a:rPr lang="en-US" sz="1250" dirty="0">
+              <a:rPr lang="en-US" sz="1050" dirty="0">
                 <a:solidFill>
                   <a:srgbClr val="EDEDED"/>
                 </a:solidFill>
@@ -6547,9 +6973,9 @@
                 <a:ea typeface="Calibri" pitchFamily="34" charset="-122"/>
                 <a:cs typeface="Calibri" pitchFamily="34" charset="-120"/>
               </a:rPr>
-              <a:t>8 dev tasks for tuning; 28 held-out in two sets (12 + 16) on 2 projects (Roblox + Python), written by a separate agent, hash-frozen before any run</a:t>
-            </a:r>
-            <a:endParaRPr lang="en-US" sz="1250" dirty="0"/>
+              <a:t>8 dev tasks for tuning. 28 held-out tasks in two sets, on a Roblox game and a Python app, written by a separate agent and hash-frozen before any run. Types: code, history, stale, unrelated.</a:t>
+            </a:r>
+            <a:endParaRPr lang="en-US" sz="1050" dirty="0"/>
           </a:p>
           <a:p>
             <a:pPr marL="342900" indent="-342900">
@@ -6560,7 +6986,7 @@
               <a:buChar char="•"/>
             </a:pPr>
             <a:r>
-              <a:rPr lang="en-US" sz="1250" b="1" dirty="0">
+              <a:rPr lang="en-US" sz="1050" b="1" dirty="0">
                 <a:solidFill>
                   <a:srgbClr val="38D6E8"/>
                 </a:solidFill>
@@ -6574,7 +7000,7 @@
               <a:buNone/>
             </a:pPr>
             <a:r>
-              <a:rPr lang="en-US" sz="1250" dirty="0">
+              <a:rPr lang="en-US" sz="1050" dirty="0">
                 <a:solidFill>
                   <a:srgbClr val="EDEDED"/>
                 </a:solidFill>
@@ -6582,9 +7008,9 @@
                 <a:ea typeface="Calibri" pitchFamily="34" charset="-122"/>
                 <a:cs typeface="Calibri" pitchFamily="34" charset="-120"/>
               </a:rPr>
-              <a:t>validated: unmodified project fails, reference passes</a:t>
-            </a:r>
-            <a:endParaRPr lang="en-US" sz="1250" dirty="0"/>
+              <a:t>automatic and validated: the unmodified project must fail, a reference solution must pass.</a:t>
+            </a:r>
+            <a:endParaRPr lang="en-US" sz="1050" dirty="0"/>
           </a:p>
           <a:p>
             <a:pPr marL="342900" indent="-342900">
@@ -6595,7 +7021,7 @@
               <a:buChar char="•"/>
             </a:pPr>
             <a:r>
-              <a:rPr lang="en-US" sz="1250" b="1" dirty="0">
+              <a:rPr lang="en-US" sz="1050" b="1" dirty="0">
                 <a:solidFill>
                   <a:srgbClr val="38D6E8"/>
                 </a:solidFill>
@@ -6609,7 +7035,7 @@
               <a:buNone/>
             </a:pPr>
             <a:r>
-              <a:rPr lang="en-US" sz="1250" dirty="0">
+              <a:rPr lang="en-US" sz="1050" dirty="0">
                 <a:solidFill>
                   <a:srgbClr val="EDEDED"/>
                 </a:solidFill>
@@ -6617,9 +7043,9 @@
                 <a:ea typeface="Calibri" pitchFamily="34" charset="-122"/>
                 <a:cs typeface="Calibri" pitchFamily="34" charset="-120"/>
               </a:rPr>
-              <a:t>cost per successful task at an 80% accuracy floor</a:t>
-            </a:r>
-            <a:endParaRPr lang="en-US" sz="1250" dirty="0"/>
+              <a:t>cost per successful task (all runs' cost / passes), counted only for setups above an 80% accuracy floor; 95% confidence intervals.</a:t>
+            </a:r>
+            <a:endParaRPr lang="en-US" sz="1050" dirty="0"/>
           </a:p>
         </p:txBody>
       </p:sp>
@@ -6631,12 +7057,12 @@
         </p:nvSpPr>
         <p:spPr>
           <a:xfrm>
-            <a:off x="4663440" y="1097280"/>
-            <a:ext cx="4023360" cy="3611880"/>
+            <a:off x="4663440" y="1051560"/>
+            <a:ext cx="4023360" cy="3657600"/>
           </a:xfrm>
           <a:prstGeom prst="roundRect">
             <a:avLst>
-              <a:gd name="adj" fmla="val 2532"/>
+              <a:gd name="adj" fmla="val 2500"/>
             </a:avLst>
           </a:prstGeom>
           <a:solidFill>
@@ -6658,8 +7084,8 @@
         </p:nvSpPr>
         <p:spPr>
           <a:xfrm>
-            <a:off x="4846320" y="1207008"/>
-            <a:ext cx="3657600" cy="365760"/>
+            <a:off x="4846320" y="1143000"/>
+            <a:ext cx="3657600" cy="320040"/>
           </a:xfrm>
           <a:prstGeom prst="rect">
             <a:avLst/>
@@ -6675,7 +7101,7 @@
               <a:buNone/>
             </a:pPr>
             <a:r>
-              <a:rPr lang="en-US" sz="1800" b="1" dirty="0">
+              <a:rPr lang="en-US" sz="1500" b="1" dirty="0">
                 <a:solidFill>
                   <a:srgbClr val="38D6E8"/>
                 </a:solidFill>
@@ -6683,9 +7109,9 @@
                 <a:ea typeface="Calibri" pitchFamily="34" charset="-122"/>
                 <a:cs typeface="Calibri" pitchFamily="34" charset="-120"/>
               </a:rPr>
-              <a:t>B  Multi-session builds</a:t>
-            </a:r>
-            <a:endParaRPr lang="en-US" sz="1800" dirty="0"/>
+              <a:t>B  Real builds over many sessions</a:t>
+            </a:r>
+            <a:endParaRPr lang="en-US" sz="1500" dirty="0"/>
           </a:p>
         </p:txBody>
       </p:sp>
@@ -6697,8 +7123,8 @@
         </p:nvSpPr>
         <p:spPr>
           <a:xfrm>
-            <a:off x="4846320" y="1645920"/>
-            <a:ext cx="3657600" cy="3017520"/>
+            <a:off x="4846320" y="1536192"/>
+            <a:ext cx="3657600" cy="3108960"/>
           </a:xfrm>
           <a:prstGeom prst="rect">
             <a:avLst/>
@@ -6718,7 +7144,7 @@
               <a:buChar char="•"/>
             </a:pPr>
             <a:r>
-              <a:rPr lang="en-US" sz="1250" b="1" dirty="0">
+              <a:rPr lang="en-US" sz="1050" b="1" dirty="0">
                 <a:solidFill>
                   <a:srgbClr val="38D6E8"/>
                 </a:solidFill>
@@ -6726,13 +7152,13 @@
                 <a:ea typeface="Calibri" pitchFamily="34" charset="-122"/>
                 <a:cs typeface="Calibri" pitchFamily="34" charset="-120"/>
               </a:rPr>
-              <a:t>Setup: </a:t>
-            </a:r>
-            <a:pPr indent="0" marL="0">
-              <a:buNone/>
-            </a:pPr>
-            <a:r>
-              <a:rPr lang="en-US" sz="1250" dirty="0">
+              <a:t>Roblox: </a:t>
+            </a:r>
+            <a:pPr indent="0" marL="0">
+              <a:buNone/>
+            </a:pPr>
+            <a:r>
+              <a:rPr lang="en-US" sz="1050" dirty="0">
                 <a:solidFill>
                   <a:srgbClr val="EDEDED"/>
                 </a:solidFill>
@@ -6740,9 +7166,9 @@
                 <a:ea typeface="Calibri" pitchFamily="34" charset="-122"/>
                 <a:cs typeface="Calibri" pitchFamily="34" charset="-120"/>
               </a:rPr>
-              <a:t>8–16 fresh sessions building a game or web app from prompts</a:t>
-            </a:r>
-            <a:endParaRPr lang="en-US" sz="1250" dirty="0"/>
+              <a:t>the Blade Swarm game built three ways (no memory, a self-maintained AGENTS.md, DevMemory), 16 fresh sessions each, automated Studio playtest after every prompt, human playtest at the end.</a:t>
+            </a:r>
+            <a:endParaRPr lang="en-US" sz="1050" dirty="0"/>
           </a:p>
           <a:p>
             <a:pPr marL="342900" indent="-342900">
@@ -6753,7 +7179,7 @@
               <a:buChar char="•"/>
             </a:pPr>
             <a:r>
-              <a:rPr lang="en-US" sz="1250" b="1" dirty="0">
+              <a:rPr lang="en-US" sz="1050" b="1" dirty="0">
                 <a:solidFill>
                   <a:srgbClr val="38D6E8"/>
                 </a:solidFill>
@@ -6761,13 +7187,13 @@
                 <a:ea typeface="Calibri" pitchFamily="34" charset="-122"/>
                 <a:cs typeface="Calibri" pitchFamily="34" charset="-120"/>
               </a:rPr>
-              <a:t>Check: </a:t>
-            </a:r>
-            <a:pPr indent="0" marL="0">
-              <a:buNone/>
-            </a:pPr>
-            <a:r>
-              <a:rPr lang="en-US" sz="1250" dirty="0">
+              <a:t>Next prompt: </a:t>
+            </a:r>
+            <a:pPr indent="0" marL="0">
+              <a:buNone/>
+            </a:pPr>
+            <a:r>
+              <a:rPr lang="en-US" sz="1050" dirty="0">
                 <a:solidFill>
                   <a:srgbClr val="EDEDED"/>
                 </a:solidFill>
@@ -6775,9 +7201,9 @@
                 <a:ea typeface="Calibri" pitchFamily="34" charset="-122"/>
                 <a:cs typeface="Calibri" pitchFamily="34" charset="-120"/>
               </a:rPr>
-              <a:t>automated playtest after every prompt (Roblox Studio MCP / headless Chrome)</a:t>
-            </a:r>
-            <a:endParaRPr lang="en-US" sz="1250" dirty="0"/>
+              <a:t>chosen by a fixed rule: a bug report from failed checks, otherwise the next feature.</a:t>
+            </a:r>
+            <a:endParaRPr lang="en-US" sz="1050" dirty="0"/>
           </a:p>
           <a:p>
             <a:pPr marL="342900" indent="-342900">
@@ -6788,7 +7214,7 @@
               <a:buChar char="•"/>
             </a:pPr>
             <a:r>
-              <a:rPr lang="en-US" sz="1250" b="1" dirty="0">
+              <a:rPr lang="en-US" sz="1050" b="1" dirty="0">
                 <a:solidFill>
                   <a:srgbClr val="38D6E8"/>
                 </a:solidFill>
@@ -6796,13 +7222,13 @@
                 <a:ea typeface="Calibri" pitchFamily="34" charset="-122"/>
                 <a:cs typeface="Calibri" pitchFamily="34" charset="-120"/>
               </a:rPr>
-              <a:t>Next prompt: </a:t>
-            </a:r>
-            <a:pPr indent="0" marL="0">
-              <a:buNone/>
-            </a:pPr>
-            <a:r>
-              <a:rPr lang="en-US" sz="1250" dirty="0">
+              <a:t>Web app: </a:t>
+            </a:r>
+            <a:pPr indent="0" marL="0">
+              <a:buNone/>
+            </a:pPr>
+            <a:r>
+              <a:rPr lang="en-US" sz="1050" dirty="0">
                 <a:solidFill>
                   <a:srgbClr val="EDEDED"/>
                 </a:solidFill>
@@ -6810,9 +7236,44 @@
                 <a:ea typeface="Calibri" pitchFamily="34" charset="-122"/>
                 <a:cs typeface="Calibri" pitchFamily="34" charset="-120"/>
               </a:rPr>
-              <a:t>chosen by a fixed rule: bug report from failed checks, else next feature</a:t>
-            </a:r>
-            <a:endParaRPr lang="en-US" sz="1250" dirty="0"/>
+              <a:t>a team task board raced the same way (8 features, API and headless-Chrome checks), two rounds.</a:t>
+            </a:r>
+            <a:endParaRPr lang="en-US" sz="1050" dirty="0"/>
+          </a:p>
+          <a:p>
+            <a:pPr marL="342900" indent="-342900">
+              <a:spcAft>
+                <a:spcPts val="800"/>
+              </a:spcAft>
+              <a:buSzPct val="100000"/>
+              <a:buChar char="•"/>
+            </a:pPr>
+            <a:r>
+              <a:rPr lang="en-US" sz="1050" b="1" dirty="0">
+                <a:solidFill>
+                  <a:srgbClr val="38D6E8"/>
+                </a:solidFill>
+                <a:latin typeface="Calibri" pitchFamily="34" charset="0"/>
+                <a:ea typeface="Calibri" pitchFamily="34" charset="-122"/>
+                <a:cs typeface="Calibri" pitchFamily="34" charset="-120"/>
+              </a:rPr>
+              <a:t>Across tools: </a:t>
+            </a:r>
+            <a:pPr indent="0" marL="0">
+              <a:buNone/>
+            </a:pPr>
+            <a:r>
+              <a:rPr lang="en-US" sz="1050" dirty="0">
+                <a:solidFill>
+                  <a:srgbClr val="EDEDED"/>
+                </a:solidFill>
+                <a:latin typeface="Calibri" pitchFamily="34" charset="0"/>
+                <a:ea typeface="Calibri" pitchFamily="34" charset="-122"/>
+                <a:cs typeface="Calibri" pitchFamily="34" charset="-120"/>
+              </a:rPr>
+              <a:t>memory recorded in Claude Code handed to Codex; isolated runs, 3 per variant.</a:t>
+            </a:r>
+            <a:endParaRPr lang="en-US" sz="1050" dirty="0"/>
           </a:p>
         </p:txBody>
       </p:sp>
@@ -6922,7 +7383,7 @@
                 <a:ea typeface="Calibri" pitchFamily="34" charset="-122"/>
                 <a:cs typeface="Calibri" pitchFamily="34" charset="-120"/>
               </a:rPr>
-              <a:t>On both unseen sets, only DevMemory clears 80%</a:t>
+              <a:t>Unseen tasks: only DevMemory clears 80%</a:t>
             </a:r>
             <a:endParaRPr lang="en-US" sz="3200" dirty="0"/>
           </a:p>
@@ -6935,8 +7396,8 @@
           <p:nvPr/>
         </p:nvGraphicFramePr>
         <p:xfrm>
-          <a:off x="365760" y="1097280"/>
-          <a:ext cx="4572000" cy="3154680"/>
+          <a:off x="365760" y="1005840"/>
+          <a:ext cx="4572000" cy="3200400"/>
         </p:xfrm>
         <a:graphic xmlns:a="http://schemas.openxmlformats.org/drawingml/2006/main">
           <a:graphicData uri="http://schemas.openxmlformats.org/drawingml/2006/chart">
@@ -6952,7 +7413,7 @@
         </p:nvSpPr>
         <p:spPr>
           <a:xfrm>
-            <a:off x="457200" y="4343400"/>
+            <a:off x="457200" y="4297680"/>
             <a:ext cx="4480560" cy="411480"/>
           </a:xfrm>
           <a:prstGeom prst="rect">
@@ -6969,7 +7430,7 @@
               <a:buNone/>
             </a:pPr>
             <a:r>
-              <a:rPr lang="en-US" sz="1150" dirty="0">
+              <a:rPr lang="en-US" sz="1050" dirty="0">
                 <a:solidFill>
                   <a:srgbClr val="F5A524"/>
                 </a:solidFill>
@@ -6977,9 +7438,9 @@
                 <a:ea typeface="Calibri" pitchFamily="34" charset="-122"/>
                 <a:cs typeface="Calibri" pitchFamily="34" charset="-120"/>
               </a:rPr>
-              <a:t>Accuracy floor: 80%. Set 1 shown with the shipped code (DevMemory was 86% at freeze).</a:t>
-            </a:r>
-            <a:endParaRPr lang="en-US" sz="1150" dirty="0"/>
+              <a:t>Accuracy floor 80%. Set 1 shown with the shipped code (DevMemory scored 86% when the set was frozen).</a:t>
+            </a:r>
+            <a:endParaRPr lang="en-US" sz="1050" dirty="0"/>
           </a:p>
         </p:txBody>
       </p:sp>
@@ -6990,8 +7451,8 @@
           <p:nvPr/>
         </p:nvGraphicFramePr>
         <p:xfrm>
-          <a:off x="5029200" y="1097280"/>
-          <a:ext cx="3749040" cy="2514600"/>
+          <a:off x="5029200" y="1005840"/>
+          <a:ext cx="3749040" cy="1783080"/>
         </p:xfrm>
         <a:graphic xmlns:a="http://schemas.openxmlformats.org/drawingml/2006/main">
           <a:graphicData uri="http://schemas.openxmlformats.org/drawingml/2006/chart">
@@ -7001,18 +7462,18 @@
       </p:graphicFrame>
       <p:sp>
         <p:nvSpPr>
-          <p:cNvPr id="6" name="Sonnet callout"/>
+          <p:cNvPr id="6" name="Reading panel"/>
           <p:cNvSpPr/>
           <p:nvPr/>
         </p:nvSpPr>
         <p:spPr>
           <a:xfrm>
-            <a:off x="5120640" y="3703320"/>
-            <a:ext cx="3566160" cy="960120"/>
+            <a:off x="5120640" y="2880360"/>
+            <a:ext cx="3566160" cy="1828800"/>
           </a:xfrm>
           <a:prstGeom prst="roundRect">
             <a:avLst>
-              <a:gd name="adj" fmla="val 9524"/>
+              <a:gd name="adj" fmla="val 5000"/>
             </a:avLst>
           </a:prstGeom>
           <a:solidFill>
@@ -7028,14 +7489,14 @@
       </p:sp>
       <p:sp>
         <p:nvSpPr>
-          <p:cNvPr id="7" name="Callout text"/>
+          <p:cNvPr id="7" name="Reading list"/>
           <p:cNvSpPr txBox="1"/>
           <p:nvPr/>
         </p:nvSpPr>
         <p:spPr>
           <a:xfrm>
-            <a:off x="5303520" y="3767328"/>
-            <a:ext cx="3291840" cy="822960"/>
+            <a:off x="5257800" y="2971800"/>
+            <a:ext cx="3337560" cy="1691640"/>
           </a:xfrm>
           <a:prstGeom prst="rect">
             <a:avLst/>
@@ -7044,41 +7505,147 @@
           <a:ln/>
         </p:spPr>
         <p:txBody>
-          <a:bodyPr wrap="square" lIns="0" tIns="0" rIns="0" bIns="0" rtlCol="0" anchor="ctr"/>
-          <a:lstStyle/>
-          <a:p>
-            <a:pPr indent="0" marL="0">
-              <a:buNone/>
-            </a:pPr>
-            <a:r>
-              <a:rPr lang="en-US" sz="1400" b="1" dirty="0">
-                <a:solidFill>
-                  <a:srgbClr val="3DD68C"/>
-                </a:solidFill>
-                <a:latin typeface="Calibri" pitchFamily="34" charset="0"/>
-                <a:ea typeface="Calibri" pitchFamily="34" charset="-122"/>
-                <a:cs typeface="Calibri" pitchFamily="34" charset="-120"/>
-              </a:rPr>
-              <a:t>History tasks (set 2): 12/12 vs 3–4/12</a:t>
-            </a:r>
-            <a:endParaRPr lang="en-US" sz="1400" dirty="0"/>
-          </a:p>
-          <a:p>
-            <a:pPr indent="0" marL="0">
-              <a:buNone/>
-            </a:pPr>
-            <a:r>
-              <a:rPr lang="en-US" sz="1150" dirty="0">
-                <a:solidFill>
-                  <a:srgbClr val="9AA0AA"/>
-                </a:solidFill>
-                <a:latin typeface="Calibri" pitchFamily="34" charset="0"/>
-                <a:ea typeface="Calibri" pitchFamily="34" charset="-122"/>
-                <a:cs typeface="Calibri" pitchFamily="34" charset="-120"/>
-              </a:rPr>
-              <a:t>Sonnet without memory (set 1): $0.092 per success, 11× more, 75%</a:t>
-            </a:r>
-            <a:endParaRPr lang="en-US" sz="1400" dirty="0"/>
+          <a:bodyPr wrap="square" lIns="0" tIns="0" rIns="0" bIns="0" rtlCol="0" anchor="t"/>
+          <a:lstStyle/>
+          <a:p>
+            <a:pPr marL="342900" indent="-342900">
+              <a:spcAft>
+                <a:spcPts val="800"/>
+              </a:spcAft>
+              <a:buSzPct val="100000"/>
+              <a:buChar char="•"/>
+            </a:pPr>
+            <a:r>
+              <a:rPr lang="en-US" sz="1000" b="1" dirty="0">
+                <a:solidFill>
+                  <a:srgbClr val="38D6E8"/>
+                </a:solidFill>
+                <a:latin typeface="Calibri" pitchFamily="34" charset="0"/>
+                <a:ea typeface="Calibri" pitchFamily="34" charset="-122"/>
+                <a:cs typeface="Calibri" pitchFamily="34" charset="-120"/>
+              </a:rPr>
+              <a:t>Accuracy: </a:t>
+            </a:r>
+            <a:pPr indent="0" marL="0">
+              <a:buNone/>
+            </a:pPr>
+            <a:r>
+              <a:rPr lang="en-US" sz="1000" dirty="0">
+                <a:solidFill>
+                  <a:srgbClr val="EDEDED"/>
+                </a:solidFill>
+                <a:latin typeface="Calibri" pitchFamily="34" charset="0"/>
+                <a:ea typeface="Calibri" pitchFamily="34" charset="-122"/>
+                <a:cs typeface="Calibri" pitchFamily="34" charset="-120"/>
+              </a:rPr>
+              <a:t>DevMemory 83% and 98%; the others 64–81%.</a:t>
+            </a:r>
+            <a:endParaRPr lang="en-US" sz="1000" dirty="0"/>
+          </a:p>
+          <a:p>
+            <a:pPr marL="342900" indent="-342900">
+              <a:spcAft>
+                <a:spcPts val="800"/>
+              </a:spcAft>
+              <a:buSzPct val="100000"/>
+              <a:buChar char="•"/>
+            </a:pPr>
+            <a:r>
+              <a:rPr lang="en-US" sz="1000" b="1" dirty="0">
+                <a:solidFill>
+                  <a:srgbClr val="38D6E8"/>
+                </a:solidFill>
+                <a:latin typeface="Calibri" pitchFamily="34" charset="0"/>
+                <a:ea typeface="Calibri" pitchFamily="34" charset="-122"/>
+                <a:cs typeface="Calibri" pitchFamily="34" charset="-120"/>
+              </a:rPr>
+              <a:t>Cost: </a:t>
+            </a:r>
+            <a:pPr indent="0" marL="0">
+              <a:buNone/>
+            </a:pPr>
+            <a:r>
+              <a:rPr lang="en-US" sz="1000" dirty="0">
+                <a:solidFill>
+                  <a:srgbClr val="EDEDED"/>
+                </a:solidFill>
+                <a:latin typeface="Calibri" pitchFamily="34" charset="0"/>
+                <a:ea typeface="Calibri" pitchFamily="34" charset="-122"/>
+                <a:cs typeface="Calibri" pitchFamily="34" charset="-120"/>
+              </a:rPr>
+              <a:t>lowest per success on set 2, $0.0076 vs $0.0093–0.0106.</a:t>
+            </a:r>
+            <a:endParaRPr lang="en-US" sz="1000" dirty="0"/>
+          </a:p>
+          <a:p>
+            <a:pPr marL="342900" indent="-342900">
+              <a:spcAft>
+                <a:spcPts val="800"/>
+              </a:spcAft>
+              <a:buSzPct val="100000"/>
+              <a:buChar char="•"/>
+            </a:pPr>
+            <a:r>
+              <a:rPr lang="en-US" sz="1000" b="1" dirty="0">
+                <a:solidFill>
+                  <a:srgbClr val="38D6E8"/>
+                </a:solidFill>
+                <a:latin typeface="Calibri" pitchFamily="34" charset="0"/>
+                <a:ea typeface="Calibri" pitchFamily="34" charset="-122"/>
+                <a:cs typeface="Calibri" pitchFamily="34" charset="-120"/>
+              </a:rPr>
+              <a:t>Where it comes from: </a:t>
+            </a:r>
+            <a:pPr indent="0" marL="0">
+              <a:buNone/>
+            </a:pPr>
+            <a:r>
+              <a:rPr lang="en-US" sz="1000" dirty="0">
+                <a:solidFill>
+                  <a:srgbClr val="EDEDED"/>
+                </a:solidFill>
+                <a:latin typeface="Calibri" pitchFamily="34" charset="0"/>
+                <a:ea typeface="Calibri" pitchFamily="34" charset="-122"/>
+                <a:cs typeface="Calibri" pitchFamily="34" charset="-120"/>
+              </a:rPr>
+              <a:t>history tasks, 12/12 vs 3–4/12. Code, stale and unrelated tasks were similar for all.</a:t>
+            </a:r>
+            <a:endParaRPr lang="en-US" sz="1000" dirty="0"/>
+          </a:p>
+          <a:p>
+            <a:pPr marL="342900" indent="-342900">
+              <a:spcAft>
+                <a:spcPts val="800"/>
+              </a:spcAft>
+              <a:buSzPct val="100000"/>
+              <a:buChar char="•"/>
+            </a:pPr>
+            <a:r>
+              <a:rPr lang="en-US" sz="1000" b="1" dirty="0">
+                <a:solidFill>
+                  <a:srgbClr val="38D6E8"/>
+                </a:solidFill>
+                <a:latin typeface="Calibri" pitchFamily="34" charset="0"/>
+                <a:ea typeface="Calibri" pitchFamily="34" charset="-122"/>
+                <a:cs typeface="Calibri" pitchFamily="34" charset="-120"/>
+              </a:rPr>
+              <a:t>Bigger model: </a:t>
+            </a:r>
+            <a:pPr indent="0" marL="0">
+              <a:buNone/>
+            </a:pPr>
+            <a:r>
+              <a:rPr lang="en-US" sz="1000" dirty="0">
+                <a:solidFill>
+                  <a:srgbClr val="EDEDED"/>
+                </a:solidFill>
+                <a:latin typeface="Calibri" pitchFamily="34" charset="0"/>
+                <a:ea typeface="Calibri" pitchFamily="34" charset="-122"/>
+                <a:cs typeface="Calibri" pitchFamily="34" charset="-120"/>
+              </a:rPr>
+              <a:t>Sonnet without memory, $0.092 per success (11× more) at 75%.</a:t>
+            </a:r>
+            <a:endParaRPr lang="en-US" sz="1000" dirty="0"/>
           </a:p>
         </p:txBody>
       </p:sp>
@@ -7188,7 +7755,7 @@
                 <a:ea typeface="Calibri" pitchFamily="34" charset="-122"/>
                 <a:cs typeface="Calibri" pitchFamily="34" charset="-120"/>
               </a:rPr>
-              <a:t>Multi-session builds: about half the tokens</a:t>
+              <a:t>Building a real game: about half the tokens</a:t>
             </a:r>
             <a:endParaRPr lang="en-US" sz="3200" dirty="0"/>
           </a:p>
@@ -7196,13 +7763,13 @@
       </p:sp>
       <p:graphicFrame>
         <p:nvGraphicFramePr>
-          <p:cNvPr id="3" name="Input tokens, same game (M, 16 sessions)" descr=""/>
+          <p:cNvPr id="3" name="Input tokens, Blade Swarm (millions, 16 sessions)" descr=""/>
           <p:cNvGraphicFramePr/>
           <p:nvPr/>
         </p:nvGraphicFramePr>
         <p:xfrm>
-          <a:off x="365760" y="1097280"/>
-          <a:ext cx="4206240" cy="2377440"/>
+          <a:off x="365760" y="960120"/>
+          <a:ext cx="4206240" cy="2331720"/>
         </p:xfrm>
         <a:graphic xmlns:a="http://schemas.openxmlformats.org/drawingml/2006/main">
           <a:graphicData uri="http://schemas.openxmlformats.org/drawingml/2006/chart">
@@ -7225,7 +7792,7 @@
           </p:nvPr>
         </p:nvGraphicFramePr>
         <p:xfrm>
-          <a:off x="457200" y="3566160"/>
+          <a:off x="457200" y="3383280"/>
           <a:ext cx="4114800" cy="914400"/>
         </p:xfrm>
         <a:graphic>
@@ -7233,12 +7800,12 @@
             <a:tbl>
               <a:tblPr/>
               <a:tblGrid>
-                <a:gridCol w="1371600"/>
+                <a:gridCol w="1463040"/>
                 <a:gridCol w="731520"/>
-                <a:gridCol w="1005840"/>
-                <a:gridCol w="1005840"/>
+                <a:gridCol w="960120"/>
+                <a:gridCol w="960120"/>
               </a:tblGrid>
-              <a:tr h="274320">
+              <a:tr h="256032">
                 <a:tc>
                   <a:txBody>
                     <a:bodyPr/>
@@ -7247,7 +7814,7 @@
                       <a:pPr algn="l" indent="0" marL="0">
                         <a:buNone/>
                       </a:pPr>
-                      <a:endParaRPr lang="en-US" sz="1200" dirty="0">
+                      <a:endParaRPr lang="en-US" sz="1100" dirty="0">
                         <a:latin typeface="Calibri" charset="0"/>
                         <a:ea typeface="Calibri" charset="0"/>
                         <a:cs typeface="Calibri" charset="0"/>
@@ -7305,7 +7872,7 @@
                         <a:buNone/>
                       </a:pPr>
                       <a:r>
-                        <a:rPr lang="en-US" sz="1200" b="1" dirty="0">
+                        <a:rPr lang="en-US" sz="1100" b="1" dirty="0">
                           <a:solidFill>
                             <a:srgbClr val="9AA0AA"/>
                           </a:solidFill>
@@ -7314,6 +7881,280 @@
                           <a:cs typeface="Calibri" pitchFamily="34" charset="-120"/>
                         </a:rPr>
                         <a:t>None</a:t>
+                      </a:r>
+                      <a:endParaRPr lang="en-US" sz="1100" dirty="0">
+                        <a:latin typeface="Calibri" charset="0"/>
+                        <a:ea typeface="Calibri" charset="0"/>
+                        <a:cs typeface="Calibri" charset="0"/>
+                      </a:endParaRPr>
+                    </a:p>
+                  </a:txBody>
+                  <a:tcPr marL="91440" marR="91440" marT="45720" marB="45720">
+                    <a:lnL w="9525" cap="flat" cmpd="sng" algn="ctr">
+                      <a:solidFill>
+                        <a:srgbClr val="232834"/>
+                      </a:solidFill>
+                      <a:prstDash val="solid"/>
+                      <a:round/>
+                      <a:headEnd type="none" w="med" len="med"/>
+                      <a:tailEnd type="none" w="med" len="med"/>
+                    </a:lnL>
+                    <a:lnR w="9525" cap="flat" cmpd="sng" algn="ctr">
+                      <a:solidFill>
+                        <a:srgbClr val="232834"/>
+                      </a:solidFill>
+                      <a:prstDash val="solid"/>
+                      <a:round/>
+                      <a:headEnd type="none" w="med" len="med"/>
+                      <a:tailEnd type="none" w="med" len="med"/>
+                    </a:lnR>
+                    <a:lnT w="9525" cap="flat" cmpd="sng" algn="ctr">
+                      <a:solidFill>
+                        <a:srgbClr val="232834"/>
+                      </a:solidFill>
+                      <a:prstDash val="solid"/>
+                      <a:round/>
+                      <a:headEnd type="none" w="med" len="med"/>
+                      <a:tailEnd type="none" w="med" len="med"/>
+                    </a:lnT>
+                    <a:lnB w="9525" cap="flat" cmpd="sng" algn="ctr">
+                      <a:solidFill>
+                        <a:srgbClr val="232834"/>
+                      </a:solidFill>
+                      <a:prstDash val="solid"/>
+                      <a:round/>
+                      <a:headEnd type="none" w="med" len="med"/>
+                      <a:tailEnd type="none" w="med" len="med"/>
+                    </a:lnB>
+                    <a:solidFill>
+                      <a:srgbClr val="161A22"/>
+                    </a:solidFill>
+                  </a:tcPr>
+                </a:tc>
+                <a:tc>
+                  <a:txBody>
+                    <a:bodyPr/>
+                    <a:lstStyle/>
+                    <a:p>
+                      <a:pPr algn="ctr" indent="0" marL="0">
+                        <a:buNone/>
+                      </a:pPr>
+                      <a:r>
+                        <a:rPr lang="en-US" sz="1100" b="1" dirty="0">
+                          <a:solidFill>
+                            <a:srgbClr val="9AA0AA"/>
+                          </a:solidFill>
+                          <a:latin typeface="Calibri" pitchFamily="34" charset="0"/>
+                          <a:ea typeface="Calibri" pitchFamily="34" charset="-122"/>
+                          <a:cs typeface="Calibri" pitchFamily="34" charset="-120"/>
+                        </a:rPr>
+                        <a:t>AGENTS.md</a:t>
+                      </a:r>
+                      <a:endParaRPr lang="en-US" sz="1100" dirty="0">
+                        <a:latin typeface="Calibri" charset="0"/>
+                        <a:ea typeface="Calibri" charset="0"/>
+                        <a:cs typeface="Calibri" charset="0"/>
+                      </a:endParaRPr>
+                    </a:p>
+                  </a:txBody>
+                  <a:tcPr marL="91440" marR="91440" marT="45720" marB="45720">
+                    <a:lnL w="9525" cap="flat" cmpd="sng" algn="ctr">
+                      <a:solidFill>
+                        <a:srgbClr val="232834"/>
+                      </a:solidFill>
+                      <a:prstDash val="solid"/>
+                      <a:round/>
+                      <a:headEnd type="none" w="med" len="med"/>
+                      <a:tailEnd type="none" w="med" len="med"/>
+                    </a:lnL>
+                    <a:lnR w="9525" cap="flat" cmpd="sng" algn="ctr">
+                      <a:solidFill>
+                        <a:srgbClr val="232834"/>
+                      </a:solidFill>
+                      <a:prstDash val="solid"/>
+                      <a:round/>
+                      <a:headEnd type="none" w="med" len="med"/>
+                      <a:tailEnd type="none" w="med" len="med"/>
+                    </a:lnR>
+                    <a:lnT w="9525" cap="flat" cmpd="sng" algn="ctr">
+                      <a:solidFill>
+                        <a:srgbClr val="232834"/>
+                      </a:solidFill>
+                      <a:prstDash val="solid"/>
+                      <a:round/>
+                      <a:headEnd type="none" w="med" len="med"/>
+                      <a:tailEnd type="none" w="med" len="med"/>
+                    </a:lnT>
+                    <a:lnB w="9525" cap="flat" cmpd="sng" algn="ctr">
+                      <a:solidFill>
+                        <a:srgbClr val="232834"/>
+                      </a:solidFill>
+                      <a:prstDash val="solid"/>
+                      <a:round/>
+                      <a:headEnd type="none" w="med" len="med"/>
+                      <a:tailEnd type="none" w="med" len="med"/>
+                    </a:lnB>
+                    <a:solidFill>
+                      <a:srgbClr val="161A22"/>
+                    </a:solidFill>
+                  </a:tcPr>
+                </a:tc>
+                <a:tc>
+                  <a:txBody>
+                    <a:bodyPr/>
+                    <a:lstStyle/>
+                    <a:p>
+                      <a:pPr algn="ctr" indent="0" marL="0">
+                        <a:buNone/>
+                      </a:pPr>
+                      <a:r>
+                        <a:rPr lang="en-US" sz="1100" b="1" dirty="0">
+                          <a:solidFill>
+                            <a:srgbClr val="8B7CF6"/>
+                          </a:solidFill>
+                          <a:latin typeface="Calibri" pitchFamily="34" charset="0"/>
+                          <a:ea typeface="Calibri" pitchFamily="34" charset="-122"/>
+                          <a:cs typeface="Calibri" pitchFamily="34" charset="-120"/>
+                        </a:rPr>
+                        <a:t>DevMemory</a:t>
+                      </a:r>
+                      <a:endParaRPr lang="en-US" sz="1100" dirty="0">
+                        <a:latin typeface="Calibri" charset="0"/>
+                        <a:ea typeface="Calibri" charset="0"/>
+                        <a:cs typeface="Calibri" charset="0"/>
+                      </a:endParaRPr>
+                    </a:p>
+                  </a:txBody>
+                  <a:tcPr marL="91440" marR="91440" marT="45720" marB="45720">
+                    <a:lnL w="9525" cap="flat" cmpd="sng" algn="ctr">
+                      <a:solidFill>
+                        <a:srgbClr val="232834"/>
+                      </a:solidFill>
+                      <a:prstDash val="solid"/>
+                      <a:round/>
+                      <a:headEnd type="none" w="med" len="med"/>
+                      <a:tailEnd type="none" w="med" len="med"/>
+                    </a:lnL>
+                    <a:lnR w="9525" cap="flat" cmpd="sng" algn="ctr">
+                      <a:solidFill>
+                        <a:srgbClr val="232834"/>
+                      </a:solidFill>
+                      <a:prstDash val="solid"/>
+                      <a:round/>
+                      <a:headEnd type="none" w="med" len="med"/>
+                      <a:tailEnd type="none" w="med" len="med"/>
+                    </a:lnR>
+                    <a:lnT w="9525" cap="flat" cmpd="sng" algn="ctr">
+                      <a:solidFill>
+                        <a:srgbClr val="232834"/>
+                      </a:solidFill>
+                      <a:prstDash val="solid"/>
+                      <a:round/>
+                      <a:headEnd type="none" w="med" len="med"/>
+                      <a:tailEnd type="none" w="med" len="med"/>
+                    </a:lnT>
+                    <a:lnB w="9525" cap="flat" cmpd="sng" algn="ctr">
+                      <a:solidFill>
+                        <a:srgbClr val="232834"/>
+                      </a:solidFill>
+                      <a:prstDash val="solid"/>
+                      <a:round/>
+                      <a:headEnd type="none" w="med" len="med"/>
+                      <a:tailEnd type="none" w="med" len="med"/>
+                    </a:lnB>
+                    <a:solidFill>
+                      <a:srgbClr val="161A22"/>
+                    </a:solidFill>
+                  </a:tcPr>
+                </a:tc>
+              </a:tr>
+              <a:tr h="256032">
+                <a:tc>
+                  <a:txBody>
+                    <a:bodyPr/>
+                    <a:lstStyle/>
+                    <a:p>
+                      <a:pPr indent="0" marL="0">
+                        <a:buNone/>
+                      </a:pPr>
+                      <a:r>
+                        <a:rPr lang="en-US" sz="1100" dirty="0">
+                          <a:solidFill>
+                            <a:srgbClr val="EDEDED"/>
+                          </a:solidFill>
+                          <a:latin typeface="Calibri" pitchFamily="34" charset="0"/>
+                          <a:ea typeface="Calibri" pitchFamily="34" charset="-122"/>
+                          <a:cs typeface="Calibri" pitchFamily="34" charset="-120"/>
+                        </a:rPr>
+                        <a:t>Cost</a:t>
+                      </a:r>
+                      <a:endParaRPr lang="en-US" sz="1100" dirty="0">
+                        <a:latin typeface="Calibri" charset="0"/>
+                        <a:ea typeface="Calibri" charset="0"/>
+                        <a:cs typeface="Calibri" charset="0"/>
+                      </a:endParaRPr>
+                    </a:p>
+                  </a:txBody>
+                  <a:tcPr marL="91440" marR="91440" marT="45720" marB="45720">
+                    <a:lnL w="9525" cap="flat" cmpd="sng" algn="ctr">
+                      <a:solidFill>
+                        <a:srgbClr val="232834"/>
+                      </a:solidFill>
+                      <a:prstDash val="solid"/>
+                      <a:round/>
+                      <a:headEnd type="none" w="med" len="med"/>
+                      <a:tailEnd type="none" w="med" len="med"/>
+                    </a:lnL>
+                    <a:lnR w="9525" cap="flat" cmpd="sng" algn="ctr">
+                      <a:solidFill>
+                        <a:srgbClr val="232834"/>
+                      </a:solidFill>
+                      <a:prstDash val="solid"/>
+                      <a:round/>
+                      <a:headEnd type="none" w="med" len="med"/>
+                      <a:tailEnd type="none" w="med" len="med"/>
+                    </a:lnR>
+                    <a:lnT w="9525" cap="flat" cmpd="sng" algn="ctr">
+                      <a:solidFill>
+                        <a:srgbClr val="232834"/>
+                      </a:solidFill>
+                      <a:prstDash val="solid"/>
+                      <a:round/>
+                      <a:headEnd type="none" w="med" len="med"/>
+                      <a:tailEnd type="none" w="med" len="med"/>
+                    </a:lnT>
+                    <a:lnB w="9525" cap="flat" cmpd="sng" algn="ctr">
+                      <a:solidFill>
+                        <a:srgbClr val="232834"/>
+                      </a:solidFill>
+                      <a:prstDash val="solid"/>
+                      <a:round/>
+                      <a:headEnd type="none" w="med" len="med"/>
+                      <a:tailEnd type="none" w="med" len="med"/>
+                    </a:lnB>
+                    <a:solidFill>
+                      <a:srgbClr val="161A22"/>
+                    </a:solidFill>
+                  </a:tcPr>
+                </a:tc>
+                <a:tc>
+                  <a:txBody>
+                    <a:bodyPr/>
+                    <a:lstStyle/>
+                    <a:p>
+                      <a:pPr algn="ctr" indent="0" marL="0">
+                        <a:buNone/>
+                      </a:pPr>
+                      <a:r>
+                        <a:rPr lang="en-US" sz="1200" dirty="0">
+                          <a:solidFill>
+                            <a:srgbClr val="EDEDED"/>
+                          </a:solidFill>
+                          <a:latin typeface="Calibri" pitchFamily="34" charset="0"/>
+                          <a:ea typeface="Calibri" pitchFamily="34" charset="-122"/>
+                          <a:cs typeface="Calibri" pitchFamily="34" charset="-120"/>
+                        </a:rPr>
+                        <a:t>$3.41</a:t>
                       </a:r>
                       <a:endParaRPr lang="en-US" sz="1200" dirty="0">
                         <a:latin typeface="Calibri" charset="0"/>
@@ -7373,15 +8214,15 @@
                         <a:buNone/>
                       </a:pPr>
                       <a:r>
-                        <a:rPr lang="en-US" sz="1200" b="1" dirty="0">
+                        <a:rPr lang="en-US" sz="1200" dirty="0">
                           <a:solidFill>
-                            <a:srgbClr val="9AA0AA"/>
+                            <a:srgbClr val="EDEDED"/>
                           </a:solidFill>
                           <a:latin typeface="Calibri" pitchFamily="34" charset="0"/>
                           <a:ea typeface="Calibri" pitchFamily="34" charset="-122"/>
                           <a:cs typeface="Calibri" pitchFamily="34" charset="-120"/>
                         </a:rPr>
-                        <a:t>AGENTS.md</a:t>
+                        <a:t>$2.88</a:t>
                       </a:r>
                       <a:endParaRPr lang="en-US" sz="1200" dirty="0">
                         <a:latin typeface="Calibri" charset="0"/>
@@ -7449,7 +8290,7 @@
                           <a:ea typeface="Calibri" pitchFamily="34" charset="-122"/>
                           <a:cs typeface="Calibri" pitchFamily="34" charset="-120"/>
                         </a:rPr>
-                        <a:t>DevMemory</a:t>
+                        <a:t>$2.48</a:t>
                       </a:r>
                       <a:endParaRPr lang="en-US" sz="1200" dirty="0">
                         <a:latin typeface="Calibri" charset="0"/>
@@ -7501,13 +8342,81 @@
                   </a:tcPr>
                 </a:tc>
               </a:tr>
-              <a:tr h="274320">
+              <a:tr h="256032">
                 <a:tc>
                   <a:txBody>
                     <a:bodyPr/>
                     <a:lstStyle/>
                     <a:p>
                       <a:pPr indent="0" marL="0">
+                        <a:buNone/>
+                      </a:pPr>
+                      <a:r>
+                        <a:rPr lang="en-US" sz="1100" dirty="0">
+                          <a:solidFill>
+                            <a:srgbClr val="EDEDED"/>
+                          </a:solidFill>
+                          <a:latin typeface="Calibri" pitchFamily="34" charset="0"/>
+                          <a:ea typeface="Calibri" pitchFamily="34" charset="-122"/>
+                          <a:cs typeface="Calibri" pitchFamily="34" charset="-120"/>
+                        </a:rPr>
+                        <a:t>Playable (human)</a:t>
+                      </a:r>
+                      <a:endParaRPr lang="en-US" sz="1100" dirty="0">
+                        <a:latin typeface="Calibri" charset="0"/>
+                        <a:ea typeface="Calibri" charset="0"/>
+                        <a:cs typeface="Calibri" charset="0"/>
+                      </a:endParaRPr>
+                    </a:p>
+                  </a:txBody>
+                  <a:tcPr marL="91440" marR="91440" marT="45720" marB="45720">
+                    <a:lnL w="9525" cap="flat" cmpd="sng" algn="ctr">
+                      <a:solidFill>
+                        <a:srgbClr val="232834"/>
+                      </a:solidFill>
+                      <a:prstDash val="solid"/>
+                      <a:round/>
+                      <a:headEnd type="none" w="med" len="med"/>
+                      <a:tailEnd type="none" w="med" len="med"/>
+                    </a:lnL>
+                    <a:lnR w="9525" cap="flat" cmpd="sng" algn="ctr">
+                      <a:solidFill>
+                        <a:srgbClr val="232834"/>
+                      </a:solidFill>
+                      <a:prstDash val="solid"/>
+                      <a:round/>
+                      <a:headEnd type="none" w="med" len="med"/>
+                      <a:tailEnd type="none" w="med" len="med"/>
+                    </a:lnR>
+                    <a:lnT w="9525" cap="flat" cmpd="sng" algn="ctr">
+                      <a:solidFill>
+                        <a:srgbClr val="232834"/>
+                      </a:solidFill>
+                      <a:prstDash val="solid"/>
+                      <a:round/>
+                      <a:headEnd type="none" w="med" len="med"/>
+                      <a:tailEnd type="none" w="med" len="med"/>
+                    </a:lnT>
+                    <a:lnB w="9525" cap="flat" cmpd="sng" algn="ctr">
+                      <a:solidFill>
+                        <a:srgbClr val="232834"/>
+                      </a:solidFill>
+                      <a:prstDash val="solid"/>
+                      <a:round/>
+                      <a:headEnd type="none" w="med" len="med"/>
+                      <a:tailEnd type="none" w="med" len="med"/>
+                    </a:lnB>
+                    <a:solidFill>
+                      <a:srgbClr val="161A22"/>
+                    </a:solidFill>
+                  </a:tcPr>
+                </a:tc>
+                <a:tc>
+                  <a:txBody>
+                    <a:bodyPr/>
+                    <a:lstStyle/>
+                    <a:p>
+                      <a:pPr algn="ctr" indent="0" marL="0">
                         <a:buNone/>
                       </a:pPr>
                       <a:r>
@@ -7519,7 +8428,7 @@
                           <a:ea typeface="Calibri" pitchFamily="34" charset="-122"/>
                           <a:cs typeface="Calibri" pitchFamily="34" charset="-120"/>
                         </a:rPr>
-                        <a:t>Cost</a:t>
+                        <a:t>yes</a:t>
                       </a:r>
                       <a:endParaRPr lang="en-US" sz="1200" dirty="0">
                         <a:latin typeface="Calibri" charset="0"/>
@@ -7579,212 +8488,6 @@
                         <a:buNone/>
                       </a:pPr>
                       <a:r>
-                        <a:rPr lang="en-US" sz="1300" dirty="0">
-                          <a:solidFill>
-                            <a:srgbClr val="EDEDED"/>
-                          </a:solidFill>
-                          <a:latin typeface="Calibri" pitchFamily="34" charset="0"/>
-                          <a:ea typeface="Calibri" pitchFamily="34" charset="-122"/>
-                          <a:cs typeface="Calibri" pitchFamily="34" charset="-120"/>
-                        </a:rPr>
-                        <a:t>$3.41</a:t>
-                      </a:r>
-                      <a:endParaRPr lang="en-US" sz="1300" dirty="0">
-                        <a:latin typeface="Calibri" charset="0"/>
-                        <a:ea typeface="Calibri" charset="0"/>
-                        <a:cs typeface="Calibri" charset="0"/>
-                      </a:endParaRPr>
-                    </a:p>
-                  </a:txBody>
-                  <a:tcPr marL="91440" marR="91440" marT="45720" marB="45720">
-                    <a:lnL w="9525" cap="flat" cmpd="sng" algn="ctr">
-                      <a:solidFill>
-                        <a:srgbClr val="232834"/>
-                      </a:solidFill>
-                      <a:prstDash val="solid"/>
-                      <a:round/>
-                      <a:headEnd type="none" w="med" len="med"/>
-                      <a:tailEnd type="none" w="med" len="med"/>
-                    </a:lnL>
-                    <a:lnR w="9525" cap="flat" cmpd="sng" algn="ctr">
-                      <a:solidFill>
-                        <a:srgbClr val="232834"/>
-                      </a:solidFill>
-                      <a:prstDash val="solid"/>
-                      <a:round/>
-                      <a:headEnd type="none" w="med" len="med"/>
-                      <a:tailEnd type="none" w="med" len="med"/>
-                    </a:lnR>
-                    <a:lnT w="9525" cap="flat" cmpd="sng" algn="ctr">
-                      <a:solidFill>
-                        <a:srgbClr val="232834"/>
-                      </a:solidFill>
-                      <a:prstDash val="solid"/>
-                      <a:round/>
-                      <a:headEnd type="none" w="med" len="med"/>
-                      <a:tailEnd type="none" w="med" len="med"/>
-                    </a:lnT>
-                    <a:lnB w="9525" cap="flat" cmpd="sng" algn="ctr">
-                      <a:solidFill>
-                        <a:srgbClr val="232834"/>
-                      </a:solidFill>
-                      <a:prstDash val="solid"/>
-                      <a:round/>
-                      <a:headEnd type="none" w="med" len="med"/>
-                      <a:tailEnd type="none" w="med" len="med"/>
-                    </a:lnB>
-                    <a:solidFill>
-                      <a:srgbClr val="161A22"/>
-                    </a:solidFill>
-                  </a:tcPr>
-                </a:tc>
-                <a:tc>
-                  <a:txBody>
-                    <a:bodyPr/>
-                    <a:lstStyle/>
-                    <a:p>
-                      <a:pPr algn="ctr" indent="0" marL="0">
-                        <a:buNone/>
-                      </a:pPr>
-                      <a:r>
-                        <a:rPr lang="en-US" sz="1300" dirty="0">
-                          <a:solidFill>
-                            <a:srgbClr val="EDEDED"/>
-                          </a:solidFill>
-                          <a:latin typeface="Calibri" pitchFamily="34" charset="0"/>
-                          <a:ea typeface="Calibri" pitchFamily="34" charset="-122"/>
-                          <a:cs typeface="Calibri" pitchFamily="34" charset="-120"/>
-                        </a:rPr>
-                        <a:t>$2.88</a:t>
-                      </a:r>
-                      <a:endParaRPr lang="en-US" sz="1300" dirty="0">
-                        <a:latin typeface="Calibri" charset="0"/>
-                        <a:ea typeface="Calibri" charset="0"/>
-                        <a:cs typeface="Calibri" charset="0"/>
-                      </a:endParaRPr>
-                    </a:p>
-                  </a:txBody>
-                  <a:tcPr marL="91440" marR="91440" marT="45720" marB="45720">
-                    <a:lnL w="9525" cap="flat" cmpd="sng" algn="ctr">
-                      <a:solidFill>
-                        <a:srgbClr val="232834"/>
-                      </a:solidFill>
-                      <a:prstDash val="solid"/>
-                      <a:round/>
-                      <a:headEnd type="none" w="med" len="med"/>
-                      <a:tailEnd type="none" w="med" len="med"/>
-                    </a:lnL>
-                    <a:lnR w="9525" cap="flat" cmpd="sng" algn="ctr">
-                      <a:solidFill>
-                        <a:srgbClr val="232834"/>
-                      </a:solidFill>
-                      <a:prstDash val="solid"/>
-                      <a:round/>
-                      <a:headEnd type="none" w="med" len="med"/>
-                      <a:tailEnd type="none" w="med" len="med"/>
-                    </a:lnR>
-                    <a:lnT w="9525" cap="flat" cmpd="sng" algn="ctr">
-                      <a:solidFill>
-                        <a:srgbClr val="232834"/>
-                      </a:solidFill>
-                      <a:prstDash val="solid"/>
-                      <a:round/>
-                      <a:headEnd type="none" w="med" len="med"/>
-                      <a:tailEnd type="none" w="med" len="med"/>
-                    </a:lnT>
-                    <a:lnB w="9525" cap="flat" cmpd="sng" algn="ctr">
-                      <a:solidFill>
-                        <a:srgbClr val="232834"/>
-                      </a:solidFill>
-                      <a:prstDash val="solid"/>
-                      <a:round/>
-                      <a:headEnd type="none" w="med" len="med"/>
-                      <a:tailEnd type="none" w="med" len="med"/>
-                    </a:lnB>
-                    <a:solidFill>
-                      <a:srgbClr val="161A22"/>
-                    </a:solidFill>
-                  </a:tcPr>
-                </a:tc>
-                <a:tc>
-                  <a:txBody>
-                    <a:bodyPr/>
-                    <a:lstStyle/>
-                    <a:p>
-                      <a:pPr algn="ctr" indent="0" marL="0">
-                        <a:buNone/>
-                      </a:pPr>
-                      <a:r>
-                        <a:rPr lang="en-US" sz="1300" b="1" dirty="0">
-                          <a:solidFill>
-                            <a:srgbClr val="8B7CF6"/>
-                          </a:solidFill>
-                          <a:latin typeface="Calibri" pitchFamily="34" charset="0"/>
-                          <a:ea typeface="Calibri" pitchFamily="34" charset="-122"/>
-                          <a:cs typeface="Calibri" pitchFamily="34" charset="-120"/>
-                        </a:rPr>
-                        <a:t>$2.48</a:t>
-                      </a:r>
-                      <a:endParaRPr lang="en-US" sz="1300" dirty="0">
-                        <a:latin typeface="Calibri" charset="0"/>
-                        <a:ea typeface="Calibri" charset="0"/>
-                        <a:cs typeface="Calibri" charset="0"/>
-                      </a:endParaRPr>
-                    </a:p>
-                  </a:txBody>
-                  <a:tcPr marL="91440" marR="91440" marT="45720" marB="45720">
-                    <a:lnL w="9525" cap="flat" cmpd="sng" algn="ctr">
-                      <a:solidFill>
-                        <a:srgbClr val="232834"/>
-                      </a:solidFill>
-                      <a:prstDash val="solid"/>
-                      <a:round/>
-                      <a:headEnd type="none" w="med" len="med"/>
-                      <a:tailEnd type="none" w="med" len="med"/>
-                    </a:lnL>
-                    <a:lnR w="9525" cap="flat" cmpd="sng" algn="ctr">
-                      <a:solidFill>
-                        <a:srgbClr val="232834"/>
-                      </a:solidFill>
-                      <a:prstDash val="solid"/>
-                      <a:round/>
-                      <a:headEnd type="none" w="med" len="med"/>
-                      <a:tailEnd type="none" w="med" len="med"/>
-                    </a:lnR>
-                    <a:lnT w="9525" cap="flat" cmpd="sng" algn="ctr">
-                      <a:solidFill>
-                        <a:srgbClr val="232834"/>
-                      </a:solidFill>
-                      <a:prstDash val="solid"/>
-                      <a:round/>
-                      <a:headEnd type="none" w="med" len="med"/>
-                      <a:tailEnd type="none" w="med" len="med"/>
-                    </a:lnT>
-                    <a:lnB w="9525" cap="flat" cmpd="sng" algn="ctr">
-                      <a:solidFill>
-                        <a:srgbClr val="232834"/>
-                      </a:solidFill>
-                      <a:prstDash val="solid"/>
-                      <a:round/>
-                      <a:headEnd type="none" w="med" len="med"/>
-                      <a:tailEnd type="none" w="med" len="med"/>
-                    </a:lnB>
-                    <a:solidFill>
-                      <a:srgbClr val="161A22"/>
-                    </a:solidFill>
-                  </a:tcPr>
-                </a:tc>
-              </a:tr>
-              <a:tr h="274320">
-                <a:tc>
-                  <a:txBody>
-                    <a:bodyPr/>
-                    <a:lstStyle/>
-                    <a:p>
-                      <a:pPr indent="0" marL="0">
-                        <a:buNone/>
-                      </a:pPr>
-                      <a:r>
                         <a:rPr lang="en-US" sz="1200" dirty="0">
                           <a:solidFill>
                             <a:srgbClr val="EDEDED"/>
@@ -7793,7 +8496,7 @@
                           <a:ea typeface="Calibri" pitchFamily="34" charset="-122"/>
                           <a:cs typeface="Calibri" pitchFamily="34" charset="-120"/>
                         </a:rPr>
-                        <a:t>Playable (human check)</a:t>
+                        <a:t>yes</a:t>
                       </a:r>
                       <a:endParaRPr lang="en-US" sz="1200" dirty="0">
                         <a:latin typeface="Calibri" charset="0"/>
@@ -7853,143 +8556,7 @@
                         <a:buNone/>
                       </a:pPr>
                       <a:r>
-                        <a:rPr lang="en-US" sz="1300" dirty="0">
-                          <a:solidFill>
-                            <a:srgbClr val="EDEDED"/>
-                          </a:solidFill>
-                          <a:latin typeface="Calibri" pitchFamily="34" charset="0"/>
-                          <a:ea typeface="Calibri" pitchFamily="34" charset="-122"/>
-                          <a:cs typeface="Calibri" pitchFamily="34" charset="-120"/>
-                        </a:rPr>
-                        <a:t>yes</a:t>
-                      </a:r>
-                      <a:endParaRPr lang="en-US" sz="1300" dirty="0">
-                        <a:latin typeface="Calibri" charset="0"/>
-                        <a:ea typeface="Calibri" charset="0"/>
-                        <a:cs typeface="Calibri" charset="0"/>
-                      </a:endParaRPr>
-                    </a:p>
-                  </a:txBody>
-                  <a:tcPr marL="91440" marR="91440" marT="45720" marB="45720">
-                    <a:lnL w="9525" cap="flat" cmpd="sng" algn="ctr">
-                      <a:solidFill>
-                        <a:srgbClr val="232834"/>
-                      </a:solidFill>
-                      <a:prstDash val="solid"/>
-                      <a:round/>
-                      <a:headEnd type="none" w="med" len="med"/>
-                      <a:tailEnd type="none" w="med" len="med"/>
-                    </a:lnL>
-                    <a:lnR w="9525" cap="flat" cmpd="sng" algn="ctr">
-                      <a:solidFill>
-                        <a:srgbClr val="232834"/>
-                      </a:solidFill>
-                      <a:prstDash val="solid"/>
-                      <a:round/>
-                      <a:headEnd type="none" w="med" len="med"/>
-                      <a:tailEnd type="none" w="med" len="med"/>
-                    </a:lnR>
-                    <a:lnT w="9525" cap="flat" cmpd="sng" algn="ctr">
-                      <a:solidFill>
-                        <a:srgbClr val="232834"/>
-                      </a:solidFill>
-                      <a:prstDash val="solid"/>
-                      <a:round/>
-                      <a:headEnd type="none" w="med" len="med"/>
-                      <a:tailEnd type="none" w="med" len="med"/>
-                    </a:lnT>
-                    <a:lnB w="9525" cap="flat" cmpd="sng" algn="ctr">
-                      <a:solidFill>
-                        <a:srgbClr val="232834"/>
-                      </a:solidFill>
-                      <a:prstDash val="solid"/>
-                      <a:round/>
-                      <a:headEnd type="none" w="med" len="med"/>
-                      <a:tailEnd type="none" w="med" len="med"/>
-                    </a:lnB>
-                    <a:solidFill>
-                      <a:srgbClr val="161A22"/>
-                    </a:solidFill>
-                  </a:tcPr>
-                </a:tc>
-                <a:tc>
-                  <a:txBody>
-                    <a:bodyPr/>
-                    <a:lstStyle/>
-                    <a:p>
-                      <a:pPr algn="ctr" indent="0" marL="0">
-                        <a:buNone/>
-                      </a:pPr>
-                      <a:r>
-                        <a:rPr lang="en-US" sz="1300" dirty="0">
-                          <a:solidFill>
-                            <a:srgbClr val="EDEDED"/>
-                          </a:solidFill>
-                          <a:latin typeface="Calibri" pitchFamily="34" charset="0"/>
-                          <a:ea typeface="Calibri" pitchFamily="34" charset="-122"/>
-                          <a:cs typeface="Calibri" pitchFamily="34" charset="-120"/>
-                        </a:rPr>
-                        <a:t>yes</a:t>
-                      </a:r>
-                      <a:endParaRPr lang="en-US" sz="1300" dirty="0">
-                        <a:latin typeface="Calibri" charset="0"/>
-                        <a:ea typeface="Calibri" charset="0"/>
-                        <a:cs typeface="Calibri" charset="0"/>
-                      </a:endParaRPr>
-                    </a:p>
-                  </a:txBody>
-                  <a:tcPr marL="91440" marR="91440" marT="45720" marB="45720">
-                    <a:lnL w="9525" cap="flat" cmpd="sng" algn="ctr">
-                      <a:solidFill>
-                        <a:srgbClr val="232834"/>
-                      </a:solidFill>
-                      <a:prstDash val="solid"/>
-                      <a:round/>
-                      <a:headEnd type="none" w="med" len="med"/>
-                      <a:tailEnd type="none" w="med" len="med"/>
-                    </a:lnL>
-                    <a:lnR w="9525" cap="flat" cmpd="sng" algn="ctr">
-                      <a:solidFill>
-                        <a:srgbClr val="232834"/>
-                      </a:solidFill>
-                      <a:prstDash val="solid"/>
-                      <a:round/>
-                      <a:headEnd type="none" w="med" len="med"/>
-                      <a:tailEnd type="none" w="med" len="med"/>
-                    </a:lnR>
-                    <a:lnT w="9525" cap="flat" cmpd="sng" algn="ctr">
-                      <a:solidFill>
-                        <a:srgbClr val="232834"/>
-                      </a:solidFill>
-                      <a:prstDash val="solid"/>
-                      <a:round/>
-                      <a:headEnd type="none" w="med" len="med"/>
-                      <a:tailEnd type="none" w="med" len="med"/>
-                    </a:lnT>
-                    <a:lnB w="9525" cap="flat" cmpd="sng" algn="ctr">
-                      <a:solidFill>
-                        <a:srgbClr val="232834"/>
-                      </a:solidFill>
-                      <a:prstDash val="solid"/>
-                      <a:round/>
-                      <a:headEnd type="none" w="med" len="med"/>
-                      <a:tailEnd type="none" w="med" len="med"/>
-                    </a:lnB>
-                    <a:solidFill>
-                      <a:srgbClr val="161A22"/>
-                    </a:solidFill>
-                  </a:tcPr>
-                </a:tc>
-                <a:tc>
-                  <a:txBody>
-                    <a:bodyPr/>
-                    <a:lstStyle/>
-                    <a:p>
-                      <a:pPr algn="ctr" indent="0" marL="0">
-                        <a:buNone/>
-                      </a:pPr>
-                      <a:r>
-                        <a:rPr lang="en-US" sz="1300" b="1" dirty="0">
+                        <a:rPr lang="en-US" sz="1200" b="1" dirty="0">
                           <a:solidFill>
                             <a:srgbClr val="8B7CF6"/>
                           </a:solidFill>
@@ -7999,7 +8566,7 @@
                         </a:rPr>
                         <a:t>yes</a:t>
                       </a:r>
-                      <a:endParaRPr lang="en-US" sz="1300" dirty="0">
+                      <a:endParaRPr lang="en-US" sz="1200" dirty="0">
                         <a:latin typeface="Calibri" charset="0"/>
                         <a:ea typeface="Calibri" charset="0"/>
                         <a:cs typeface="Calibri" charset="0"/>
@@ -8055,14 +8622,14 @@
       </p:graphicFrame>
       <p:sp>
         <p:nvSpPr>
-          <p:cNvPr id="5" name="Scripted note"/>
+          <p:cNvPr id="5" name="Table note"/>
           <p:cNvSpPr txBox="1"/>
           <p:nvPr/>
         </p:nvSpPr>
         <p:spPr>
           <a:xfrm>
-            <a:off x="4846320" y="1143000"/>
-            <a:ext cx="3840480" cy="914400"/>
+            <a:off x="457200" y="4343400"/>
+            <a:ext cx="4114800" cy="365760"/>
           </a:xfrm>
           <a:prstGeom prst="rect">
             <a:avLst/>
@@ -8078,24 +8645,7 @@
               <a:buNone/>
             </a:pPr>
             <a:r>
-              <a:rPr lang="en-US" sz="1400" b="1" dirty="0">
-                <a:solidFill>
-                  <a:srgbClr val="38D6E8"/>
-                </a:solidFill>
-                <a:latin typeface="Calibri" pitchFamily="34" charset="0"/>
-                <a:ea typeface="Calibri" pitchFamily="34" charset="-122"/>
-                <a:cs typeface="Calibri" pitchFamily="34" charset="-120"/>
-              </a:rPr>
-              <a:t>Scripted 8-prompt build</a:t>
-            </a:r>
-            <a:endParaRPr lang="en-US" sz="1400" dirty="0"/>
-          </a:p>
-          <a:p>
-            <a:pPr indent="0" marL="0">
-              <a:buNone/>
-            </a:pPr>
-            <a:r>
-              <a:rPr lang="en-US" sz="1200" dirty="0">
+              <a:rPr lang="en-US" sz="1000" dirty="0">
                 <a:solidFill>
                   <a:srgbClr val="9AA0AA"/>
                 </a:solidFill>
@@ -8103,9 +8653,9 @@
                 <a:ea typeface="Calibri" pitchFamily="34" charset="-122"/>
                 <a:cs typeface="Calibri" pitchFamily="34" charset="-120"/>
               </a:rPr>
-              <a:t>DevMemory 0.61M tokens vs 1.06M / 1.20M. The AGENTS.md build crashed in Studio.</a:t>
-            </a:r>
-            <a:endParaRPr lang="en-US" sz="1400" dirty="0"/>
+              <a:t>Same prompts for all three; one run per setup (a case study, not a statistic).</a:t>
+            </a:r>
+            <a:endParaRPr lang="en-US" sz="1000" dirty="0"/>
           </a:p>
         </p:txBody>
       </p:sp>
@@ -8117,12 +8667,12 @@
         </p:nvSpPr>
         <p:spPr>
           <a:xfrm>
-            <a:off x="4800600" y="2206345"/>
-            <a:ext cx="3931920" cy="1439470"/>
+            <a:off x="4832152" y="960120"/>
+            <a:ext cx="3868817" cy="1417320"/>
           </a:xfrm>
           <a:prstGeom prst="roundRect">
             <a:avLst>
-              <a:gd name="adj" fmla="val 5082"/>
+              <a:gd name="adj" fmla="val 5161"/>
             </a:avLst>
           </a:prstGeom>
           <a:solidFill>
@@ -8152,8 +8702,8 @@
         </p:blipFill>
         <p:spPr>
           <a:xfrm>
-            <a:off x="4846320" y="2252065"/>
-            <a:ext cx="3840480" cy="1348030"/>
+            <a:off x="4877872" y="1005840"/>
+            <a:ext cx="3777377" cy="1325880"/>
           </a:xfrm>
           <a:prstGeom prst="rect">
             <a:avLst/>
@@ -8162,14 +8712,41 @@
       </p:pic>
       <p:sp>
         <p:nvSpPr>
-          <p:cNvPr id="8" name="Caption"/>
+          <p:cNvPr id="8" name="Race text panel"/>
+          <p:cNvSpPr/>
+          <p:nvPr/>
+        </p:nvSpPr>
+        <p:spPr>
+          <a:xfrm>
+            <a:off x="4846320" y="2468880"/>
+            <a:ext cx="3840480" cy="2240280"/>
+          </a:xfrm>
+          <a:prstGeom prst="roundRect">
+            <a:avLst>
+              <a:gd name="adj" fmla="val 4082"/>
+            </a:avLst>
+          </a:prstGeom>
+          <a:solidFill>
+            <a:srgbClr val="161A22"/>
+          </a:solidFill>
+          <a:ln w="9525">
+            <a:solidFill>
+              <a:srgbClr val="232834"/>
+            </a:solidFill>
+            <a:prstDash val="solid"/>
+          </a:ln>
+        </p:spPr>
+      </p:sp>
+      <p:sp>
+        <p:nvSpPr>
+          <p:cNvPr id="9" name="Race text"/>
           <p:cNvSpPr txBox="1"/>
           <p:nvPr/>
         </p:nvSpPr>
         <p:spPr>
           <a:xfrm>
-            <a:off x="4846320" y="3794760"/>
-            <a:ext cx="3840480" cy="274320"/>
+            <a:off x="4983480" y="2560320"/>
+            <a:ext cx="3611880" cy="2103120"/>
           </a:xfrm>
           <a:prstGeom prst="rect">
             <a:avLst/>
@@ -8178,63 +8755,112 @@
           <a:ln/>
         </p:spPr>
         <p:txBody>
-          <a:bodyPr wrap="square" lIns="0" tIns="0" rIns="0" bIns="0" rtlCol="0" anchor="ctr"/>
-          <a:lstStyle/>
-          <a:p>
-            <a:pPr indent="0" marL="0">
-              <a:buNone/>
-            </a:pPr>
-            <a:r>
-              <a:rPr lang="en-US" sz="1100" dirty="0">
-                <a:solidFill>
-                  <a:srgbClr val="9AA0AA"/>
-                </a:solidFill>
-                <a:latin typeface="Calibri" pitchFamily="34" charset="0"/>
-                <a:ea typeface="Calibri" pitchFamily="34" charset="-122"/>
-                <a:cs typeface="Calibri" pitchFamily="34" charset="-120"/>
-              </a:rPr>
-              <a:t>Game built by DevMemory-assisted sessions (graveyard arena)</a:t>
-            </a:r>
-            <a:endParaRPr lang="en-US" sz="1100" dirty="0"/>
-          </a:p>
-        </p:txBody>
-      </p:sp>
-      <p:sp>
-        <p:nvSpPr>
-          <p:cNvPr id="9" name="Caveat"/>
-          <p:cNvSpPr txBox="1"/>
-          <p:nvPr/>
-        </p:nvSpPr>
-        <p:spPr>
-          <a:xfrm>
-            <a:off x="4846320" y="4114800"/>
-            <a:ext cx="3840480" cy="548640"/>
-          </a:xfrm>
-          <a:prstGeom prst="rect">
-            <a:avLst/>
-          </a:prstGeom>
-          <a:noFill/>
-          <a:ln/>
-        </p:spPr>
-        <p:txBody>
           <a:bodyPr wrap="square" lIns="0" tIns="0" rIns="0" bIns="0" rtlCol="0" anchor="t"/>
           <a:lstStyle/>
           <a:p>
-            <a:pPr indent="0" marL="0">
-              <a:buNone/>
-            </a:pPr>
-            <a:r>
-              <a:rPr lang="en-US" sz="1050" dirty="0">
-                <a:solidFill>
-                  <a:srgbClr val="F5A524"/>
-                </a:solidFill>
-                <a:latin typeface="Calibri" pitchFamily="34" charset="0"/>
-                <a:ea typeface="Calibri" pitchFamily="34" charset="-122"/>
-                <a:cs typeface="Calibri" pitchFamily="34" charset="-120"/>
-              </a:rPr>
-              <a:t>Caveat: the automated playtest was flaky and sent fix prompts for phantom bugs in every condition, so this token gap is indicative.</a:t>
-            </a:r>
-            <a:endParaRPr lang="en-US" sz="1050" dirty="0"/>
+            <a:pPr marL="342900" indent="-342900">
+              <a:spcAft>
+                <a:spcPts val="800"/>
+              </a:spcAft>
+              <a:buSzPct val="100000"/>
+              <a:buChar char="•"/>
+            </a:pPr>
+            <a:r>
+              <a:rPr lang="en-US" sz="1000" b="1" dirty="0">
+                <a:solidFill>
+                  <a:srgbClr val="38D6E8"/>
+                </a:solidFill>
+                <a:latin typeface="Calibri" pitchFamily="34" charset="0"/>
+                <a:ea typeface="Calibri" pitchFamily="34" charset="-122"/>
+                <a:cs typeface="Calibri" pitchFamily="34" charset="-120"/>
+              </a:rPr>
+              <a:t>What happened: </a:t>
+            </a:r>
+            <a:pPr indent="0" marL="0">
+              <a:buNone/>
+            </a:pPr>
+            <a:r>
+              <a:rPr lang="en-US" sz="1000" dirty="0">
+                <a:solidFill>
+                  <a:srgbClr val="EDEDED"/>
+                </a:solidFill>
+                <a:latin typeface="Calibri" pitchFamily="34" charset="0"/>
+                <a:ea typeface="Calibri" pitchFamily="34" charset="-122"/>
+                <a:cs typeface="Calibri" pitchFamily="34" charset="-120"/>
+              </a:rPr>
+              <a:t>each feature was built in a fresh session. DevMemory used 1.85M input tokens vs 3.08M (no memory) and 3.41M (an AGENTS.md the agent kept itself), at the lowest cost. All three final games are playable.</a:t>
+            </a:r>
+            <a:endParaRPr lang="en-US" sz="1000" dirty="0"/>
+          </a:p>
+          <a:p>
+            <a:pPr marL="342900" indent="-342900">
+              <a:spcAft>
+                <a:spcPts val="800"/>
+              </a:spcAft>
+              <a:buSzPct val="100000"/>
+              <a:buChar char="•"/>
+            </a:pPr>
+            <a:r>
+              <a:rPr lang="en-US" sz="1000" b="1" dirty="0">
+                <a:solidFill>
+                  <a:srgbClr val="38D6E8"/>
+                </a:solidFill>
+                <a:latin typeface="Calibri" pitchFamily="34" charset="0"/>
+                <a:ea typeface="Calibri" pitchFamily="34" charset="-122"/>
+                <a:cs typeface="Calibri" pitchFamily="34" charset="-120"/>
+              </a:rPr>
+              <a:t>Scripted 8-prompt build: </a:t>
+            </a:r>
+            <a:pPr indent="0" marL="0">
+              <a:buNone/>
+            </a:pPr>
+            <a:r>
+              <a:rPr lang="en-US" sz="1000" dirty="0">
+                <a:solidFill>
+                  <a:srgbClr val="EDEDED"/>
+                </a:solidFill>
+                <a:latin typeface="Calibri" pitchFamily="34" charset="0"/>
+                <a:ea typeface="Calibri" pitchFamily="34" charset="-122"/>
+                <a:cs typeface="Calibri" pitchFamily="34" charset="-120"/>
+              </a:rPr>
+              <a:t>DevMemory 0.61M tokens vs 1.06M / 1.20M; the AGENTS.md build crashed on start in Studio.</a:t>
+            </a:r>
+            <a:endParaRPr lang="en-US" sz="1000" dirty="0"/>
+          </a:p>
+          <a:p>
+            <a:pPr marL="342900" indent="-342900">
+              <a:spcAft>
+                <a:spcPts val="800"/>
+              </a:spcAft>
+              <a:buSzPct val="100000"/>
+              <a:buChar char="•"/>
+            </a:pPr>
+            <a:r>
+              <a:rPr lang="en-US" sz="1000" b="1" dirty="0">
+                <a:solidFill>
+                  <a:srgbClr val="38D6E8"/>
+                </a:solidFill>
+                <a:latin typeface="Calibri" pitchFamily="34" charset="0"/>
+                <a:ea typeface="Calibri" pitchFamily="34" charset="-122"/>
+                <a:cs typeface="Calibri" pitchFamily="34" charset="-120"/>
+              </a:rPr>
+              <a:t>Caveat: </a:t>
+            </a:r>
+            <a:pPr indent="0" marL="0">
+              <a:buNone/>
+            </a:pPr>
+            <a:r>
+              <a:rPr lang="en-US" sz="1000" dirty="0">
+                <a:solidFill>
+                  <a:srgbClr val="EDEDED"/>
+                </a:solidFill>
+                <a:latin typeface="Calibri" pitchFamily="34" charset="0"/>
+                <a:ea typeface="Calibri" pitchFamily="34" charset="-122"/>
+                <a:cs typeface="Calibri" pitchFamily="34" charset="-120"/>
+              </a:rPr>
+              <a:t>the automated playtest was flaky and sent fix prompts for phantom bugs to every setup, so read the gap as indicative.</a:t>
+            </a:r>
+            <a:endParaRPr lang="en-US" sz="1000" dirty="0"/>
           </a:p>
         </p:txBody>
       </p:sp>
@@ -8358,12 +8984,12 @@
         </p:nvSpPr>
         <p:spPr>
           <a:xfrm>
-            <a:off x="457200" y="1097280"/>
-            <a:ext cx="4114800" cy="1874520"/>
+            <a:off x="457200" y="1005840"/>
+            <a:ext cx="4114800" cy="2057400"/>
           </a:xfrm>
           <a:prstGeom prst="roundRect">
             <a:avLst>
-              <a:gd name="adj" fmla="val 4878"/>
+              <a:gd name="adj" fmla="val 4444"/>
             </a:avLst>
           </a:prstGeom>
           <a:solidFill>
@@ -8385,8 +9011,8 @@
         </p:nvSpPr>
         <p:spPr>
           <a:xfrm>
-            <a:off x="640080" y="1188720"/>
-            <a:ext cx="3749040" cy="320040"/>
+            <a:off x="640080" y="1078992"/>
+            <a:ext cx="3749040" cy="292608"/>
           </a:xfrm>
           <a:prstGeom prst="rect">
             <a:avLst/>
@@ -8402,7 +9028,7 @@
               <a:buNone/>
             </a:pPr>
             <a:r>
-              <a:rPr lang="en-US" sz="1600" b="1" dirty="0">
+              <a:rPr lang="en-US" sz="1400" b="1" dirty="0">
                 <a:solidFill>
                   <a:srgbClr val="E5484D"/>
                 </a:solidFill>
@@ -8410,9 +9036,9 @@
                 <a:ea typeface="Calibri" pitchFamily="34" charset="-122"/>
                 <a:cs typeface="Calibri" pitchFamily="34" charset="-120"/>
               </a:rPr>
-              <a:t>Web-app race, round 1: we lost</a:t>
-            </a:r>
-            <a:endParaRPr lang="en-US" sz="1600" dirty="0"/>
+              <a:t>Web-app race, round 1: DevMemory lost</a:t>
+            </a:r>
+            <a:endParaRPr lang="en-US" sz="1400" dirty="0"/>
           </a:p>
         </p:txBody>
       </p:sp>
@@ -8424,8 +9050,8 @@
         </p:nvSpPr>
         <p:spPr>
           <a:xfrm>
-            <a:off x="640080" y="1554480"/>
-            <a:ext cx="3749040" cy="1371600"/>
+            <a:off x="640080" y="1389888"/>
+            <a:ext cx="3749040" cy="1645920"/>
           </a:xfrm>
           <a:prstGeom prst="rect">
             <a:avLst/>
@@ -8441,7 +9067,7 @@
               <a:buNone/>
             </a:pPr>
             <a:r>
-              <a:rPr lang="en-US" sz="1400" dirty="0">
+              <a:rPr lang="en-US" sz="1100" dirty="0">
                 <a:solidFill>
                   <a:srgbClr val="EDEDED"/>
                 </a:solidFill>
@@ -8449,9 +9075,9 @@
                 <a:ea typeface="Calibri" pitchFamily="34" charset="-122"/>
                 <a:cs typeface="Calibri" pitchFamily="34" charset="-120"/>
               </a:rPr>
-              <a:t>DevMemory 3/8 features vs 8/8. The bug report never repeated the label colors, and the pack did not carry the session where the user specified them. Fix: origin lineage + verbatim requirement memory.</a:t>
-            </a:r>
-            <a:endParaRPr lang="en-US" sz="1400" dirty="0"/>
+              <a:t>It built 3 of 8 features while the others built 8 of 8. A bug report never repeated the label colors, and the pack did not carry the session where the user had specified them. Fix: origin lineage (always include the session where a feature began) and verbatim requirement memory (keep the user's concrete values: colors, numbers, API paths).</a:t>
+            </a:r>
+            <a:endParaRPr lang="en-US" sz="1100" dirty="0"/>
           </a:p>
         </p:txBody>
       </p:sp>
@@ -8463,12 +9089,12 @@
         </p:nvSpPr>
         <p:spPr>
           <a:xfrm>
-            <a:off x="457200" y="3108960"/>
-            <a:ext cx="4114800" cy="777240"/>
+            <a:off x="457200" y="3154680"/>
+            <a:ext cx="4114800" cy="685800"/>
           </a:xfrm>
           <a:prstGeom prst="roundRect">
             <a:avLst>
-              <a:gd name="adj" fmla="val 11765"/>
+              <a:gd name="adj" fmla="val 13333"/>
             </a:avLst>
           </a:prstGeom>
           <a:solidFill>
@@ -8490,8 +9116,8 @@
         </p:nvSpPr>
         <p:spPr>
           <a:xfrm>
-            <a:off x="640080" y="3154680"/>
-            <a:ext cx="3749040" cy="685800"/>
+            <a:off x="640080" y="3200400"/>
+            <a:ext cx="3749040" cy="594360"/>
           </a:xfrm>
           <a:prstGeom prst="rect">
             <a:avLst/>
@@ -8507,7 +9133,7 @@
               <a:buNone/>
             </a:pPr>
             <a:r>
-              <a:rPr lang="en-US" sz="1300" b="1" dirty="0">
+              <a:rPr lang="en-US" sz="1100" b="1" dirty="0">
                 <a:solidFill>
                   <a:srgbClr val="F5A524"/>
                 </a:solidFill>
@@ -8515,13 +9141,13 @@
                 <a:ea typeface="Calibri" pitchFamily="34" charset="-122"/>
                 <a:cs typeface="Calibri" pitchFamily="34" charset="-120"/>
               </a:rPr>
-              <a:t>Status: </a:t>
-            </a:r>
-            <a:pPr indent="0" marL="0">
-              <a:buNone/>
-            </a:pPr>
-            <a:r>
-              <a:rPr lang="en-US" sz="1300" dirty="0">
+              <a:t>Re-test: </a:t>
+            </a:r>
+            <a:pPr indent="0" marL="0">
+              <a:buNone/>
+            </a:pPr>
+            <a:r>
+              <a:rPr lang="en-US" sz="1100" dirty="0">
                 <a:solidFill>
                   <a:srgbClr val="EDEDED"/>
                 </a:solidFill>
@@ -8531,7 +9157,7 @@
               </a:rPr>
               <a:t>Round 2: all 8/8, no fixes. DevMemory cheapest: $0.74, 580k tok (vs 633k / 847k)</a:t>
             </a:r>
-            <a:endParaRPr lang="en-US" sz="1300" dirty="0"/>
+            <a:endParaRPr lang="en-US" sz="1100" dirty="0"/>
           </a:p>
         </p:txBody>
       </p:sp>
@@ -8543,8 +9169,8 @@
         </p:nvSpPr>
         <p:spPr>
           <a:xfrm>
-            <a:off x="457200" y="4023360"/>
-            <a:ext cx="4114800" cy="685800"/>
+            <a:off x="457200" y="3931920"/>
+            <a:ext cx="4114800" cy="777240"/>
           </a:xfrm>
           <a:prstGeom prst="rect">
             <a:avLst/>
@@ -8560,7 +9186,7 @@
               <a:buNone/>
             </a:pPr>
             <a:r>
-              <a:rPr lang="en-US" sz="1250" b="1" dirty="0">
+              <a:rPr lang="en-US" sz="1050" b="1" dirty="0">
                 <a:solidFill>
                   <a:srgbClr val="38D6E8"/>
                 </a:solidFill>
@@ -8574,7 +9200,7 @@
               <a:buNone/>
             </a:pPr>
             <a:r>
-              <a:rPr lang="en-US" sz="1250" dirty="0">
+              <a:rPr lang="en-US" sz="1050" dirty="0">
                 <a:solidFill>
                   <a:srgbClr val="EDEDED"/>
                 </a:solidFill>
@@ -8582,9 +9208,9 @@
                 <a:ea typeface="Calibri" pitchFamily="34" charset="-122"/>
                 <a:cs typeface="Calibri" pitchFamily="34" charset="-120"/>
               </a:rPr>
-              <a:t>Set 1, Python project: the hand-written file matched DevMemory (20 vs 19 of 24). On set 2 DevMemory led there too (23 vs 17).</a:t>
-            </a:r>
-            <a:endParaRPr lang="en-US" sz="1250" dirty="0"/>
+              <a:t>on the set-1 Python project the hand-written file matched DevMemory (20 vs 19 of 24); on set 2 DevMemory led there (23 vs 17). The retrieval fix cost 3 points on set 1 (86% to 83%).</a:t>
+            </a:r>
+            <a:endParaRPr lang="en-US" sz="1050" dirty="0"/>
           </a:p>
         </p:txBody>
       </p:sp>
@@ -8596,7 +9222,7 @@
         </p:nvSpPr>
         <p:spPr>
           <a:xfrm>
-            <a:off x="4754880" y="1078181"/>
+            <a:off x="4754880" y="963881"/>
             <a:ext cx="3977640" cy="1455518"/>
           </a:xfrm>
           <a:prstGeom prst="roundRect">
@@ -8631,7 +9257,7 @@
         </p:blipFill>
         <p:spPr>
           <a:xfrm>
-            <a:off x="4800600" y="1123901"/>
+            <a:off x="4800600" y="1009601"/>
             <a:ext cx="3886200" cy="1364078"/>
           </a:xfrm>
           <a:prstGeom prst="rect">
@@ -8647,8 +9273,8 @@
         </p:nvSpPr>
         <p:spPr>
           <a:xfrm>
-            <a:off x="4800600" y="2606040"/>
-            <a:ext cx="3886200" cy="640080"/>
+            <a:off x="4800600" y="2450592"/>
+            <a:ext cx="3886200" cy="548640"/>
           </a:xfrm>
           <a:prstGeom prst="rect">
             <a:avLst/>
@@ -8664,7 +9290,7 @@
               <a:buNone/>
             </a:pPr>
             <a:r>
-              <a:rPr lang="en-US" sz="1250" dirty="0">
+              <a:rPr lang="en-US" sz="1050" dirty="0">
                 <a:solidFill>
                   <a:srgbClr val="EDEDED"/>
                 </a:solidFill>
@@ -8672,9 +9298,9 @@
                 <a:ea typeface="Calibri" pitchFamily="34" charset="-122"/>
                 <a:cs typeface="Calibri" pitchFamily="34" charset="-120"/>
               </a:rPr>
-              <a:t>AGENTS.md build passed every static check, yet shows WAVE 0 and no blades. The playtest gate matters.</a:t>
-            </a:r>
-            <a:endParaRPr lang="en-US" sz="1250" dirty="0"/>
+              <a:t>Scripted 8-prompt race: the AGENTS.md build passed every static check, yet crashed on start (WAVE 0, no blades). Code checks alone are not enough.</a:t>
+            </a:r>
+            <a:endParaRPr lang="en-US" sz="1050" dirty="0"/>
           </a:p>
         </p:txBody>
       </p:sp>
@@ -8686,12 +9312,12 @@
         </p:nvSpPr>
         <p:spPr>
           <a:xfrm>
-            <a:off x="4800600" y="3337560"/>
-            <a:ext cx="3886200" cy="1371600"/>
+            <a:off x="4800600" y="3063240"/>
+            <a:ext cx="3886200" cy="1645920"/>
           </a:xfrm>
           <a:prstGeom prst="roundRect">
             <a:avLst>
-              <a:gd name="adj" fmla="val 6667"/>
+              <a:gd name="adj" fmla="val 5556"/>
             </a:avLst>
           </a:prstGeom>
           <a:solidFill>
@@ -8713,8 +9339,8 @@
         </p:nvSpPr>
         <p:spPr>
           <a:xfrm>
-            <a:off x="4983480" y="3401568"/>
-            <a:ext cx="3566160" cy="274320"/>
+            <a:off x="4937760" y="3127248"/>
+            <a:ext cx="3657600" cy="256032"/>
           </a:xfrm>
           <a:prstGeom prst="rect">
             <a:avLst/>
@@ -8730,7 +9356,7 @@
               <a:buNone/>
             </a:pPr>
             <a:r>
-              <a:rPr lang="en-US" sz="1300" b="1" dirty="0">
+              <a:rPr lang="en-US" sz="1200" b="1" dirty="0">
                 <a:solidFill>
                   <a:srgbClr val="F5A524"/>
                 </a:solidFill>
@@ -8740,7 +9366,7 @@
               </a:rPr>
               <a:t>Limitations (all disclosed in RESULTS.md)</a:t>
             </a:r>
-            <a:endParaRPr lang="en-US" sz="1300" dirty="0"/>
+            <a:endParaRPr lang="en-US" sz="1200" dirty="0"/>
           </a:p>
         </p:txBody>
       </p:sp>
@@ -8752,8 +9378,8 @@
         </p:nvSpPr>
         <p:spPr>
           <a:xfrm>
-            <a:off x="4983480" y="3703320"/>
-            <a:ext cx="3566160" cy="914400"/>
+            <a:off x="4937760" y="3429000"/>
+            <a:ext cx="3657600" cy="1234440"/>
           </a:xfrm>
           <a:prstGeom prst="rect">
             <a:avLst/>
@@ -8773,7 +9399,7 @@
               <a:buChar char="•"/>
             </a:pPr>
             <a:r>
-              <a:rPr lang="en-US" sz="1200" dirty="0">
+              <a:rPr lang="en-US" sz="1000" dirty="0">
                 <a:solidFill>
                   <a:srgbClr val="EDEDED"/>
                 </a:solidFill>
@@ -8781,9 +9407,9 @@
                 <a:ea typeface="Calibri" pitchFamily="34" charset="-122"/>
                 <a:cs typeface="Calibri" pitchFamily="34" charset="-120"/>
               </a:rPr>
-              <a:t>Synthetic projects</a:t>
-            </a:r>
-            <a:endParaRPr lang="en-US" sz="1200" dirty="0"/>
+              <a:t>Benchmark projects are synthetic and small</a:t>
+            </a:r>
+            <a:endParaRPr lang="en-US" sz="1000" dirty="0"/>
           </a:p>
           <a:p>
             <a:pPr marL="342900" indent="-342900">
@@ -8794,7 +9420,7 @@
               <a:buChar char="•"/>
             </a:pPr>
             <a:r>
-              <a:rPr lang="en-US" sz="1200" dirty="0">
+              <a:rPr lang="en-US" sz="1000" dirty="0">
                 <a:solidFill>
                   <a:srgbClr val="EDEDED"/>
                 </a:solidFill>
@@ -8802,9 +9428,9 @@
                 <a:ea typeface="Calibri" pitchFamily="34" charset="-122"/>
                 <a:cs typeface="Calibri" pitchFamily="34" charset="-120"/>
               </a:rPr>
-              <a:t>One run per multi-session condition</a:t>
-            </a:r>
-            <a:endParaRPr lang="en-US" sz="1200" dirty="0"/>
+              <a:t>One run per setup in the multi-session builds</a:t>
+            </a:r>
+            <a:endParaRPr lang="en-US" sz="1000" dirty="0"/>
           </a:p>
           <a:p>
             <a:pPr marL="342900" indent="-342900">
@@ -8815,7 +9441,7 @@
               <a:buChar char="•"/>
             </a:pPr>
             <a:r>
-              <a:rPr lang="en-US" sz="1200" dirty="0">
+              <a:rPr lang="en-US" sz="1000" dirty="0">
                 <a:solidFill>
                   <a:srgbClr val="EDEDED"/>
                 </a:solidFill>
@@ -8823,9 +9449,30 @@
                 <a:ea typeface="Calibri" pitchFamily="34" charset="-122"/>
                 <a:cs typeface="Calibri" pitchFamily="34" charset="-120"/>
               </a:rPr>
-              <a:t>Automated playtest was flaky (corrected by a human check)</a:t>
-            </a:r>
-            <a:endParaRPr lang="en-US" sz="1200" dirty="0"/>
+              <a:t>The Roblox race's automated playtest was flaky (checked by a human at the end)</a:t>
+            </a:r>
+            <a:endParaRPr lang="en-US" sz="1000" dirty="0"/>
+          </a:p>
+          <a:p>
+            <a:pPr marL="342900" indent="-342900">
+              <a:spcAft>
+                <a:spcPts val="800"/>
+              </a:spcAft>
+              <a:buSzPct val="100000"/>
+              <a:buChar char="•"/>
+            </a:pPr>
+            <a:r>
+              <a:rPr lang="en-US" sz="1000" dirty="0">
+                <a:solidFill>
+                  <a:srgbClr val="EDEDED"/>
+                </a:solidFill>
+                <a:latin typeface="Calibri" pitchFamily="34" charset="0"/>
+                <a:ea typeface="Calibri" pitchFamily="34" charset="-122"/>
+                <a:cs typeface="Calibri" pitchFamily="34" charset="-120"/>
+              </a:rPr>
+              <a:t>Pack sizes are estimates (characters / 4); costs are API list-price equivalents</a:t>
+            </a:r>
+            <a:endParaRPr lang="en-US" sz="1000" dirty="0"/>
           </a:p>
         </p:txBody>
       </p:sp>
